--- a/slides/MultiAgent-Collaborative-Reasoning-HUST.pptx
+++ b/slides/MultiAgent-Collaborative-Reasoning-HUST.pptx
@@ -26,6 +26,11 @@
     <p:sldId id="264" r:id="rId22"/>
     <p:sldId id="265" r:id="rId23"/>
     <p:sldId id="266" r:id="rId24"/>
+    <p:sldId id="282" r:id="rId48"/>
+    <p:sldId id="283" r:id="rId49"/>
+    <p:sldId id="284" r:id="rId50"/>
+    <p:sldId id="285" r:id="rId51"/>
+    <p:sldId id="286" r:id="rId52"/>
     <p:sldId id="267" r:id="rId25"/>
     <p:sldId id="268" r:id="rId26"/>
     <p:sldId id="269" r:id="rId27"/>
@@ -739,34 +744,22 @@
           <a:p/>
           <a:p>
             <a:r>
-              <a:t>Paper đầu tiên là MIRAGE. Bối cảnh là một tấn công tên CIA: kẻ tấn công chỉ cần truy vấn hộp đen, khiến MAS để lộ output trung gian, rồi suy ra cạnh dựa vào quan sát rằng hai agent nối trực tiếp thì output phụ thuộc ngữ nghĩa mạnh hơn. Lộ topology vừa mất tài sản trí tuệ, vừa lộ agent then chốt để tấn công có chủ đích.</a:t>
-            </a:r>
-          </a:p>
-          <a:p/>
-          <a:p>
-            <a:r>
-              <a:t>Ý tưởng của MIRAGE là: chạy trên đồ thị thật nhưng cho kẻ tấn công thấy một đồ thị ảo. Có ba bước:</a:t>
-            </a:r>
-          </a:p>
-          <a:p>
-            <a:r>
-              <a:t>- Một: tạo phantom topology bằng cách đi dây lại cạnh, đủ khác đồ thị thật theo một ngưỡng rho, lấy cảm hứng từ k-anonymity.</a:t>
-            </a:r>
-          </a:p>
-          <a:p>
-            <a:r>
-              <a:t>- Hai: dùng LLM sinh bằng chứng phụ thuộc giả cho các cạnh ảo, và paraphrase output để giấu các cạnh thật.</a:t>
-            </a:r>
-          </a:p>
-          <a:p>
-            <a:r>
-              <a:t>- Ba: dual-view execution, tức tính toán vẫn trên đồ thị thật, còn phần phơi bày ra ngoài là đồ thị ảo.</a:t>
-            </a:r>
-          </a:p>
-          <a:p/>
-          <a:p>
-            <a:r>
-              <a:t>Bảng bên phải là kết quả trên G-Designer: AUC của tấn công giảm xuống 0.64 đến 0.68, thấp hơn các phòng thủ dựa trên prompt. Tuy nhiên AUC vẫn xa mức 0.5 lý tưởng, chỉ thử với một loại tấn công, và chưa báo cáo chi phí phát sinh.</a:t>
+              <a:t>Paper đầu tiên là MIRAGE. Trong một hệ multi-agent, topology, tức là agent nào gửi kết quả cho agent nào, là bí quyết của hệ thống, vì người ta phải tốn rất nhiều công để tối ưu nó.</a:t>
+            </a:r>
+          </a:p>
+          <a:p>
+            <a:r>
+              <a:t>Vấn đề là có một tấn công tên CIA: kẻ tấn công chỉ cần hỏi hệ thống như người dùng bình thường, ép nó để lộ câu trả lời trung gian của các agent. Hai agent nối trực tiếp với nhau thì câu trả lời thường giống nhau hơn, nên kẻ tấn công đoán ra được cạnh. Biết topology rồi thì họ biết agent nào quan trọng để tấn công, hoặc sao chép thiết kế.</a:t>
+            </a:r>
+          </a:p>
+          <a:p>
+            <a:r>
+              <a:t>Ý tưởng của MIRAGE rất đơn giản: hệ thống vẫn chạy trên đồ thị thật, nhưng thứ kẻ tấn công nhìn thấy lại khớp với một đồ thị giả. Giống như đưa cho kẻ trộm một tấm bản đồ giả.</a:t>
+            </a:r>
+          </a:p>
+          <a:p>
+            <a:r>
+              <a:t>Câu hỏi đặt ra là làm vậy mà hệ thống không trả lời kém đi.</a:t>
             </a:r>
           </a:p>
         </p:txBody>
@@ -842,46 +835,27 @@
           <a:p/>
           <a:p>
             <a:r>
-              <a:t>Paper thứ hai là TIDE. Câu hỏi của bài: khi sự thật bị phân tán, mỗi agent chỉ biết một phần, và có một agent nói dối, thì bằng chứng đúng và sai cạnh tranh nhau ra sao?</a:t>
-            </a:r>
-          </a:p>
-          <a:p/>
-          <a:p>
-            <a:r>
-              <a:t>Tác giả xây 120 môi trường từ truyện Hi-ToM: một đồ vật di chuyển qua nhiều vị trí, 5 agent mỗi người chỉ thấy một đoạn. Thiết kế đảm bảo gộp bằng chứng thì đủ tìm ra vị trí cuối, nhưng không ai tự biết được. Mỗi môi trường chạy hai lần: C0 mọi agent trung thực, C1 agent then chốt nói dối theo ba cách Event, Coverage, Source. Thử với GPT-5.5, DeepSeek-v4-pro và Grok-4.5.</a:t>
-            </a:r>
-          </a:p>
-          <a:p/>
-          <a:p>
-            <a:r>
-              <a:t>Kết quả rất đáng chú ý:</a:t>
-            </a:r>
-          </a:p>
-          <a:p>
-            <a:r>
-              <a:t>- Tỉ lệ đa số trả lời đúng giảm từ 72.5% xuống chỉ 14.17%.</a:t>
-            </a:r>
-          </a:p>
-          <a:p>
-            <a:r>
-              <a:t>- Testimony sai được chấp nhận 70.7%, trong khi testimony đúng chỉ 25.4%.</a:t>
-            </a:r>
-          </a:p>
-          <a:p>
-            <a:r>
-              <a:t>- Bằng chứng sai lan xa hơn: propagation order 2.66 so với 1.33.</a:t>
-            </a:r>
-          </a:p>
-          <a:p/>
-          <a:p>
-            <a:r>
-              <a:t>Thông điệp quan trọng nhất: thảo luận nhiều vòng không sửa sai, mà khuếch đại chiều hướng của bằng chứng ban đầu. Thêm observer giảm 90% số lần đa số theo đáp án sai, nhưng không làm tăng đáp án đúng. Hạn chế là chỉ có một tác vụ hẹp và chưa đề xuất phương pháp phòng thủ.</a:t>
-            </a:r>
-          </a:p>
-          <a:p/>
-          <a:p>
-            <a:r>
-              <a:t>Đến đây là hết phần của em. Em xin mời bạn Dương trình bày phần tiếp theo.</a:t>
+              <a:t>MIRAGE làm việc này qua ba bước.</a:t>
+            </a:r>
+          </a:p>
+          <a:p>
+            <a:r>
+              <a:t>- Bước một: tạo đồ thị giả. Giữ nguyên các agent, chỉ nối lại một số cạnh, sao cho đồ thị giả đủ khác đồ thị thật, nhưng vẫn hợp lệ, ví dụ không tạo vòng lặp.</a:t>
+            </a:r>
+          </a:p>
+          <a:p>
+            <a:r>
+              <a:t>- Bước hai: làm cho cạnh giả trông như thật. Một LLM viết thêm dấu vết cho thấy agent B đã dùng kết quả của agent A, dù thực tế không có cạnh đó.</a:t>
+            </a:r>
+          </a:p>
+          <a:p>
+            <a:r>
+              <a:t>- Bước ba: xoá dấu vết của cạnh thật bằng cách viết lại câu trả lời, giữ nguyên nội dung nhưng không còn lộ ai đã gửi tin cho ai.</a:t>
+            </a:r>
+          </a:p>
+          <a:p>
+            <a:r>
+              <a:t>Điểm mấu chốt là hai phần bên dưới: bên trong hệ thống vẫn chạy theo đồ thị thật nên kết quả gần như không đổi; còn bên ngoài, kẻ tấn công chỉ thấy dấu vết của đồ thị giả.</a:t>
             </a:r>
           </a:p>
         </p:txBody>
@@ -2495,6 +2469,264 @@
 </p:notes>
 </file>
 
+<file path=ppt/notesSlides/notesSlide27.xml><?xml version="1.0" encoding="utf-8"?>
+<p:notes xmlns:a="http://schemas.openxmlformats.org/drawingml/2006/main" xmlns:p="http://schemas.openxmlformats.org/presentationml/2006/main" xmlns:r="http://schemas.openxmlformats.org/officeDocument/2006/relationships">
+  <p:cSld>
+    <p:spTree>
+      <p:nvGrpSpPr>
+        <p:cNvPr id="1" name=""/>
+        <p:cNvGrpSpPr/>
+        <p:nvPr/>
+      </p:nvGrpSpPr>
+      <p:grpSpPr>
+        <a:xfrm>
+          <a:off x="0" y="0"/>
+          <a:ext cx="0" cy="0"/>
+          <a:chOff x="0" y="0"/>
+          <a:chExt cx="0" cy="0"/>
+        </a:xfrm>
+      </p:grpSpPr>
+      <p:sp>
+        <p:nvSpPr>
+          <p:cNvPr id="2" name="Slide Image Placeholder 1"/>
+          <p:cNvSpPr>
+            <a:spLocks noGrp="1"/>
+          </p:cNvSpPr>
+          <p:nvPr>
+            <p:ph type="sldImg" idx="2"/>
+          </p:nvPr>
+        </p:nvSpPr>
+        <p:spPr/>
+      </p:sp>
+      <p:sp>
+        <p:nvSpPr>
+          <p:cNvPr id="3" name="Notes Placeholder 2"/>
+          <p:cNvSpPr>
+            <a:spLocks noGrp="1"/>
+          </p:cNvSpPr>
+          <p:nvPr>
+            <p:ph type="body" idx="3" sz="quarter"/>
+          </p:nvPr>
+        </p:nvSpPr>
+        <p:spPr/>
+        <p:txBody>
+          <a:bodyPr/>
+          <a:lstStyle/>
+          <a:p>
+            <a:r>
+              <a:t>LỜI THUYẾT TRÌNH (Người trình bày: Trần Xuân Hương)</a:t>
+            </a:r>
+          </a:p>
+          <a:p/>
+          <a:p>
+            <a:r>
+              <a:t>Paper thử trên 4 bộ dữ liệu và 3 cách xây MAS khác nhau. Độ đo là AUC của tấn công: 0.5 nghĩa là kẻ tấn công chỉ đoán bừa, nên càng gần 0.5 càng tốt.</a:t>
+            </a:r>
+          </a:p>
+          <a:p>
+            <a:r>
+              <a:t>Bảng bên trái so với cách phòng thủ thường gặp là thêm dấu phân cách vào prompt. MIRAGE đưa AUC từ khoảng 0.7 đến 0.8 xuống còn 0.64 đến 0.68 trên cả bốn bộ dữ liệu, trong khi độ chính xác của tác vụ chỉ thay đổi nhỏ.</a:t>
+            </a:r>
+          </a:p>
+          <a:p>
+            <a:r>
+              <a:t>Nhận xét của nhóm: điểm mạnh là đây là hướng mới, bảo vệ chính cấu trúc của hệ thống, và không cần sửa các agent. Hạn chế là mới thử một kiểu tấn công, AUC vẫn chưa về được 0.5, và paper chưa nói chi phí phát sinh khi gọi LLM thêm.</a:t>
+            </a:r>
+          </a:p>
+        </p:txBody>
+      </p:sp>
+      <p:sp>
+        <p:nvSpPr>
+          <p:cNvPr id="4" name="Slide Number Placeholder 3"/>
+          <p:cNvSpPr>
+            <a:spLocks noGrp="1"/>
+          </p:cNvSpPr>
+          <p:nvPr>
+            <p:ph type="sldNum" idx="5" sz="quarter"/>
+          </p:nvPr>
+        </p:nvSpPr>
+        <p:spPr/>
+      </p:sp>
+    </p:spTree>
+  </p:cSld>
+  <p:clrMapOvr>
+    <a:masterClrMapping/>
+  </p:clrMapOvr>
+</p:notes>
+</file>
+
+<file path=ppt/notesSlides/notesSlide28.xml><?xml version="1.0" encoding="utf-8"?>
+<p:notes xmlns:a="http://schemas.openxmlformats.org/drawingml/2006/main" xmlns:p="http://schemas.openxmlformats.org/presentationml/2006/main" xmlns:r="http://schemas.openxmlformats.org/officeDocument/2006/relationships">
+  <p:cSld>
+    <p:spTree>
+      <p:nvGrpSpPr>
+        <p:cNvPr id="1" name=""/>
+        <p:cNvGrpSpPr/>
+        <p:nvPr/>
+      </p:nvGrpSpPr>
+      <p:grpSpPr>
+        <a:xfrm>
+          <a:off x="0" y="0"/>
+          <a:ext cx="0" cy="0"/>
+          <a:chOff x="0" y="0"/>
+          <a:chExt cx="0" cy="0"/>
+        </a:xfrm>
+      </p:grpSpPr>
+      <p:sp>
+        <p:nvSpPr>
+          <p:cNvPr id="2" name="Slide Image Placeholder 1"/>
+          <p:cNvSpPr>
+            <a:spLocks noGrp="1"/>
+          </p:cNvSpPr>
+          <p:nvPr>
+            <p:ph type="sldImg" idx="2"/>
+          </p:nvPr>
+        </p:nvSpPr>
+        <p:spPr/>
+      </p:sp>
+      <p:sp>
+        <p:nvSpPr>
+          <p:cNvPr id="3" name="Notes Placeholder 2"/>
+          <p:cNvSpPr>
+            <a:spLocks noGrp="1"/>
+          </p:cNvSpPr>
+          <p:nvPr>
+            <p:ph type="body" idx="3" sz="quarter"/>
+          </p:nvPr>
+        </p:nvSpPr>
+        <p:spPr/>
+        <p:txBody>
+          <a:bodyPr/>
+          <a:lstStyle/>
+          <a:p>
+            <a:r>
+              <a:t>LỜI THUYẾT TRÌNH (Người trình bày: Trần Xuân Hương)</a:t>
+            </a:r>
+          </a:p>
+          <a:p/>
+          <a:p>
+            <a:r>
+              <a:t>Paper thứ hai là TIDE. Nhóm tác giả dựng một thí nghiệm đơn giản: một đồ vật được chuyển qua nhiều chỗ, từ l_0 đến l_m. Có 5 agent, mỗi agent chỉ thấy một đoạn, không ai tự biết vị trí cuối, nhưng gộp thông tin của cả nhóm thì đủ để tìm ra.</a:t>
+            </a:r>
+          </a:p>
+          <a:p>
+            <a:r>
+              <a:t>Mỗi câu chuyện được chạy hai lần. Lần một, cả nhóm trung thực. Lần hai, agent thấy bước cuối cố tình nói dối, kéo nhóm về vị trí ngay trước đó, gọi là đáp án mồi. Hai lần giống hệt nhau, chỉ khác một agent nói dối, nên mọi khác biệt là do lời nói dối.</a:t>
+            </a:r>
+          </a:p>
+          <a:p>
+            <a:r>
+              <a:t>Câu hỏi: chỉ một agent nói dối thì nhóm có còn tìm ra sự thật không, và thảo luận có giúp sửa sai không. Thí nghiệm gồm 120 câu chuyện với ba model.</a:t>
+            </a:r>
+          </a:p>
+        </p:txBody>
+      </p:sp>
+      <p:sp>
+        <p:nvSpPr>
+          <p:cNvPr id="4" name="Slide Number Placeholder 3"/>
+          <p:cNvSpPr>
+            <a:spLocks noGrp="1"/>
+          </p:cNvSpPr>
+          <p:nvPr>
+            <p:ph type="sldNum" idx="5" sz="quarter"/>
+          </p:nvPr>
+        </p:nvSpPr>
+        <p:spPr/>
+      </p:sp>
+    </p:spTree>
+  </p:cSld>
+  <p:clrMapOvr>
+    <a:masterClrMapping/>
+  </p:clrMapOvr>
+</p:notes>
+</file>
+
+<file path=ppt/notesSlides/notesSlide29.xml><?xml version="1.0" encoding="utf-8"?>
+<p:notes xmlns:a="http://schemas.openxmlformats.org/drawingml/2006/main" xmlns:p="http://schemas.openxmlformats.org/presentationml/2006/main" xmlns:r="http://schemas.openxmlformats.org/officeDocument/2006/relationships">
+  <p:cSld>
+    <p:spTree>
+      <p:nvGrpSpPr>
+        <p:cNvPr id="1" name=""/>
+        <p:cNvGrpSpPr/>
+        <p:nvPr/>
+      </p:nvGrpSpPr>
+      <p:grpSpPr>
+        <a:xfrm>
+          <a:off x="0" y="0"/>
+          <a:ext cx="0" cy="0"/>
+          <a:chOff x="0" y="0"/>
+          <a:chExt cx="0" cy="0"/>
+        </a:xfrm>
+      </p:grpSpPr>
+      <p:sp>
+        <p:nvSpPr>
+          <p:cNvPr id="2" name="Slide Image Placeholder 1"/>
+          <p:cNvSpPr>
+            <a:spLocks noGrp="1"/>
+          </p:cNvSpPr>
+          <p:nvPr>
+            <p:ph type="sldImg" idx="2"/>
+          </p:nvPr>
+        </p:nvSpPr>
+        <p:spPr/>
+      </p:sp>
+      <p:sp>
+        <p:nvSpPr>
+          <p:cNvPr id="3" name="Notes Placeholder 2"/>
+          <p:cNvSpPr>
+            <a:spLocks noGrp="1"/>
+          </p:cNvSpPr>
+          <p:nvPr>
+            <p:ph type="body" idx="3" sz="quarter"/>
+          </p:nvPr>
+        </p:nvSpPr>
+        <p:spPr/>
+        <p:txBody>
+          <a:bodyPr/>
+          <a:lstStyle/>
+          <a:p>
+            <a:r>
+              <a:t>LỜI THUYẾT TRÌNH (Người trình bày: Trần Xuân Hương)</a:t>
+            </a:r>
+          </a:p>
+          <a:p/>
+          <a:p>
+            <a:r>
+              <a:t>Kết quả rất rõ. Khi cả nhóm trung thực, 72.5% số lần nhóm chọn đúng. Chỉ cần một agent nói dối, con số này rơi xuống 14.2%.</a:t>
+            </a:r>
+          </a:p>
+          <a:p>
+            <a:r>
+              <a:t>Lý do là lời khai sai được tin 70.7%, còn lời khai đúng chỉ 25.4%, dù cả hai được nhắc tới với tần suất như nhau. Thông tin sai cũng được chuyền tay xa hơn, trung bình 2.66 bước so với 1.33 bước của thông tin đúng.</a:t>
+            </a:r>
+          </a:p>
+          <a:p>
+            <a:r>
+              <a:t>Điều đáng chú ý là khoảng 85% chênh lệch đã hình thành ngay khi các agent chia sẻ lời khai. Các vòng thảo luận sau không sửa được sai, mà chỉ khuếch đại hướng có sẵn: nhóm trung thực thì đúng thêm, nhóm có người nói dối thì càng tin vào đáp án mồi.</a:t>
+            </a:r>
+          </a:p>
+        </p:txBody>
+      </p:sp>
+      <p:sp>
+        <p:nvSpPr>
+          <p:cNvPr id="4" name="Slide Number Placeholder 3"/>
+          <p:cNvSpPr>
+            <a:spLocks noGrp="1"/>
+          </p:cNvSpPr>
+          <p:nvPr>
+            <p:ph type="sldNum" idx="5" sz="quarter"/>
+          </p:nvPr>
+        </p:nvSpPr>
+        <p:spPr/>
+      </p:sp>
+    </p:spTree>
+  </p:cSld>
+  <p:clrMapOvr>
+    <a:masterClrMapping/>
+  </p:clrMapOvr>
+</p:notes>
+</file>
+
 <file path=ppt/notesSlides/notesSlide3.xml><?xml version="1.0" encoding="utf-8"?>
 <p:notes xmlns:a="http://schemas.openxmlformats.org/drawingml/2006/main" xmlns:p="http://schemas.openxmlformats.org/presentationml/2006/main" xmlns:r="http://schemas.openxmlformats.org/officeDocument/2006/relationships">
   <p:cSld>
@@ -2547,6 +2779,179 @@
           <a:p>
             <a:r>
               <a:t>Em xin bắt đầu với phần một: multi-agent system là gì, vì sao nó đang được quan tâm, bốn thách thức chính, và cách nhóm em chọn cũng như phân loại 8 paper.</a:t>
+            </a:r>
+          </a:p>
+        </p:txBody>
+      </p:sp>
+      <p:sp>
+        <p:nvSpPr>
+          <p:cNvPr id="4" name="Slide Number Placeholder 3"/>
+          <p:cNvSpPr>
+            <a:spLocks noGrp="1"/>
+          </p:cNvSpPr>
+          <p:nvPr>
+            <p:ph type="sldNum" idx="5" sz="quarter"/>
+          </p:nvPr>
+        </p:nvSpPr>
+        <p:spPr/>
+      </p:sp>
+    </p:spTree>
+  </p:cSld>
+  <p:clrMapOvr>
+    <a:masterClrMapping/>
+  </p:clrMapOvr>
+</p:notes>
+</file>
+
+<file path=ppt/notesSlides/notesSlide30.xml><?xml version="1.0" encoding="utf-8"?>
+<p:notes xmlns:a="http://schemas.openxmlformats.org/drawingml/2006/main" xmlns:p="http://schemas.openxmlformats.org/presentationml/2006/main" xmlns:r="http://schemas.openxmlformats.org/officeDocument/2006/relationships">
+  <p:cSld>
+    <p:spTree>
+      <p:nvGrpSpPr>
+        <p:cNvPr id="1" name=""/>
+        <p:cNvGrpSpPr/>
+        <p:nvPr/>
+      </p:nvGrpSpPr>
+      <p:grpSpPr>
+        <a:xfrm>
+          <a:off x="0" y="0"/>
+          <a:ext cx="0" cy="0"/>
+          <a:chOff x="0" y="0"/>
+          <a:chExt cx="0" cy="0"/>
+        </a:xfrm>
+      </p:grpSpPr>
+      <p:sp>
+        <p:nvSpPr>
+          <p:cNvPr id="2" name="Slide Image Placeholder 1"/>
+          <p:cNvSpPr>
+            <a:spLocks noGrp="1"/>
+          </p:cNvSpPr>
+          <p:nvPr>
+            <p:ph type="sldImg" idx="2"/>
+          </p:nvPr>
+        </p:nvSpPr>
+        <p:spPr/>
+      </p:sp>
+      <p:sp>
+        <p:nvSpPr>
+          <p:cNvPr id="3" name="Notes Placeholder 2"/>
+          <p:cNvSpPr>
+            <a:spLocks noGrp="1"/>
+          </p:cNvSpPr>
+          <p:nvPr>
+            <p:ph type="body" idx="3" sz="quarter"/>
+          </p:nvPr>
+        </p:nvSpPr>
+        <p:spPr/>
+        <p:txBody>
+          <a:bodyPr/>
+          <a:lstStyle/>
+          <a:p>
+            <a:r>
+              <a:t>LỜI THUYẾT TRÌNH (Người trình bày: Trần Xuân Hương)</a:t>
+            </a:r>
+          </a:p>
+          <a:p/>
+          <a:p>
+            <a:r>
+              <a:t>Paper làm thêm hai thí nghiệm. Thứ nhất, cho kẻ nói dối nói xong rồi rời nhóm, không thảo luận nữa. Kết quả vẫn kém hơn 46.67 điểm so với khi agent đó rời đi mà không nói gì. Nghĩa là thông tin sai tự lan qua chính những agent trung thực.</a:t>
+            </a:r>
+          </a:p>
+          <a:p>
+            <a:r>
+              <a:t>Thứ hai, thêm 3 người quan sát không có thông tin, chỉ theo dõi và góp ý. Số lần cả nhóm đồng ý sai giảm khoảng 90%, nhưng số lần chọn đúng không tăng. Người quan sát giúp nhóm thận trọng hơn chứ chưa giúp tìm ra sự thật.</a:t>
+            </a:r>
+          </a:p>
+          <a:p>
+            <a:r>
+              <a:t>Nhận xét của nhóm: điểm mạnh là thiết kế so sánh có và không nói dối trên cùng câu chuyện, và theo dõi được thông tin sai lan qua từng agent. Hạn chế là chỉ có một loại bài toán, các agent dùng cùng một model, và chưa đề xuất cách phòng thủ.</a:t>
+            </a:r>
+          </a:p>
+        </p:txBody>
+      </p:sp>
+      <p:sp>
+        <p:nvSpPr>
+          <p:cNvPr id="4" name="Slide Number Placeholder 3"/>
+          <p:cNvSpPr>
+            <a:spLocks noGrp="1"/>
+          </p:cNvSpPr>
+          <p:nvPr>
+            <p:ph type="sldNum" idx="5" sz="quarter"/>
+          </p:nvPr>
+        </p:nvSpPr>
+        <p:spPr/>
+      </p:sp>
+    </p:spTree>
+  </p:cSld>
+  <p:clrMapOvr>
+    <a:masterClrMapping/>
+  </p:clrMapOvr>
+</p:notes>
+</file>
+
+<file path=ppt/notesSlides/notesSlide31.xml><?xml version="1.0" encoding="utf-8"?>
+<p:notes xmlns:a="http://schemas.openxmlformats.org/drawingml/2006/main" xmlns:p="http://schemas.openxmlformats.org/presentationml/2006/main" xmlns:r="http://schemas.openxmlformats.org/officeDocument/2006/relationships">
+  <p:cSld>
+    <p:spTree>
+      <p:nvGrpSpPr>
+        <p:cNvPr id="1" name=""/>
+        <p:cNvGrpSpPr/>
+        <p:nvPr/>
+      </p:nvGrpSpPr>
+      <p:grpSpPr>
+        <a:xfrm>
+          <a:off x="0" y="0"/>
+          <a:ext cx="0" cy="0"/>
+          <a:chOff x="0" y="0"/>
+          <a:chExt cx="0" cy="0"/>
+        </a:xfrm>
+      </p:grpSpPr>
+      <p:sp>
+        <p:nvSpPr>
+          <p:cNvPr id="2" name="Slide Image Placeholder 1"/>
+          <p:cNvSpPr>
+            <a:spLocks noGrp="1"/>
+          </p:cNvSpPr>
+          <p:nvPr>
+            <p:ph type="sldImg" idx="2"/>
+          </p:nvPr>
+        </p:nvSpPr>
+        <p:spPr/>
+      </p:sp>
+      <p:sp>
+        <p:nvSpPr>
+          <p:cNvPr id="3" name="Notes Placeholder 2"/>
+          <p:cNvSpPr>
+            <a:spLocks noGrp="1"/>
+          </p:cNvSpPr>
+          <p:nvPr>
+            <p:ph type="body" idx="3" sz="quarter"/>
+          </p:nvPr>
+        </p:nvSpPr>
+        <p:spPr/>
+        <p:txBody>
+          <a:bodyPr/>
+          <a:lstStyle/>
+          <a:p>
+            <a:r>
+              <a:t>LỜI THUYẾT TRÌNH (Người trình bày: Trần Xuân Hương)</a:t>
+            </a:r>
+          </a:p>
+          <a:p/>
+          <a:p>
+            <a:r>
+              <a:t>Tóm lại phần hai. Hai paper nhìn an toàn từ hai phía. MIRAGE là phương pháp phòng thủ, chống kẻ tấn công từ bên ngoài, bảo vệ bí mật của topology. TIDE là khung đánh giá, xét một agent nói dối từ bên trong, và cho thấy kết luận của cả nhóm bị ảnh hưởng nặng như thế nào.</a:t>
+            </a:r>
+          </a:p>
+          <a:p>
+            <a:r>
+              <a:t>Hai bài bổ sung cho nhau: TIDE cho thấy thông tin sai một khi đã lọt vào thì thảo luận khó sửa; còn MIRAGE khiến kẻ tấn công khó biết nên chèn thông tin sai vào agent nào. Điều còn thiếu là cách khôi phục sự thật sau khi hệ thống đã bị tấn công, đây là một hướng nghiên cứu nhóm em sẽ nhắc lại ở phần cuối.</a:t>
+            </a:r>
+          </a:p>
+          <a:p/>
+          <a:p>
+            <a:r>
+              <a:t>Đến đây là hết phần của em. Em xin mời bạn Dương trình bày phần tiếp theo.</a:t>
             </a:r>
           </a:p>
         </p:txBody>
@@ -22592,7 +22997,7 @@
                 <a:ea typeface="Roboto Black"/>
                 <a:cs typeface="Roboto Black"/>
               </a:rPr>
-              <a:t>MIRAGE: che giấu topology bằng phantom structure</a:t>
+              <a:t>MIRAGE: khi topology cũng là bí mật</a:t>
             </a:r>
           </a:p>
         </p:txBody>
@@ -22801,14 +23206,14 @@
       </p:sp>
       <p:sp>
         <p:nvSpPr>
-          <p:cNvPr id="8" name="TextBox 7"/>
+          <p:cNvPr id="21" name="TextBox 21"/>
           <p:cNvSpPr txBox="1"/>
           <p:nvPr/>
         </p:nvSpPr>
         <p:spPr>
           <a:xfrm>
             <a:off x="411480" y="914400"/>
-            <a:ext cx="6080760" cy="5029200"/>
+            <a:ext cx="6309360" cy="3931920"/>
           </a:xfrm>
           <a:prstGeom prst="rect">
             <a:avLst/>
@@ -22823,10 +23228,13 @@
               <a:spcBef>
                 <a:spcPts val="0"/>
               </a:spcBef>
+              <a:spcAft>
+                <a:spcPts val="0"/>
+              </a:spcAft>
               <a:buNone/>
             </a:pPr>
             <a:r>
-              <a:rPr sz="2000" b="1">
+              <a:rPr sz="2300" b="1">
                 <a:solidFill>
                   <a:srgbClr val="003366"/>
                 </a:solidFill>
@@ -22834,14 +23242,17 @@
                 <a:ea typeface="Roboto Black"/>
                 <a:cs typeface="Roboto Black"/>
               </a:rPr>
-              <a:t>Bài toán</a:t>
-            </a:r>
-          </a:p>
-          <a:p>
-            <a:pPr marL="133858" indent="-133858">
+              <a:t>Vấn đề</a:t>
+            </a:r>
+          </a:p>
+          <a:p>
+            <a:pPr marL="154050" indent="-154050">
               <a:spcBef>
                 <a:spcPts val="500"/>
               </a:spcBef>
+              <a:spcAft>
+                <a:spcPts val="0"/>
+              </a:spcAft>
               <a:buClr>
                 <a:srgbClr val="C00000"/>
               </a:buClr>
@@ -22849,7 +23260,18 @@
               <a:buChar char="•"/>
             </a:pPr>
             <a:r>
-              <a:rPr sz="1700" b="0">
+              <a:rPr sz="1950" b="1">
+                <a:solidFill>
+                  <a:srgbClr val="003366"/>
+                </a:solidFill>
+                <a:latin typeface="Roboto Black"/>
+                <a:ea typeface="Roboto Black"/>
+                <a:cs typeface="Roboto Black"/>
+              </a:rPr>
+              <a:t>Topology</a:t>
+            </a:r>
+            <a:r>
+              <a:rPr sz="1950" b="0">
                 <a:solidFill>
                   <a:srgbClr val="222222"/>
                 </a:solidFill>
@@ -22857,36 +23279,17 @@
                 <a:ea typeface="Roboto Medium"/>
                 <a:cs typeface="Roboto Medium"/>
               </a:rPr>
-              <a:t>Tấn công </a:t>
-            </a:r>
-            <a:r>
-              <a:rPr sz="1700" b="1">
-                <a:solidFill>
-                  <a:srgbClr val="003366"/>
-                </a:solidFill>
-                <a:latin typeface="Roboto Black"/>
-                <a:ea typeface="Roboto Black"/>
-                <a:cs typeface="Roboto Black"/>
-              </a:rPr>
-              <a:t>CIA</a:t>
-            </a:r>
-            <a:r>
-              <a:rPr sz="1700" b="0">
-                <a:solidFill>
-                  <a:srgbClr val="222222"/>
-                </a:solidFill>
-                <a:latin typeface="Roboto Medium"/>
-                <a:ea typeface="Roboto Medium"/>
-                <a:cs typeface="Roboto Medium"/>
-              </a:rPr>
-              <a:t> suy ra topology chỉ qua truy vấn hộp đen.</a:t>
-            </a:r>
-          </a:p>
-          <a:p>
-            <a:pPr marL="133858" indent="-133858">
+              <a:t xml:space="preserve"> (agent nào gửi kết quả cho agent nào) là “bí quyết” của một hệ MAS, tốn nhiều công tối ưu.</a:t>
+            </a:r>
+          </a:p>
+          <a:p>
+            <a:pPr marL="154050" indent="-154050">
               <a:spcBef>
                 <a:spcPts val="500"/>
               </a:spcBef>
+              <a:spcAft>
+                <a:spcPts val="0"/>
+              </a:spcAft>
               <a:buClr>
                 <a:srgbClr val="C00000"/>
               </a:buClr>
@@ -22894,7 +23297,7 @@
               <a:buChar char="•"/>
             </a:pPr>
             <a:r>
-              <a:rPr sz="1700" b="0">
+              <a:rPr sz="1950" b="0">
                 <a:solidFill>
                   <a:srgbClr val="222222"/>
                 </a:solidFill>
@@ -22902,18 +23305,10 @@
                 <a:ea typeface="Roboto Medium"/>
                 <a:cs typeface="Roboto Medium"/>
               </a:rPr>
-              <a:t>Lộ topology → mất tài sản trí tuệ, lộ agent then chốt.</a:t>
-            </a:r>
-          </a:p>
-          <a:p>
-            <a:pPr>
-              <a:spcBef>
-                <a:spcPts val="1400"/>
-              </a:spcBef>
-              <a:buNone/>
-            </a:pPr>
-            <a:r>
-              <a:rPr sz="2000" b="1">
+              <a:t xml:space="preserve">Tấn công </a:t>
+            </a:r>
+            <a:r>
+              <a:rPr sz="1950" b="1">
                 <a:solidFill>
                   <a:srgbClr val="003366"/>
                 </a:solidFill>
@@ -22921,14 +23316,28 @@
                 <a:ea typeface="Roboto Black"/>
                 <a:cs typeface="Roboto Black"/>
               </a:rPr>
-              <a:t>Phương pháp: 3 bước</a:t>
-            </a:r>
-          </a:p>
-          <a:p>
-            <a:pPr marL="133858" indent="-133858">
+              <a:t>CIA</a:t>
+            </a:r>
+            <a:r>
+              <a:rPr sz="1950" b="0">
+                <a:solidFill>
+                  <a:srgbClr val="222222"/>
+                </a:solidFill>
+                <a:latin typeface="Roboto Medium"/>
+                <a:ea typeface="Roboto Medium"/>
+                <a:cs typeface="Roboto Medium"/>
+              </a:rPr>
+              <a:t>: chỉ cần hỏi hệ thống như người dùng bình thường, ép nó để lộ câu trả lời trung gian. Hai agent nối với nhau thì nói “giống nhau” hơn → đoán ra cạnh.</a:t>
+            </a:r>
+          </a:p>
+          <a:p>
+            <a:pPr marL="154050" indent="-154050">
               <a:spcBef>
                 <a:spcPts val="500"/>
               </a:spcBef>
+              <a:spcAft>
+                <a:spcPts val="0"/>
+              </a:spcAft>
               <a:buClr>
                 <a:srgbClr val="C00000"/>
               </a:buClr>
@@ -22936,18 +23345,7 @@
               <a:buChar char="•"/>
             </a:pPr>
             <a:r>
-              <a:rPr sz="1700" b="1">
-                <a:solidFill>
-                  <a:srgbClr val="003366"/>
-                </a:solidFill>
-                <a:latin typeface="Roboto Black"/>
-                <a:ea typeface="Roboto Black"/>
-                <a:cs typeface="Roboto Black"/>
-              </a:rPr>
-              <a:t>Phantom topology:</a:t>
-            </a:r>
-            <a:r>
-              <a:rPr sz="1700" b="0">
+              <a:rPr sz="1950" b="0">
                 <a:solidFill>
                   <a:srgbClr val="222222"/>
                 </a:solidFill>
@@ -22955,711 +23353,79 @@
                 <a:ea typeface="Roboto Medium"/>
                 <a:cs typeface="Roboto Medium"/>
               </a:rPr>
-              <a:t> đi dây lại cạnh, độ lệch ρ ≥ ρ₀ (k-anonymity).</a:t>
-            </a:r>
-          </a:p>
-          <a:p>
-            <a:pPr marL="133858" indent="-133858">
-              <a:spcBef>
-                <a:spcPts val="500"/>
-              </a:spcBef>
-              <a:buClr>
-                <a:srgbClr val="C00000"/>
-              </a:buClr>
-              <a:buFont typeface="Arial"/>
-              <a:buChar char="•"/>
-            </a:pPr>
-            <a:r>
-              <a:rPr sz="1700" b="1">
-                <a:solidFill>
-                  <a:srgbClr val="003366"/>
-                </a:solidFill>
-                <a:latin typeface="Roboto Black"/>
-                <a:ea typeface="Roboto Black"/>
-                <a:cs typeface="Roboto Black"/>
-              </a:rPr>
-              <a:t>Semantic edge realization:</a:t>
-            </a:r>
-            <a:r>
-              <a:rPr sz="1700" b="0">
-                <a:solidFill>
-                  <a:srgbClr val="222222"/>
-                </a:solidFill>
-                <a:latin typeface="Roboto Medium"/>
-                <a:ea typeface="Roboto Medium"/>
-                <a:cs typeface="Roboto Medium"/>
-              </a:rPr>
-              <a:t> LLM sinh bằng chứng giả cho phantom edge; paraphrase để giấu cạnh thật.</a:t>
-            </a:r>
-          </a:p>
-          <a:p>
-            <a:pPr marL="133858" indent="-133858">
-              <a:spcBef>
-                <a:spcPts val="500"/>
-              </a:spcBef>
-              <a:buClr>
-                <a:srgbClr val="C00000"/>
-              </a:buClr>
-              <a:buFont typeface="Arial"/>
-              <a:buChar char="•"/>
-            </a:pPr>
-            <a:r>
-              <a:rPr sz="1700" b="1">
-                <a:solidFill>
-                  <a:srgbClr val="003366"/>
-                </a:solidFill>
-                <a:latin typeface="Roboto Black"/>
-                <a:ea typeface="Roboto Black"/>
-                <a:cs typeface="Roboto Black"/>
-              </a:rPr>
-              <a:t>Dual-view execution:</a:t>
-            </a:r>
-            <a:r>
-              <a:rPr sz="1700" b="0">
-                <a:solidFill>
-                  <a:srgbClr val="222222"/>
-                </a:solidFill>
-                <a:latin typeface="Roboto Medium"/>
-                <a:ea typeface="Roboto Medium"/>
-                <a:cs typeface="Roboto Medium"/>
-              </a:rPr>
-              <a:t> chạy trên G thật, chỉ phơi bày G′.</a:t>
-            </a:r>
-          </a:p>
-        </p:txBody>
-      </p:sp>
-      <p:sp>
-        <p:nvSpPr>
-          <p:cNvPr id="9" name="TextBox 8"/>
-          <p:cNvSpPr txBox="1"/>
-          <p:nvPr/>
-        </p:nvSpPr>
-        <p:spPr>
-          <a:xfrm>
-            <a:off x="6675120" y="914400"/>
-            <a:ext cx="5074920" cy="365760"/>
-          </a:xfrm>
-          <a:prstGeom prst="rect">
-            <a:avLst/>
-          </a:prstGeom>
-          <a:noFill/>
-        </p:spPr>
-        <p:txBody>
-          <a:bodyPr wrap="square" anchor="t" lIns="45720" rIns="45720" tIns="18288" bIns="18288"/>
-          <a:lstStyle/>
-          <a:p>
-            <a:pPr>
-              <a:spcBef>
-                <a:spcPts val="0"/>
-              </a:spcBef>
-              <a:buNone/>
-            </a:pPr>
-            <a:r>
-              <a:rPr sz="1300" b="1">
-                <a:solidFill>
-                  <a:srgbClr val="666666"/>
-                </a:solidFill>
-                <a:latin typeface="Roboto Black"/>
-                <a:ea typeface="Roboto Black"/>
-                <a:cs typeface="Roboto Black"/>
-              </a:rPr>
-              <a:t>AUC / ACC / F1 của tấn công (G-Designer, thấp hơn là tốt)</a:t>
-            </a:r>
-          </a:p>
-        </p:txBody>
-      </p:sp>
-      <p:graphicFrame>
-        <p:nvGraphicFramePr>
-          <p:cNvPr id="10" name="Table 9"/>
-          <p:cNvGraphicFramePr>
-            <a:graphicFrameLocks noGrp="1"/>
-          </p:cNvGraphicFramePr>
-          <p:nvPr/>
-        </p:nvGraphicFramePr>
-        <p:xfrm>
-          <a:off x="6675120" y="1298448"/>
-          <a:ext cx="5074920" cy="2286000"/>
-        </p:xfrm>
-        <a:graphic>
-          <a:graphicData uri="http://schemas.openxmlformats.org/drawingml/2006/table">
-            <a:tbl>
-              <a:tblPr firstRow="0" bandRow="0"/>
-              <a:tblGrid>
-                <a:gridCol w="1234440"/>
-                <a:gridCol w="1920240"/>
-                <a:gridCol w="1920240"/>
-              </a:tblGrid>
-              <a:tr h="457200">
-                <a:tc>
-                  <a:txBody>
-                    <a:bodyPr wrap="square"/>
-                    <a:lstStyle/>
-                    <a:p>
-                      <a:pPr>
-                        <a:spcBef>
-                          <a:spcPts val="0"/>
-                        </a:spcBef>
-                        <a:buNone/>
-                      </a:pPr>
-                      <a:r>
-                        <a:rPr sz="1400" b="1">
-                          <a:solidFill>
-                            <a:srgbClr val="FFFFFF"/>
-                          </a:solidFill>
-                          <a:latin typeface="Roboto Black"/>
-                          <a:ea typeface="Roboto Black"/>
-                          <a:cs typeface="Roboto Black"/>
-                        </a:rPr>
-                        <a:t>Dataset</a:t>
-                      </a:r>
-                    </a:p>
-                  </a:txBody>
-                  <a:tcPr marL="54864" marR="54864" marT="27432" marB="27432" anchor="ctr">
-                    <a:solidFill>
-                      <a:srgbClr val="003366"/>
-                    </a:solidFill>
-                  </a:tcPr>
-                </a:tc>
-                <a:tc>
-                  <a:txBody>
-                    <a:bodyPr wrap="square"/>
-                    <a:lstStyle/>
-                    <a:p>
-                      <a:pPr>
-                        <a:spcBef>
-                          <a:spcPts val="0"/>
-                        </a:spcBef>
-                        <a:buNone/>
-                      </a:pPr>
-                      <a:r>
-                        <a:rPr sz="1400" b="1">
-                          <a:solidFill>
-                            <a:srgbClr val="FFFFFF"/>
-                          </a:solidFill>
-                          <a:latin typeface="Roboto Black"/>
-                          <a:ea typeface="Roboto Black"/>
-                          <a:cs typeface="Roboto Black"/>
-                        </a:rPr>
-                        <a:t>Delimiters</a:t>
-                      </a:r>
-                    </a:p>
-                  </a:txBody>
-                  <a:tcPr marL="54864" marR="54864" marT="27432" marB="27432" anchor="ctr">
-                    <a:solidFill>
-                      <a:srgbClr val="003366"/>
-                    </a:solidFill>
-                  </a:tcPr>
-                </a:tc>
-                <a:tc>
-                  <a:txBody>
-                    <a:bodyPr wrap="square"/>
-                    <a:lstStyle/>
-                    <a:p>
-                      <a:pPr>
-                        <a:spcBef>
-                          <a:spcPts val="0"/>
-                        </a:spcBef>
-                        <a:buNone/>
-                      </a:pPr>
-                      <a:r>
-                        <a:rPr sz="1400" b="1">
-                          <a:solidFill>
-                            <a:srgbClr val="FFFFFF"/>
-                          </a:solidFill>
-                          <a:latin typeface="Roboto Black"/>
-                          <a:ea typeface="Roboto Black"/>
-                          <a:cs typeface="Roboto Black"/>
-                        </a:rPr>
-                        <a:t>MIRAGE</a:t>
-                      </a:r>
-                    </a:p>
-                  </a:txBody>
-                  <a:tcPr marL="54864" marR="54864" marT="27432" marB="27432" anchor="ctr">
-                    <a:solidFill>
-                      <a:srgbClr val="003366"/>
-                    </a:solidFill>
-                  </a:tcPr>
-                </a:tc>
-              </a:tr>
-              <a:tr h="457200">
-                <a:tc>
-                  <a:txBody>
-                    <a:bodyPr wrap="square"/>
-                    <a:lstStyle/>
-                    <a:p>
-                      <a:pPr>
-                        <a:spcBef>
-                          <a:spcPts val="0"/>
-                        </a:spcBef>
-                        <a:buNone/>
-                      </a:pPr>
-                      <a:r>
-                        <a:rPr sz="1400" b="1">
-                          <a:solidFill>
-                            <a:srgbClr val="003366"/>
-                          </a:solidFill>
-                          <a:latin typeface="Roboto Black"/>
-                          <a:ea typeface="Roboto Black"/>
-                          <a:cs typeface="Roboto Black"/>
-                        </a:rPr>
-                        <a:t>MMLU</a:t>
-                      </a:r>
-                    </a:p>
-                  </a:txBody>
-                  <a:tcPr marL="54864" marR="54864" marT="27432" marB="27432" anchor="ctr">
-                    <a:solidFill>
-                      <a:srgbClr val="FFFFFF"/>
-                    </a:solidFill>
-                  </a:tcPr>
-                </a:tc>
-                <a:tc>
-                  <a:txBody>
-                    <a:bodyPr wrap="square"/>
-                    <a:lstStyle/>
-                    <a:p>
-                      <a:pPr>
-                        <a:spcBef>
-                          <a:spcPts val="0"/>
-                        </a:spcBef>
-                        <a:buNone/>
-                      </a:pPr>
-                      <a:r>
-                        <a:rPr sz="1400" b="0">
-                          <a:solidFill>
-                            <a:srgbClr val="222222"/>
-                          </a:solidFill>
-                          <a:latin typeface="Roboto Medium"/>
-                          <a:ea typeface="Roboto Medium"/>
-                          <a:cs typeface="Roboto Medium"/>
-                        </a:rPr>
-                        <a:t>0.76 / 0.61 / 0.64</a:t>
-                      </a:r>
-                    </a:p>
-                  </a:txBody>
-                  <a:tcPr marL="54864" marR="54864" marT="27432" marB="27432" anchor="ctr">
-                    <a:solidFill>
-                      <a:srgbClr val="FFFFFF"/>
-                    </a:solidFill>
-                  </a:tcPr>
-                </a:tc>
-                <a:tc>
-                  <a:txBody>
-                    <a:bodyPr wrap="square"/>
-                    <a:lstStyle/>
-                    <a:p>
-                      <a:pPr>
-                        <a:spcBef>
-                          <a:spcPts val="0"/>
-                        </a:spcBef>
-                        <a:buNone/>
-                      </a:pPr>
-                      <a:r>
-                        <a:rPr sz="1400" b="1">
-                          <a:solidFill>
-                            <a:srgbClr val="003366"/>
-                          </a:solidFill>
-                          <a:latin typeface="Roboto Black"/>
-                          <a:ea typeface="Roboto Black"/>
-                          <a:cs typeface="Roboto Black"/>
-                        </a:rPr>
-                        <a:t>0.67 / 0.50 / 0.49</a:t>
-                      </a:r>
-                    </a:p>
-                  </a:txBody>
-                  <a:tcPr marL="54864" marR="54864" marT="27432" marB="27432" anchor="ctr">
-                    <a:solidFill>
-                      <a:srgbClr val="FFFFFF"/>
-                    </a:solidFill>
-                  </a:tcPr>
-                </a:tc>
-              </a:tr>
-              <a:tr h="457200">
-                <a:tc>
-                  <a:txBody>
-                    <a:bodyPr wrap="square"/>
-                    <a:lstStyle/>
-                    <a:p>
-                      <a:pPr>
-                        <a:spcBef>
-                          <a:spcPts val="0"/>
-                        </a:spcBef>
-                        <a:buNone/>
-                      </a:pPr>
-                      <a:r>
-                        <a:rPr sz="1400" b="1">
-                          <a:solidFill>
-                            <a:srgbClr val="003366"/>
-                          </a:solidFill>
-                          <a:latin typeface="Roboto Black"/>
-                          <a:ea typeface="Roboto Black"/>
-                          <a:cs typeface="Roboto Black"/>
-                        </a:rPr>
-                        <a:t>GSM8K</a:t>
-                      </a:r>
-                    </a:p>
-                  </a:txBody>
-                  <a:tcPr marL="54864" marR="54864" marT="27432" marB="27432" anchor="ctr">
-                    <a:solidFill>
-                      <a:srgbClr val="F3F6FB"/>
-                    </a:solidFill>
-                  </a:tcPr>
-                </a:tc>
-                <a:tc>
-                  <a:txBody>
-                    <a:bodyPr wrap="square"/>
-                    <a:lstStyle/>
-                    <a:p>
-                      <a:pPr>
-                        <a:spcBef>
-                          <a:spcPts val="0"/>
-                        </a:spcBef>
-                        <a:buNone/>
-                      </a:pPr>
-                      <a:r>
-                        <a:rPr sz="1400" b="0">
-                          <a:solidFill>
-                            <a:srgbClr val="222222"/>
-                          </a:solidFill>
-                          <a:latin typeface="Roboto Medium"/>
-                          <a:ea typeface="Roboto Medium"/>
-                          <a:cs typeface="Roboto Medium"/>
-                        </a:rPr>
-                        <a:t>0.80 / 0.76 / 0.67</a:t>
-                      </a:r>
-                    </a:p>
-                  </a:txBody>
-                  <a:tcPr marL="54864" marR="54864" marT="27432" marB="27432" anchor="ctr">
-                    <a:solidFill>
-                      <a:srgbClr val="F3F6FB"/>
-                    </a:solidFill>
-                  </a:tcPr>
-                </a:tc>
-                <a:tc>
-                  <a:txBody>
-                    <a:bodyPr wrap="square"/>
-                    <a:lstStyle/>
-                    <a:p>
-                      <a:pPr>
-                        <a:spcBef>
-                          <a:spcPts val="0"/>
-                        </a:spcBef>
-                        <a:buNone/>
-                      </a:pPr>
-                      <a:r>
-                        <a:rPr sz="1400" b="1">
-                          <a:solidFill>
-                            <a:srgbClr val="003366"/>
-                          </a:solidFill>
-                          <a:latin typeface="Roboto Black"/>
-                          <a:ea typeface="Roboto Black"/>
-                          <a:cs typeface="Roboto Black"/>
-                        </a:rPr>
-                        <a:t>0.64 / 0.51 / 0.42</a:t>
-                      </a:r>
-                    </a:p>
-                  </a:txBody>
-                  <a:tcPr marL="54864" marR="54864" marT="27432" marB="27432" anchor="ctr">
-                    <a:solidFill>
-                      <a:srgbClr val="F3F6FB"/>
-                    </a:solidFill>
-                  </a:tcPr>
-                </a:tc>
-              </a:tr>
-              <a:tr h="457200">
-                <a:tc>
-                  <a:txBody>
-                    <a:bodyPr wrap="square"/>
-                    <a:lstStyle/>
-                    <a:p>
-                      <a:pPr>
-                        <a:spcBef>
-                          <a:spcPts val="0"/>
-                        </a:spcBef>
-                        <a:buNone/>
-                      </a:pPr>
-                      <a:r>
-                        <a:rPr sz="1400" b="1">
-                          <a:solidFill>
-                            <a:srgbClr val="003366"/>
-                          </a:solidFill>
-                          <a:latin typeface="Roboto Black"/>
-                          <a:ea typeface="Roboto Black"/>
-                          <a:cs typeface="Roboto Black"/>
-                        </a:rPr>
-                        <a:t>SVAMP</a:t>
-                      </a:r>
-                    </a:p>
-                  </a:txBody>
-                  <a:tcPr marL="54864" marR="54864" marT="27432" marB="27432" anchor="ctr">
-                    <a:solidFill>
-                      <a:srgbClr val="FFFFFF"/>
-                    </a:solidFill>
-                  </a:tcPr>
-                </a:tc>
-                <a:tc>
-                  <a:txBody>
-                    <a:bodyPr wrap="square"/>
-                    <a:lstStyle/>
-                    <a:p>
-                      <a:pPr>
-                        <a:spcBef>
-                          <a:spcPts val="0"/>
-                        </a:spcBef>
-                        <a:buNone/>
-                      </a:pPr>
-                      <a:r>
-                        <a:rPr sz="1400" b="0">
-                          <a:solidFill>
-                            <a:srgbClr val="222222"/>
-                          </a:solidFill>
-                          <a:latin typeface="Roboto Medium"/>
-                          <a:ea typeface="Roboto Medium"/>
-                          <a:cs typeface="Roboto Medium"/>
-                        </a:rPr>
-                        <a:t>0.70 / 0.68 / 0.71</a:t>
-                      </a:r>
-                    </a:p>
-                  </a:txBody>
-                  <a:tcPr marL="54864" marR="54864" marT="27432" marB="27432" anchor="ctr">
-                    <a:solidFill>
-                      <a:srgbClr val="FFFFFF"/>
-                    </a:solidFill>
-                  </a:tcPr>
-                </a:tc>
-                <a:tc>
-                  <a:txBody>
-                    <a:bodyPr wrap="square"/>
-                    <a:lstStyle/>
-                    <a:p>
-                      <a:pPr>
-                        <a:spcBef>
-                          <a:spcPts val="0"/>
-                        </a:spcBef>
-                        <a:buNone/>
-                      </a:pPr>
-                      <a:r>
-                        <a:rPr sz="1400" b="1">
-                          <a:solidFill>
-                            <a:srgbClr val="003366"/>
-                          </a:solidFill>
-                          <a:latin typeface="Roboto Black"/>
-                          <a:ea typeface="Roboto Black"/>
-                          <a:cs typeface="Roboto Black"/>
-                        </a:rPr>
-                        <a:t>0.64 / 0.48 / 0.39</a:t>
-                      </a:r>
-                    </a:p>
-                  </a:txBody>
-                  <a:tcPr marL="54864" marR="54864" marT="27432" marB="27432" anchor="ctr">
-                    <a:solidFill>
-                      <a:srgbClr val="FFFFFF"/>
-                    </a:solidFill>
-                  </a:tcPr>
-                </a:tc>
-              </a:tr>
-              <a:tr h="457200">
-                <a:tc>
-                  <a:txBody>
-                    <a:bodyPr wrap="square"/>
-                    <a:lstStyle/>
-                    <a:p>
-                      <a:pPr>
-                        <a:spcBef>
-                          <a:spcPts val="0"/>
-                        </a:spcBef>
-                        <a:buNone/>
-                      </a:pPr>
-                      <a:r>
-                        <a:rPr sz="1400" b="1">
-                          <a:solidFill>
-                            <a:srgbClr val="003366"/>
-                          </a:solidFill>
-                          <a:latin typeface="Roboto Black"/>
-                          <a:ea typeface="Roboto Black"/>
-                          <a:cs typeface="Roboto Black"/>
-                        </a:rPr>
-                        <a:t>HumanEval</a:t>
-                      </a:r>
-                    </a:p>
-                  </a:txBody>
-                  <a:tcPr marL="54864" marR="54864" marT="27432" marB="27432" anchor="ctr">
-                    <a:solidFill>
-                      <a:srgbClr val="F3F6FB"/>
-                    </a:solidFill>
-                  </a:tcPr>
-                </a:tc>
-                <a:tc>
-                  <a:txBody>
-                    <a:bodyPr wrap="square"/>
-                    <a:lstStyle/>
-                    <a:p>
-                      <a:pPr>
-                        <a:spcBef>
-                          <a:spcPts val="0"/>
-                        </a:spcBef>
-                        <a:buNone/>
-                      </a:pPr>
-                      <a:r>
-                        <a:rPr sz="1400" b="0">
-                          <a:solidFill>
-                            <a:srgbClr val="222222"/>
-                          </a:solidFill>
-                          <a:latin typeface="Roboto Medium"/>
-                          <a:ea typeface="Roboto Medium"/>
-                          <a:cs typeface="Roboto Medium"/>
-                        </a:rPr>
-                        <a:t>0.76 / 0.65 / 0.56</a:t>
-                      </a:r>
-                    </a:p>
-                  </a:txBody>
-                  <a:tcPr marL="54864" marR="54864" marT="27432" marB="27432" anchor="ctr">
-                    <a:solidFill>
-                      <a:srgbClr val="F3F6FB"/>
-                    </a:solidFill>
-                  </a:tcPr>
-                </a:tc>
-                <a:tc>
-                  <a:txBody>
-                    <a:bodyPr wrap="square"/>
-                    <a:lstStyle/>
-                    <a:p>
-                      <a:pPr>
-                        <a:spcBef>
-                          <a:spcPts val="0"/>
-                        </a:spcBef>
-                        <a:buNone/>
-                      </a:pPr>
-                      <a:r>
-                        <a:rPr sz="1400" b="1">
-                          <a:solidFill>
-                            <a:srgbClr val="003366"/>
-                          </a:solidFill>
-                          <a:latin typeface="Roboto Black"/>
-                          <a:ea typeface="Roboto Black"/>
-                          <a:cs typeface="Roboto Black"/>
-                        </a:rPr>
-                        <a:t>0.68 / 0.44</a:t>
-                      </a:r>
-                      <a:r>
-                        <a:rPr sz="1400" b="0">
-                          <a:solidFill>
-                            <a:srgbClr val="222222"/>
-                          </a:solidFill>
-                          <a:latin typeface="Roboto Medium"/>
-                          <a:ea typeface="Roboto Medium"/>
-                          <a:cs typeface="Roboto Medium"/>
-                        </a:rPr>
-                        <a:t> / 0.52</a:t>
-                      </a:r>
-                    </a:p>
-                  </a:txBody>
-                  <a:tcPr marL="54864" marR="54864" marT="27432" marB="27432" anchor="ctr">
-                    <a:solidFill>
-                      <a:srgbClr val="F3F6FB"/>
-                    </a:solidFill>
-                  </a:tcPr>
-                </a:tc>
-              </a:tr>
-            </a:tbl>
-          </a:graphicData>
-        </a:graphic>
-      </p:graphicFrame>
-      <p:sp>
-        <p:nvSpPr>
-          <p:cNvPr id="11" name="Rectangle 10"/>
+              <a:t>Lộ topology → kẻ tấn công biết agent nào quan trọng để tấn công, hoặc sao chép thiết kế.</a:t>
+            </a:r>
+          </a:p>
+        </p:txBody>
+      </p:sp>
+      <p:sp>
+        <p:nvSpPr>
+          <p:cNvPr id="22" name="Card 22"/>
           <p:cNvSpPr/>
           <p:nvPr/>
         </p:nvSpPr>
         <p:spPr>
           <a:xfrm>
-            <a:off x="6675120" y="3977639"/>
-            <a:ext cx="5074920" cy="1965960"/>
+            <a:off x="7040880" y="960120"/>
+            <a:ext cx="4736592" cy="3886200"/>
           </a:xfrm>
           <a:prstGeom prst="rect">
             <a:avLst/>
           </a:prstGeom>
           <a:solidFill>
-            <a:srgbClr val="FCF4F4"/>
+            <a:srgbClr val="F3F6FB"/>
           </a:solidFill>
           <a:ln w="9525">
             <a:solidFill>
-              <a:srgbClr val="EBCBCB"/>
+              <a:srgbClr val="CFDAE8"/>
             </a:solidFill>
           </a:ln>
           <a:effectLst/>
         </p:spPr>
-        <p:style>
-          <a:lnRef idx="1">
-            <a:schemeClr val="accent1"/>
-          </a:lnRef>
-          <a:fillRef idx="3">
-            <a:schemeClr val="accent1"/>
-          </a:fillRef>
-          <a:effectRef idx="2">
-            <a:schemeClr val="accent1"/>
-          </a:effectRef>
-          <a:fontRef idx="minor">
-            <a:schemeClr val="lt1"/>
-          </a:fontRef>
-        </p:style>
-        <p:txBody>
-          <a:bodyPr rtlCol="0" anchor="ctr"/>
+        <p:txBody>
+          <a:bodyPr wrap="square" rtlCol="0" anchor="ctr" lIns="73152" rIns="73152" tIns="36576" bIns="36576"/>
           <a:lstStyle/>
           <a:p/>
         </p:txBody>
       </p:sp>
       <p:sp>
         <p:nvSpPr>
-          <p:cNvPr id="12" name="Rectangle 11"/>
+          <p:cNvPr id="23" name="Card bar 23"/>
           <p:cNvSpPr/>
           <p:nvPr/>
         </p:nvSpPr>
         <p:spPr>
           <a:xfrm>
-            <a:off x="6675120" y="3977639"/>
-            <a:ext cx="5074920" cy="54864"/>
+            <a:off x="7040880" y="960120"/>
+            <a:ext cx="4736592" cy="54864"/>
           </a:xfrm>
           <a:prstGeom prst="rect">
             <a:avLst/>
           </a:prstGeom>
           <a:solidFill>
-            <a:srgbClr val="C00000"/>
+            <a:srgbClr val="003366"/>
           </a:solidFill>
           <a:ln>
             <a:noFill/>
           </a:ln>
           <a:effectLst/>
         </p:spPr>
-        <p:style>
-          <a:lnRef idx="1">
-            <a:schemeClr val="accent1"/>
-          </a:lnRef>
-          <a:fillRef idx="3">
-            <a:schemeClr val="accent1"/>
-          </a:fillRef>
-          <a:effectRef idx="2">
-            <a:schemeClr val="accent1"/>
-          </a:effectRef>
-          <a:fontRef idx="minor">
-            <a:schemeClr val="lt1"/>
-          </a:fontRef>
-        </p:style>
-        <p:txBody>
-          <a:bodyPr rtlCol="0" anchor="ctr"/>
+        <p:txBody>
+          <a:bodyPr wrap="square" rtlCol="0" anchor="ctr" lIns="73152" rIns="73152" tIns="36576" bIns="36576"/>
           <a:lstStyle/>
           <a:p/>
         </p:txBody>
       </p:sp>
       <p:sp>
         <p:nvSpPr>
-          <p:cNvPr id="13" name="TextBox 12"/>
+          <p:cNvPr id="24" name="TextBox 24"/>
           <p:cNvSpPr txBox="1"/>
           <p:nvPr/>
         </p:nvSpPr>
         <p:spPr>
           <a:xfrm>
-            <a:off x="6821424" y="4087368"/>
-            <a:ext cx="4800600" cy="1783080"/>
+            <a:off x="7223760" y="1097280"/>
+            <a:ext cx="4370832" cy="3657600"/>
           </a:xfrm>
           <a:prstGeom prst="rect">
             <a:avLst/>
@@ -23674,33 +23440,35 @@
               <a:spcBef>
                 <a:spcPts val="0"/>
               </a:spcBef>
+              <a:spcAft>
+                <a:spcPts val="0"/>
+              </a:spcAft>
               <a:buNone/>
             </a:pPr>
             <a:r>
-              <a:rPr sz="1900" b="1">
-                <a:solidFill>
-                  <a:srgbClr val="C00000"/>
+              <a:rPr sz="2200" b="1">
+                <a:solidFill>
+                  <a:srgbClr val="003366"/>
                 </a:solidFill>
                 <a:latin typeface="Roboto Black"/>
                 <a:ea typeface="Roboto Black"/>
                 <a:cs typeface="Roboto Black"/>
               </a:rPr>
-              <a:t>Hạn chế</a:t>
-            </a:r>
-          </a:p>
-          <a:p>
-            <a:pPr marL="125984" indent="-125984">
+              <a:t>Ý tưởng của MIRAGE</a:t>
+            </a:r>
+          </a:p>
+          <a:p>
+            <a:pPr>
               <a:spcBef>
-                <a:spcPts val="400"/>
+                <a:spcPts val="1000"/>
               </a:spcBef>
-              <a:buClr>
-                <a:srgbClr val="C00000"/>
-              </a:buClr>
-              <a:buFont typeface="Arial"/>
-              <a:buChar char="•"/>
+              <a:spcAft>
+                <a:spcPts val="0"/>
+              </a:spcAft>
+              <a:buNone/>
             </a:pPr>
             <a:r>
-              <a:rPr sz="1600" b="0">
+              <a:rPr sz="2050" b="0">
                 <a:solidFill>
                   <a:srgbClr val="222222"/>
                 </a:solidFill>
@@ -23708,22 +23476,21 @@
                 <a:ea typeface="Roboto Medium"/>
                 <a:cs typeface="Roboto Medium"/>
               </a:rPr>
-              <a:t>Chỉ 1 tấn công, không có adaptive attacker.</a:t>
-            </a:r>
-          </a:p>
-          <a:p>
-            <a:pPr marL="125984" indent="-125984">
-              <a:spcBef>
-                <a:spcPts val="400"/>
-              </a:spcBef>
-              <a:buClr>
-                <a:srgbClr val="C00000"/>
-              </a:buClr>
-              <a:buFont typeface="Arial"/>
-              <a:buChar char="•"/>
-            </a:pPr>
-            <a:r>
-              <a:rPr sz="1600" b="0">
+              <a:t xml:space="preserve">Hệ thống vẫn chạy trên </a:t>
+            </a:r>
+            <a:r>
+              <a:rPr sz="2050" b="1">
+                <a:solidFill>
+                  <a:srgbClr val="003366"/>
+                </a:solidFill>
+                <a:latin typeface="Roboto Black"/>
+                <a:ea typeface="Roboto Black"/>
+                <a:cs typeface="Roboto Black"/>
+              </a:rPr>
+              <a:t>đồ thị thật G</a:t>
+            </a:r>
+            <a:r>
+              <a:rPr sz="2050" b="0">
                 <a:solidFill>
                   <a:srgbClr val="222222"/>
                 </a:solidFill>
@@ -23731,22 +23498,21 @@
                 <a:ea typeface="Roboto Medium"/>
                 <a:cs typeface="Roboto Medium"/>
               </a:rPr>
-              <a:t>AUC vẫn 0.64–0.68, xa mức lý tưởng 0.5.</a:t>
-            </a:r>
-          </a:p>
-          <a:p>
-            <a:pPr marL="125984" indent="-125984">
-              <a:spcBef>
-                <a:spcPts val="400"/>
-              </a:spcBef>
-              <a:buClr>
-                <a:srgbClr val="C00000"/>
-              </a:buClr>
-              <a:buFont typeface="Arial"/>
-              <a:buChar char="•"/>
-            </a:pPr>
-            <a:r>
-              <a:rPr sz="1600" b="0">
+              <a:t xml:space="preserve">, nhưng kẻ tấn công chỉ nhìn thấy dấu vết của một </a:t>
+            </a:r>
+            <a:r>
+              <a:rPr sz="2050" b="1">
+                <a:solidFill>
+                  <a:srgbClr val="C00000"/>
+                </a:solidFill>
+                <a:latin typeface="Roboto Black"/>
+                <a:ea typeface="Roboto Black"/>
+                <a:cs typeface="Roboto Black"/>
+              </a:rPr>
+              <a:t>đồ thị giả G′</a:t>
+            </a:r>
+            <a:r>
+              <a:rPr sz="2050" b="0">
                 <a:solidFill>
                   <a:srgbClr val="222222"/>
                 </a:solidFill>
@@ -23754,7 +23520,89 @@
                 <a:ea typeface="Roboto Medium"/>
                 <a:cs typeface="Roboto Medium"/>
               </a:rPr>
-              <a:t>Không báo cáo chi phí của các lần gọi LLM thêm.</a:t>
+              <a:t>.</a:t>
+            </a:r>
+          </a:p>
+          <a:p>
+            <a:pPr>
+              <a:spcBef>
+                <a:spcPts val="1200"/>
+              </a:spcBef>
+              <a:spcAft>
+                <a:spcPts val="0"/>
+              </a:spcAft>
+              <a:buNone/>
+            </a:pPr>
+            <a:r>
+              <a:rPr sz="1900" b="0">
+                <a:solidFill>
+                  <a:srgbClr val="666666"/>
+                </a:solidFill>
+                <a:latin typeface="Roboto Medium"/>
+                <a:ea typeface="Roboto Medium"/>
+                <a:cs typeface="Roboto Medium"/>
+              </a:rPr>
+              <a:t>Giống như đưa cho kẻ trộm một tấm bản đồ giả, còn đường đi thật trong nhà vẫn giữ nguyên.</a:t>
+            </a:r>
+          </a:p>
+        </p:txBody>
+      </p:sp>
+      <p:sp>
+        <p:nvSpPr>
+          <p:cNvPr id="25" name="Shape 25"/>
+          <p:cNvSpPr/>
+          <p:nvPr/>
+        </p:nvSpPr>
+        <p:spPr>
+          <a:xfrm>
+            <a:off x="411480" y="5074920"/>
+            <a:ext cx="11365992" cy="822960"/>
+          </a:xfrm>
+          <a:prstGeom prst="rect">
+            <a:avLst/>
+          </a:prstGeom>
+          <a:solidFill>
+            <a:srgbClr val="EEF3FA"/>
+          </a:solidFill>
+          <a:ln>
+            <a:noFill/>
+          </a:ln>
+          <a:effectLst/>
+        </p:spPr>
+        <p:txBody>
+          <a:bodyPr wrap="square" rtlCol="0" anchor="ctr" lIns="182880" rIns="182880" tIns="91440" bIns="91440"/>
+          <a:lstStyle/>
+          <a:p>
+            <a:pPr>
+              <a:spcBef>
+                <a:spcPts val="0"/>
+              </a:spcBef>
+              <a:spcAft>
+                <a:spcPts val="0"/>
+              </a:spcAft>
+              <a:buNone/>
+            </a:pPr>
+            <a:r>
+              <a:rPr sz="1950" b="1">
+                <a:solidFill>
+                  <a:srgbClr val="003366"/>
+                </a:solidFill>
+                <a:latin typeface="Roboto Black"/>
+                <a:ea typeface="Roboto Black"/>
+                <a:cs typeface="Roboto Black"/>
+              </a:rPr>
+              <a:t>Câu hỏi:</a:t>
+            </a:r>
+            <a:r>
+              <a:rPr sz="1950" b="0">
+                <a:solidFill>
+                  <a:srgbClr val="222222"/>
+                </a:solidFill>
+                <a:latin typeface="Roboto Medium"/>
+                <a:ea typeface="Roboto Medium"/>
+                <a:cs typeface="Roboto Medium"/>
+              </a:rPr>
+              <a:t xml:space="preserve"> giấu được topology mà không làm hệ thống trả lời kém đi?</a:t>
             </a:r>
           </a:p>
         </p:txBody>
@@ -23812,7 +23660,7 @@
                 <a:ea typeface="Roboto Black"/>
                 <a:cs typeface="Roboto Black"/>
               </a:rPr>
-              <a:t>TIDE: misinformation làm chệch collective fact recovery</a:t>
+              <a:t>MIRAGE: ba bước tạo “đồ thị giả”</a:t>
             </a:r>
           </a:p>
         </p:txBody>
@@ -24021,156 +23869,14 @@
       </p:sp>
       <p:sp>
         <p:nvSpPr>
-          <p:cNvPr id="8" name="TextBox 7"/>
-          <p:cNvSpPr txBox="1"/>
+          <p:cNvPr id="21" name="Card 21"/>
+          <p:cNvSpPr/>
           <p:nvPr/>
         </p:nvSpPr>
         <p:spPr>
           <a:xfrm>
             <a:off x="411480" y="914400"/>
-            <a:ext cx="5852160" cy="3017520"/>
-          </a:xfrm>
-          <a:prstGeom prst="rect">
-            <a:avLst/>
-          </a:prstGeom>
-          <a:noFill/>
-        </p:spPr>
-        <p:txBody>
-          <a:bodyPr wrap="square" anchor="t" lIns="45720" rIns="45720" tIns="18288" bIns="18288"/>
-          <a:lstStyle/>
-          <a:p>
-            <a:pPr>
-              <a:spcBef>
-                <a:spcPts val="0"/>
-              </a:spcBef>
-              <a:buNone/>
-            </a:pPr>
-            <a:r>
-              <a:rPr sz="2000" b="1">
-                <a:solidFill>
-                  <a:srgbClr val="003366"/>
-                </a:solidFill>
-                <a:latin typeface="Roboto Black"/>
-                <a:ea typeface="Roboto Black"/>
-                <a:cs typeface="Roboto Black"/>
-              </a:rPr>
-              <a:t>Thiết lập</a:t>
-            </a:r>
-          </a:p>
-          <a:p>
-            <a:pPr marL="133858" indent="-133858">
-              <a:spcBef>
-                <a:spcPts val="500"/>
-              </a:spcBef>
-              <a:buClr>
-                <a:srgbClr val="C00000"/>
-              </a:buClr>
-              <a:buFont typeface="Arial"/>
-              <a:buChar char="•"/>
-            </a:pPr>
-            <a:r>
-              <a:rPr sz="1700" b="1">
-                <a:solidFill>
-                  <a:srgbClr val="003366"/>
-                </a:solidFill>
-                <a:latin typeface="Roboto Black"/>
-                <a:ea typeface="Roboto Black"/>
-                <a:cs typeface="Roboto Black"/>
-              </a:rPr>
-              <a:t>120 môi trường</a:t>
-            </a:r>
-            <a:r>
-              <a:rPr sz="1700" b="0">
-                <a:solidFill>
-                  <a:srgbClr val="222222"/>
-                </a:solidFill>
-                <a:latin typeface="Roboto Medium"/>
-                <a:ea typeface="Roboto Medium"/>
-                <a:cs typeface="Roboto Medium"/>
-              </a:rPr>
-              <a:t> Hi-ToM; 5 agent, mỗi agent chỉ thấy một phần chuỗi vị trí.</a:t>
-            </a:r>
-          </a:p>
-          <a:p>
-            <a:pPr marL="133858" indent="-133858">
-              <a:spcBef>
-                <a:spcPts val="500"/>
-              </a:spcBef>
-              <a:buClr>
-                <a:srgbClr val="C00000"/>
-              </a:buClr>
-              <a:buFont typeface="Arial"/>
-              <a:buChar char="•"/>
-            </a:pPr>
-            <a:r>
-              <a:rPr sz="1700" b="0">
-                <a:solidFill>
-                  <a:srgbClr val="222222"/>
-                </a:solidFill>
-                <a:latin typeface="Roboto Medium"/>
-                <a:ea typeface="Roboto Medium"/>
-                <a:cs typeface="Roboto Medium"/>
-              </a:rPr>
-              <a:t>C0: tất cả trung thực · C1: key agent nói dối (Event / Coverage / Source).</a:t>
-            </a:r>
-          </a:p>
-          <a:p>
-            <a:pPr marL="133858" indent="-133858">
-              <a:spcBef>
-                <a:spcPts val="500"/>
-              </a:spcBef>
-              <a:buClr>
-                <a:srgbClr val="C00000"/>
-              </a:buClr>
-              <a:buFont typeface="Arial"/>
-              <a:buChar char="•"/>
-            </a:pPr>
-            <a:r>
-              <a:rPr sz="1700" b="0">
-                <a:solidFill>
-                  <a:srgbClr val="222222"/>
-                </a:solidFill>
-                <a:latin typeface="Roboto Medium"/>
-                <a:ea typeface="Roboto Medium"/>
-                <a:cs typeface="Roboto Medium"/>
-              </a:rPr>
-              <a:t>GPT-5.5, DeepSeek-v4-pro, Grok-4.5; đo cả </a:t>
-            </a:r>
-            <a:r>
-              <a:rPr sz="1700" b="1">
-                <a:solidFill>
-                  <a:srgbClr val="003366"/>
-                </a:solidFill>
-                <a:latin typeface="Roboto Black"/>
-                <a:ea typeface="Roboto Black"/>
-                <a:cs typeface="Roboto Black"/>
-              </a:rPr>
-              <a:t>evidence lineage</a:t>
-            </a:r>
-            <a:r>
-              <a:rPr sz="1700" b="0">
-                <a:solidFill>
-                  <a:srgbClr val="222222"/>
-                </a:solidFill>
-                <a:latin typeface="Roboto Medium"/>
-                <a:ea typeface="Roboto Medium"/>
-                <a:cs typeface="Roboto Medium"/>
-              </a:rPr>
-              <a:t>.</a:t>
-            </a:r>
-          </a:p>
-        </p:txBody>
-      </p:sp>
-      <p:sp>
-        <p:nvSpPr>
-          <p:cNvPr id="9" name="Rectangle 8"/>
-          <p:cNvSpPr/>
-          <p:nvPr/>
-        </p:nvSpPr>
-        <p:spPr>
-          <a:xfrm>
-            <a:off x="6492240" y="960120"/>
-            <a:ext cx="5285232" cy="2971800"/>
+            <a:ext cx="3605784" cy="2514600"/>
           </a:xfrm>
           <a:prstGeom prst="rect">
             <a:avLst/>
@@ -24185,36 +23891,22 @@
           </a:ln>
           <a:effectLst/>
         </p:spPr>
-        <p:style>
-          <a:lnRef idx="1">
-            <a:schemeClr val="accent1"/>
-          </a:lnRef>
-          <a:fillRef idx="3">
-            <a:schemeClr val="accent1"/>
-          </a:fillRef>
-          <a:effectRef idx="2">
-            <a:schemeClr val="accent1"/>
-          </a:effectRef>
-          <a:fontRef idx="minor">
-            <a:schemeClr val="lt1"/>
-          </a:fontRef>
-        </p:style>
-        <p:txBody>
-          <a:bodyPr rtlCol="0" anchor="ctr"/>
+        <p:txBody>
+          <a:bodyPr wrap="square" rtlCol="0" anchor="ctr" lIns="73152" rIns="73152" tIns="36576" bIns="36576"/>
           <a:lstStyle/>
           <a:p/>
         </p:txBody>
       </p:sp>
       <p:sp>
         <p:nvSpPr>
-          <p:cNvPr id="10" name="Rectangle 9"/>
+          <p:cNvPr id="22" name="Card bar 22"/>
           <p:cNvSpPr/>
           <p:nvPr/>
         </p:nvSpPr>
         <p:spPr>
           <a:xfrm>
-            <a:off x="6492240" y="960120"/>
-            <a:ext cx="5285232" cy="54864"/>
+            <a:off x="411480" y="914400"/>
+            <a:ext cx="3605784" cy="54864"/>
           </a:xfrm>
           <a:prstGeom prst="rect">
             <a:avLst/>
@@ -24227,373 +23919,71 @@
           </a:ln>
           <a:effectLst/>
         </p:spPr>
-        <p:style>
-          <a:lnRef idx="1">
-            <a:schemeClr val="accent1"/>
-          </a:lnRef>
-          <a:fillRef idx="3">
-            <a:schemeClr val="accent1"/>
-          </a:fillRef>
-          <a:effectRef idx="2">
-            <a:schemeClr val="accent1"/>
-          </a:effectRef>
-          <a:fontRef idx="minor">
-            <a:schemeClr val="lt1"/>
-          </a:fontRef>
-        </p:style>
-        <p:txBody>
-          <a:bodyPr rtlCol="0" anchor="ctr"/>
+        <p:txBody>
+          <a:bodyPr wrap="square" rtlCol="0" anchor="ctr" lIns="73152" rIns="73152" tIns="36576" bIns="36576"/>
           <a:lstStyle/>
           <a:p/>
         </p:txBody>
       </p:sp>
       <p:sp>
         <p:nvSpPr>
-          <p:cNvPr id="11" name="TextBox 10"/>
-          <p:cNvSpPr txBox="1"/>
-          <p:nvPr/>
-        </p:nvSpPr>
-        <p:spPr>
-          <a:xfrm>
-            <a:off x="6638544" y="1069848"/>
-            <a:ext cx="5029200" cy="365760"/>
-          </a:xfrm>
-          <a:prstGeom prst="rect">
-            <a:avLst/>
-          </a:prstGeom>
-          <a:noFill/>
-        </p:spPr>
-        <p:txBody>
-          <a:bodyPr wrap="square" anchor="t" lIns="45720" rIns="45720" tIns="18288" bIns="18288"/>
-          <a:lstStyle/>
-          <a:p>
-            <a:pPr>
-              <a:spcBef>
-                <a:spcPts val="0"/>
-              </a:spcBef>
-              <a:buNone/>
-            </a:pPr>
-            <a:r>
-              <a:rPr sz="1500" b="1">
-                <a:solidFill>
-                  <a:srgbClr val="666666"/>
-                </a:solidFill>
-                <a:latin typeface="Roboto Black"/>
-                <a:ea typeface="Roboto Black"/>
-                <a:cs typeface="Roboto Black"/>
-              </a:rPr>
-              <a:t>Tỉ lệ đa số đúng (C0 → C1)</a:t>
-            </a:r>
-          </a:p>
-        </p:txBody>
-      </p:sp>
-      <p:sp>
-        <p:nvSpPr>
-          <p:cNvPr id="12" name="TextBox 11"/>
-          <p:cNvSpPr txBox="1"/>
-          <p:nvPr/>
-        </p:nvSpPr>
-        <p:spPr>
-          <a:xfrm>
-            <a:off x="6638544" y="1463040"/>
-            <a:ext cx="5029200" cy="1005840"/>
-          </a:xfrm>
-          <a:prstGeom prst="rect">
-            <a:avLst/>
-          </a:prstGeom>
-          <a:noFill/>
-        </p:spPr>
-        <p:txBody>
-          <a:bodyPr wrap="square" anchor="t" lIns="45720" rIns="45720" tIns="18288" bIns="18288"/>
-          <a:lstStyle/>
-          <a:p>
-            <a:pPr>
-              <a:spcBef>
-                <a:spcPts val="0"/>
-              </a:spcBef>
-              <a:buNone/>
-            </a:pPr>
-            <a:r>
-              <a:rPr sz="4400" b="1">
-                <a:solidFill>
-                  <a:srgbClr val="003366"/>
-                </a:solidFill>
-                <a:latin typeface="Roboto Black"/>
-                <a:ea typeface="Roboto Black"/>
-                <a:cs typeface="Roboto Black"/>
-              </a:rPr>
-              <a:t>72.50% → </a:t>
-            </a:r>
-            <a:r>
-              <a:rPr sz="4400" b="1">
-                <a:solidFill>
-                  <a:srgbClr val="C00000"/>
-                </a:solidFill>
-                <a:latin typeface="Roboto Black"/>
-                <a:ea typeface="Roboto Black"/>
-                <a:cs typeface="Roboto Black"/>
-              </a:rPr>
-              <a:t>14.17%</a:t>
-            </a:r>
-          </a:p>
-        </p:txBody>
-      </p:sp>
-      <p:sp>
-        <p:nvSpPr>
-          <p:cNvPr id="13" name="TextBox 12"/>
-          <p:cNvSpPr txBox="1"/>
-          <p:nvPr/>
-        </p:nvSpPr>
-        <p:spPr>
-          <a:xfrm>
-            <a:off x="6638544" y="2514600"/>
-            <a:ext cx="2468880" cy="685800"/>
-          </a:xfrm>
-          <a:prstGeom prst="rect">
-            <a:avLst/>
-          </a:prstGeom>
-          <a:noFill/>
-        </p:spPr>
-        <p:txBody>
-          <a:bodyPr wrap="square" anchor="t" lIns="45720" rIns="45720" tIns="18288" bIns="18288"/>
-          <a:lstStyle/>
-          <a:p>
-            <a:pPr>
-              <a:spcBef>
-                <a:spcPts val="0"/>
-              </a:spcBef>
-              <a:buNone/>
-            </a:pPr>
-            <a:r>
-              <a:rPr sz="2200" b="1">
-                <a:solidFill>
-                  <a:srgbClr val="C00000"/>
-                </a:solidFill>
-                <a:latin typeface="Roboto Black"/>
-                <a:ea typeface="Roboto Black"/>
-                <a:cs typeface="Roboto Black"/>
-              </a:rPr>
-              <a:t>70.7% vs 25.4%</a:t>
-            </a:r>
-          </a:p>
-        </p:txBody>
-      </p:sp>
-      <p:sp>
-        <p:nvSpPr>
-          <p:cNvPr id="14" name="TextBox 13"/>
-          <p:cNvSpPr txBox="1"/>
-          <p:nvPr/>
-        </p:nvSpPr>
-        <p:spPr>
-          <a:xfrm>
-            <a:off x="6638544" y="3172968"/>
-            <a:ext cx="2468880" cy="640080"/>
-          </a:xfrm>
-          <a:prstGeom prst="rect">
-            <a:avLst/>
-          </a:prstGeom>
-          <a:noFill/>
-        </p:spPr>
-        <p:txBody>
-          <a:bodyPr wrap="square" anchor="t" lIns="45720" rIns="45720" tIns="18288" bIns="18288"/>
-          <a:lstStyle/>
-          <a:p>
-            <a:pPr>
-              <a:spcBef>
-                <a:spcPts val="0"/>
-              </a:spcBef>
-              <a:buNone/>
-            </a:pPr>
-            <a:r>
-              <a:rPr sz="1300" b="0">
-                <a:solidFill>
-                  <a:srgbClr val="666666"/>
-                </a:solidFill>
-                <a:latin typeface="Roboto Medium"/>
-                <a:ea typeface="Roboto Medium"/>
-                <a:cs typeface="Roboto Medium"/>
-              </a:rPr>
-              <a:t>testimony sai vs đúng được chấp nhận</a:t>
-            </a:r>
-          </a:p>
-        </p:txBody>
-      </p:sp>
-      <p:sp>
-        <p:nvSpPr>
-          <p:cNvPr id="15" name="TextBox 14"/>
-          <p:cNvSpPr txBox="1"/>
-          <p:nvPr/>
-        </p:nvSpPr>
-        <p:spPr>
-          <a:xfrm>
-            <a:off x="9189720" y="2514600"/>
-            <a:ext cx="2468880" cy="685800"/>
-          </a:xfrm>
-          <a:prstGeom prst="rect">
-            <a:avLst/>
-          </a:prstGeom>
-          <a:noFill/>
-        </p:spPr>
-        <p:txBody>
-          <a:bodyPr wrap="square" anchor="t" lIns="45720" rIns="45720" tIns="18288" bIns="18288"/>
-          <a:lstStyle/>
-          <a:p>
-            <a:pPr>
-              <a:spcBef>
-                <a:spcPts val="0"/>
-              </a:spcBef>
-              <a:buNone/>
-            </a:pPr>
-            <a:r>
-              <a:rPr sz="2200" b="1">
-                <a:solidFill>
-                  <a:srgbClr val="003366"/>
-                </a:solidFill>
-                <a:latin typeface="Roboto Black"/>
-                <a:ea typeface="Roboto Black"/>
-                <a:cs typeface="Roboto Black"/>
-              </a:rPr>
-              <a:t>2.66 vs 1.33</a:t>
-            </a:r>
-          </a:p>
-        </p:txBody>
-      </p:sp>
-      <p:sp>
-        <p:nvSpPr>
-          <p:cNvPr id="16" name="TextBox 15"/>
-          <p:cNvSpPr txBox="1"/>
-          <p:nvPr/>
-        </p:nvSpPr>
-        <p:spPr>
-          <a:xfrm>
-            <a:off x="9189720" y="3172968"/>
-            <a:ext cx="2468880" cy="640080"/>
-          </a:xfrm>
-          <a:prstGeom prst="rect">
-            <a:avLst/>
-          </a:prstGeom>
-          <a:noFill/>
-        </p:spPr>
-        <p:txBody>
-          <a:bodyPr wrap="square" anchor="t" lIns="45720" rIns="45720" tIns="18288" bIns="18288"/>
-          <a:lstStyle/>
-          <a:p>
-            <a:pPr>
-              <a:spcBef>
-                <a:spcPts val="0"/>
-              </a:spcBef>
-              <a:buNone/>
-            </a:pPr>
-            <a:r>
-              <a:rPr sz="1300" b="0">
-                <a:solidFill>
-                  <a:srgbClr val="666666"/>
-                </a:solidFill>
-                <a:latin typeface="Roboto Medium"/>
-                <a:ea typeface="Roboto Medium"/>
-                <a:cs typeface="Roboto Medium"/>
-              </a:rPr>
-              <a:t>propagation order: sai vs đúng</a:t>
-            </a:r>
-          </a:p>
-        </p:txBody>
-      </p:sp>
-      <p:sp>
-        <p:nvSpPr>
-          <p:cNvPr id="17" name="Rectangle 16"/>
+          <p:cNvPr id="23" name="Shape 23"/>
           <p:cNvSpPr/>
           <p:nvPr/>
         </p:nvSpPr>
         <p:spPr>
           <a:xfrm>
-            <a:off x="411480" y="4114800"/>
-            <a:ext cx="11365992" cy="1828800"/>
-          </a:xfrm>
-          <a:prstGeom prst="rect">
+            <a:off x="594360" y="1143000"/>
+            <a:ext cx="502920" cy="502920"/>
+          </a:xfrm>
+          <a:prstGeom prst="ellipse">
             <a:avLst/>
           </a:prstGeom>
           <a:solidFill>
-            <a:srgbClr val="FCF4F4"/>
-          </a:solidFill>
-          <a:ln w="9525">
-            <a:solidFill>
-              <a:srgbClr val="EBCBCB"/>
-            </a:solidFill>
-          </a:ln>
-          <a:effectLst/>
-        </p:spPr>
-        <p:style>
-          <a:lnRef idx="1">
-            <a:schemeClr val="accent1"/>
-          </a:lnRef>
-          <a:fillRef idx="3">
-            <a:schemeClr val="accent1"/>
-          </a:fillRef>
-          <a:effectRef idx="2">
-            <a:schemeClr val="accent1"/>
-          </a:effectRef>
-          <a:fontRef idx="minor">
-            <a:schemeClr val="lt1"/>
-          </a:fontRef>
-        </p:style>
-        <p:txBody>
-          <a:bodyPr rtlCol="0" anchor="ctr"/>
-          <a:lstStyle/>
-          <a:p/>
-        </p:txBody>
-      </p:sp>
-      <p:sp>
-        <p:nvSpPr>
-          <p:cNvPr id="18" name="Rectangle 17"/>
-          <p:cNvSpPr/>
-          <p:nvPr/>
-        </p:nvSpPr>
-        <p:spPr>
-          <a:xfrm>
-            <a:off x="411480" y="4114800"/>
-            <a:ext cx="11365992" cy="54864"/>
-          </a:xfrm>
-          <a:prstGeom prst="rect">
-            <a:avLst/>
-          </a:prstGeom>
-          <a:solidFill>
-            <a:srgbClr val="C00000"/>
+            <a:srgbClr val="003366"/>
           </a:solidFill>
           <a:ln>
             <a:noFill/>
           </a:ln>
           <a:effectLst/>
         </p:spPr>
-        <p:style>
-          <a:lnRef idx="1">
-            <a:schemeClr val="accent1"/>
-          </a:lnRef>
-          <a:fillRef idx="3">
-            <a:schemeClr val="accent1"/>
-          </a:fillRef>
-          <a:effectRef idx="2">
-            <a:schemeClr val="accent1"/>
-          </a:effectRef>
-          <a:fontRef idx="minor">
-            <a:schemeClr val="lt1"/>
-          </a:fontRef>
-        </p:style>
-        <p:txBody>
-          <a:bodyPr rtlCol="0" anchor="ctr"/>
-          <a:lstStyle/>
-          <a:p/>
-        </p:txBody>
-      </p:sp>
-      <p:sp>
-        <p:nvSpPr>
-          <p:cNvPr id="19" name="TextBox 18"/>
+        <p:txBody>
+          <a:bodyPr wrap="square" rtlCol="0" anchor="ctr" lIns="0" rIns="0" tIns="0" bIns="0"/>
+          <a:lstStyle/>
+          <a:p>
+            <a:pPr algn="ctr">
+              <a:spcBef>
+                <a:spcPts val="0"/>
+              </a:spcBef>
+              <a:spcAft>
+                <a:spcPts val="0"/>
+              </a:spcAft>
+              <a:buNone/>
+            </a:pPr>
+            <a:r>
+              <a:rPr sz="1850" b="1">
+                <a:solidFill>
+                  <a:srgbClr val="FFFFFF"/>
+                </a:solidFill>
+                <a:latin typeface="Roboto Black"/>
+                <a:ea typeface="Roboto Black"/>
+                <a:cs typeface="Roboto Black"/>
+              </a:rPr>
+              <a:t>1</a:t>
+            </a:r>
+          </a:p>
+        </p:txBody>
+      </p:sp>
+      <p:sp>
+        <p:nvSpPr>
+          <p:cNvPr id="24" name="TextBox 24"/>
           <p:cNvSpPr txBox="1"/>
           <p:nvPr/>
         </p:nvSpPr>
         <p:spPr>
           <a:xfrm>
-            <a:off x="557784" y="4224528"/>
-            <a:ext cx="11064240" cy="1645920"/>
+            <a:off x="1234440" y="1115568"/>
+            <a:ext cx="2645664" cy="594360"/>
           </a:xfrm>
           <a:prstGeom prst="rect">
             <a:avLst/>
@@ -24601,37 +23991,60 @@
           <a:noFill/>
         </p:spPr>
         <p:txBody>
-          <a:bodyPr wrap="square" anchor="t" lIns="45720" rIns="45720" tIns="18288" bIns="18288"/>
+          <a:bodyPr wrap="square" anchor="ctr" lIns="45720" rIns="45720" tIns="18288" bIns="18288"/>
           <a:lstStyle/>
           <a:p>
             <a:pPr>
               <a:spcBef>
                 <a:spcPts val="0"/>
               </a:spcBef>
+              <a:spcAft>
+                <a:spcPts val="0"/>
+              </a:spcAft>
               <a:buNone/>
             </a:pPr>
             <a:r>
-              <a:rPr sz="1900" b="1">
-                <a:solidFill>
-                  <a:srgbClr val="C00000"/>
+              <a:rPr sz="1850" b="1">
+                <a:solidFill>
+                  <a:srgbClr val="003366"/>
                 </a:solidFill>
                 <a:latin typeface="Roboto Black"/>
                 <a:ea typeface="Roboto Black"/>
                 <a:cs typeface="Roboto Black"/>
               </a:rPr>
-              <a:t>Thông điệp</a:t>
-            </a:r>
-          </a:p>
-          <a:p>
-            <a:pPr marL="129921" indent="-129921">
+              <a:t>Tạo đồ thị giả</a:t>
+            </a:r>
+          </a:p>
+        </p:txBody>
+      </p:sp>
+      <p:sp>
+        <p:nvSpPr>
+          <p:cNvPr id="25" name="TextBox 25"/>
+          <p:cNvSpPr txBox="1"/>
+          <p:nvPr/>
+        </p:nvSpPr>
+        <p:spPr>
+          <a:xfrm>
+            <a:off x="594360" y="1828800"/>
+            <a:ext cx="3240024" cy="1508760"/>
+          </a:xfrm>
+          <a:prstGeom prst="rect">
+            <a:avLst/>
+          </a:prstGeom>
+          <a:noFill/>
+        </p:spPr>
+        <p:txBody>
+          <a:bodyPr wrap="square" anchor="t" lIns="45720" rIns="45720" tIns="18288" bIns="18288"/>
+          <a:lstStyle/>
+          <a:p>
+            <a:pPr>
               <a:spcBef>
-                <a:spcPts val="400"/>
+                <a:spcPts val="0"/>
               </a:spcBef>
-              <a:buClr>
-                <a:srgbClr val="C00000"/>
-              </a:buClr>
-              <a:buFont typeface="Arial"/>
-              <a:buChar char="•"/>
+              <a:spcAft>
+                <a:spcPts val="0"/>
+              </a:spcAft>
+              <a:buNone/>
             </a:pPr>
             <a:r>
               <a:rPr sz="1650" b="0">
@@ -24642,19 +24055,212 @@
                 <a:ea typeface="Roboto Medium"/>
                 <a:cs typeface="Roboto Medium"/>
               </a:rPr>
-              <a:t>Thảo luận </a:t>
-            </a:r>
-            <a:r>
-              <a:rPr sz="1650" b="1">
-                <a:solidFill>
-                  <a:srgbClr val="003366"/>
+              <a:t>Giữ nguyên các agent, nối lại một số cạnh để G′ đủ khác G (độ lệch ρ ≥ ρ₀) nhưng vẫn là một đồ thị hợp lệ.</a:t>
+            </a:r>
+          </a:p>
+        </p:txBody>
+      </p:sp>
+      <p:cxnSp>
+        <p:nvCxnSpPr>
+          <p:cNvPr id="26" name="Connector 26"/>
+          <p:cNvCxnSpPr/>
+          <p:nvPr/>
+        </p:nvCxnSpPr>
+        <p:spPr>
+          <a:xfrm>
+            <a:off x="4053840" y="2167128"/>
+            <a:ext cx="201168" cy="0"/>
+          </a:xfrm>
+          <a:prstGeom prst="straightConnector1">
+            <a:avLst/>
+          </a:prstGeom>
+          <a:ln w="22225">
+            <a:solidFill>
+              <a:srgbClr val="003366"/>
+            </a:solidFill>
+            <a:tailEnd type="triangle" w="med" len="med"/>
+          </a:ln>
+        </p:spPr>
+      </p:cxnSp>
+      <p:sp>
+        <p:nvSpPr>
+          <p:cNvPr id="27" name="Card 27"/>
+          <p:cNvSpPr/>
+          <p:nvPr/>
+        </p:nvSpPr>
+        <p:spPr>
+          <a:xfrm>
+            <a:off x="4291584" y="914400"/>
+            <a:ext cx="3605784" cy="2514600"/>
+          </a:xfrm>
+          <a:prstGeom prst="rect">
+            <a:avLst/>
+          </a:prstGeom>
+          <a:solidFill>
+            <a:srgbClr val="F3F6FB"/>
+          </a:solidFill>
+          <a:ln w="9525">
+            <a:solidFill>
+              <a:srgbClr val="CFDAE8"/>
+            </a:solidFill>
+          </a:ln>
+          <a:effectLst/>
+        </p:spPr>
+        <p:txBody>
+          <a:bodyPr wrap="square" rtlCol="0" anchor="ctr" lIns="73152" rIns="73152" tIns="36576" bIns="36576"/>
+          <a:lstStyle/>
+          <a:p/>
+        </p:txBody>
+      </p:sp>
+      <p:sp>
+        <p:nvSpPr>
+          <p:cNvPr id="28" name="Card bar 28"/>
+          <p:cNvSpPr/>
+          <p:nvPr/>
+        </p:nvSpPr>
+        <p:spPr>
+          <a:xfrm>
+            <a:off x="4291584" y="914400"/>
+            <a:ext cx="3605784" cy="54864"/>
+          </a:xfrm>
+          <a:prstGeom prst="rect">
+            <a:avLst/>
+          </a:prstGeom>
+          <a:solidFill>
+            <a:srgbClr val="003366"/>
+          </a:solidFill>
+          <a:ln>
+            <a:noFill/>
+          </a:ln>
+          <a:effectLst/>
+        </p:spPr>
+        <p:txBody>
+          <a:bodyPr wrap="square" rtlCol="0" anchor="ctr" lIns="73152" rIns="73152" tIns="36576" bIns="36576"/>
+          <a:lstStyle/>
+          <a:p/>
+        </p:txBody>
+      </p:sp>
+      <p:sp>
+        <p:nvSpPr>
+          <p:cNvPr id="29" name="Shape 29"/>
+          <p:cNvSpPr/>
+          <p:nvPr/>
+        </p:nvSpPr>
+        <p:spPr>
+          <a:xfrm>
+            <a:off x="4474464" y="1143000"/>
+            <a:ext cx="502920" cy="502920"/>
+          </a:xfrm>
+          <a:prstGeom prst="ellipse">
+            <a:avLst/>
+          </a:prstGeom>
+          <a:solidFill>
+            <a:srgbClr val="003366"/>
+          </a:solidFill>
+          <a:ln>
+            <a:noFill/>
+          </a:ln>
+          <a:effectLst/>
+        </p:spPr>
+        <p:txBody>
+          <a:bodyPr wrap="square" rtlCol="0" anchor="ctr" lIns="0" rIns="0" tIns="0" bIns="0"/>
+          <a:lstStyle/>
+          <a:p>
+            <a:pPr algn="ctr">
+              <a:spcBef>
+                <a:spcPts val="0"/>
+              </a:spcBef>
+              <a:spcAft>
+                <a:spcPts val="0"/>
+              </a:spcAft>
+              <a:buNone/>
+            </a:pPr>
+            <a:r>
+              <a:rPr sz="1850" b="1">
+                <a:solidFill>
+                  <a:srgbClr val="FFFFFF"/>
                 </a:solidFill>
                 <a:latin typeface="Roboto Black"/>
                 <a:ea typeface="Roboto Black"/>
                 <a:cs typeface="Roboto Black"/>
               </a:rPr>
-              <a:t>khuếch đại</a:t>
-            </a:r>
+              <a:t>2</a:t>
+            </a:r>
+          </a:p>
+        </p:txBody>
+      </p:sp>
+      <p:sp>
+        <p:nvSpPr>
+          <p:cNvPr id="30" name="TextBox 30"/>
+          <p:cNvSpPr txBox="1"/>
+          <p:nvPr/>
+        </p:nvSpPr>
+        <p:spPr>
+          <a:xfrm>
+            <a:off x="5114544" y="1115568"/>
+            <a:ext cx="2645664" cy="594360"/>
+          </a:xfrm>
+          <a:prstGeom prst="rect">
+            <a:avLst/>
+          </a:prstGeom>
+          <a:noFill/>
+        </p:spPr>
+        <p:txBody>
+          <a:bodyPr wrap="square" anchor="ctr" lIns="45720" rIns="45720" tIns="18288" bIns="18288"/>
+          <a:lstStyle/>
+          <a:p>
+            <a:pPr>
+              <a:spcBef>
+                <a:spcPts val="0"/>
+              </a:spcBef>
+              <a:spcAft>
+                <a:spcPts val="0"/>
+              </a:spcAft>
+              <a:buNone/>
+            </a:pPr>
+            <a:r>
+              <a:rPr sz="1850" b="1">
+                <a:solidFill>
+                  <a:srgbClr val="003366"/>
+                </a:solidFill>
+                <a:latin typeface="Roboto Black"/>
+                <a:ea typeface="Roboto Black"/>
+                <a:cs typeface="Roboto Black"/>
+              </a:rPr>
+              <a:t>Làm cạnh giả như thật</a:t>
+            </a:r>
+          </a:p>
+        </p:txBody>
+      </p:sp>
+      <p:sp>
+        <p:nvSpPr>
+          <p:cNvPr id="31" name="TextBox 31"/>
+          <p:cNvSpPr txBox="1"/>
+          <p:nvPr/>
+        </p:nvSpPr>
+        <p:spPr>
+          <a:xfrm>
+            <a:off x="4474464" y="1828800"/>
+            <a:ext cx="3240024" cy="1508760"/>
+          </a:xfrm>
+          <a:prstGeom prst="rect">
+            <a:avLst/>
+          </a:prstGeom>
+          <a:noFill/>
+        </p:spPr>
+        <p:txBody>
+          <a:bodyPr wrap="square" anchor="t" lIns="45720" rIns="45720" tIns="18288" bIns="18288"/>
+          <a:lstStyle/>
+          <a:p>
+            <a:pPr>
+              <a:spcBef>
+                <a:spcPts val="0"/>
+              </a:spcBef>
+              <a:spcAft>
+                <a:spcPts val="0"/>
+              </a:spcAft>
+              <a:buNone/>
+            </a:pPr>
             <a:r>
               <a:rPr sz="1650" b="0">
                 <a:solidFill>
@@ -24664,19 +24270,211 @@
                 <a:ea typeface="Roboto Medium"/>
                 <a:cs typeface="Roboto Medium"/>
               </a:rPr>
-              <a:t> chiều hướng của bằng chứng ban đầu thay vì sửa sai; ~85% khoảng cách hình thành ngay khi chia sẻ testimony.</a:t>
-            </a:r>
-          </a:p>
-          <a:p>
-            <a:pPr marL="129921" indent="-129921">
+              <a:t>Dùng LLM viết thêm “dấu vết” cho thấy agent B đã dùng kết quả của agent A, dù thực tế không có cạnh A → B.</a:t>
+            </a:r>
+          </a:p>
+        </p:txBody>
+      </p:sp>
+      <p:cxnSp>
+        <p:nvCxnSpPr>
+          <p:cNvPr id="32" name="Connector 32"/>
+          <p:cNvCxnSpPr/>
+          <p:nvPr/>
+        </p:nvCxnSpPr>
+        <p:spPr>
+          <a:xfrm>
+            <a:off x="7933944" y="2167128"/>
+            <a:ext cx="201168" cy="0"/>
+          </a:xfrm>
+          <a:prstGeom prst="straightConnector1">
+            <a:avLst/>
+          </a:prstGeom>
+          <a:ln w="22225">
+            <a:solidFill>
+              <a:srgbClr val="003366"/>
+            </a:solidFill>
+            <a:tailEnd type="triangle" w="med" len="med"/>
+          </a:ln>
+        </p:spPr>
+      </p:cxnSp>
+      <p:sp>
+        <p:nvSpPr>
+          <p:cNvPr id="33" name="Card 33"/>
+          <p:cNvSpPr/>
+          <p:nvPr/>
+        </p:nvSpPr>
+        <p:spPr>
+          <a:xfrm>
+            <a:off x="8171688" y="914400"/>
+            <a:ext cx="3605784" cy="2514600"/>
+          </a:xfrm>
+          <a:prstGeom prst="rect">
+            <a:avLst/>
+          </a:prstGeom>
+          <a:solidFill>
+            <a:srgbClr val="F3F6FB"/>
+          </a:solidFill>
+          <a:ln w="9525">
+            <a:solidFill>
+              <a:srgbClr val="CFDAE8"/>
+            </a:solidFill>
+          </a:ln>
+          <a:effectLst/>
+        </p:spPr>
+        <p:txBody>
+          <a:bodyPr wrap="square" rtlCol="0" anchor="ctr" lIns="73152" rIns="73152" tIns="36576" bIns="36576"/>
+          <a:lstStyle/>
+          <a:p/>
+        </p:txBody>
+      </p:sp>
+      <p:sp>
+        <p:nvSpPr>
+          <p:cNvPr id="34" name="Card bar 34"/>
+          <p:cNvSpPr/>
+          <p:nvPr/>
+        </p:nvSpPr>
+        <p:spPr>
+          <a:xfrm>
+            <a:off x="8171688" y="914400"/>
+            <a:ext cx="3605784" cy="54864"/>
+          </a:xfrm>
+          <a:prstGeom prst="rect">
+            <a:avLst/>
+          </a:prstGeom>
+          <a:solidFill>
+            <a:srgbClr val="003366"/>
+          </a:solidFill>
+          <a:ln>
+            <a:noFill/>
+          </a:ln>
+          <a:effectLst/>
+        </p:spPr>
+        <p:txBody>
+          <a:bodyPr wrap="square" rtlCol="0" anchor="ctr" lIns="73152" rIns="73152" tIns="36576" bIns="36576"/>
+          <a:lstStyle/>
+          <a:p/>
+        </p:txBody>
+      </p:sp>
+      <p:sp>
+        <p:nvSpPr>
+          <p:cNvPr id="35" name="Shape 35"/>
+          <p:cNvSpPr/>
+          <p:nvPr/>
+        </p:nvSpPr>
+        <p:spPr>
+          <a:xfrm>
+            <a:off x="8354568" y="1143000"/>
+            <a:ext cx="502920" cy="502920"/>
+          </a:xfrm>
+          <a:prstGeom prst="ellipse">
+            <a:avLst/>
+          </a:prstGeom>
+          <a:solidFill>
+            <a:srgbClr val="003366"/>
+          </a:solidFill>
+          <a:ln>
+            <a:noFill/>
+          </a:ln>
+          <a:effectLst/>
+        </p:spPr>
+        <p:txBody>
+          <a:bodyPr wrap="square" rtlCol="0" anchor="ctr" lIns="0" rIns="0" tIns="0" bIns="0"/>
+          <a:lstStyle/>
+          <a:p>
+            <a:pPr algn="ctr">
               <a:spcBef>
-                <a:spcPts val="400"/>
+                <a:spcPts val="0"/>
               </a:spcBef>
-              <a:buClr>
-                <a:srgbClr val="C00000"/>
-              </a:buClr>
-              <a:buFont typeface="Arial"/>
-              <a:buChar char="•"/>
+              <a:spcAft>
+                <a:spcPts val="0"/>
+              </a:spcAft>
+              <a:buNone/>
+            </a:pPr>
+            <a:r>
+              <a:rPr sz="1850" b="1">
+                <a:solidFill>
+                  <a:srgbClr val="FFFFFF"/>
+                </a:solidFill>
+                <a:latin typeface="Roboto Black"/>
+                <a:ea typeface="Roboto Black"/>
+                <a:cs typeface="Roboto Black"/>
+              </a:rPr>
+              <a:t>3</a:t>
+            </a:r>
+          </a:p>
+        </p:txBody>
+      </p:sp>
+      <p:sp>
+        <p:nvSpPr>
+          <p:cNvPr id="36" name="TextBox 36"/>
+          <p:cNvSpPr txBox="1"/>
+          <p:nvPr/>
+        </p:nvSpPr>
+        <p:spPr>
+          <a:xfrm>
+            <a:off x="8994648" y="1115568"/>
+            <a:ext cx="2645664" cy="594360"/>
+          </a:xfrm>
+          <a:prstGeom prst="rect">
+            <a:avLst/>
+          </a:prstGeom>
+          <a:noFill/>
+        </p:spPr>
+        <p:txBody>
+          <a:bodyPr wrap="square" anchor="ctr" lIns="45720" rIns="45720" tIns="18288" bIns="18288"/>
+          <a:lstStyle/>
+          <a:p>
+            <a:pPr>
+              <a:spcBef>
+                <a:spcPts val="0"/>
+              </a:spcBef>
+              <a:spcAft>
+                <a:spcPts val="0"/>
+              </a:spcAft>
+              <a:buNone/>
+            </a:pPr>
+            <a:r>
+              <a:rPr sz="1850" b="1">
+                <a:solidFill>
+                  <a:srgbClr val="003366"/>
+                </a:solidFill>
+                <a:latin typeface="Roboto Black"/>
+                <a:ea typeface="Roboto Black"/>
+                <a:cs typeface="Roboto Black"/>
+              </a:rPr>
+              <a:t>Xoá dấu vết cạnh thật</a:t>
+            </a:r>
+          </a:p>
+        </p:txBody>
+      </p:sp>
+      <p:sp>
+        <p:nvSpPr>
+          <p:cNvPr id="37" name="TextBox 37"/>
+          <p:cNvSpPr txBox="1"/>
+          <p:nvPr/>
+        </p:nvSpPr>
+        <p:spPr>
+          <a:xfrm>
+            <a:off x="8354568" y="1828800"/>
+            <a:ext cx="3240024" cy="1508760"/>
+          </a:xfrm>
+          <a:prstGeom prst="rect">
+            <a:avLst/>
+          </a:prstGeom>
+          <a:noFill/>
+        </p:spPr>
+        <p:txBody>
+          <a:bodyPr wrap="square" anchor="t" lIns="45720" rIns="45720" tIns="18288" bIns="18288"/>
+          <a:lstStyle/>
+          <a:p>
+            <a:pPr>
+              <a:spcBef>
+                <a:spcPts val="0"/>
+              </a:spcBef>
+              <a:spcAft>
+                <a:spcPts val="0"/>
+              </a:spcAft>
+              <a:buNone/>
             </a:pPr>
             <a:r>
               <a:rPr sz="1650" b="0">
@@ -24687,10 +24485,52 @@
                 <a:ea typeface="Roboto Medium"/>
                 <a:cs typeface="Roboto Medium"/>
               </a:rPr>
-              <a:t>Observer giảm 90% decoy majority nhưng </a:t>
-            </a:r>
-            <a:r>
-              <a:rPr sz="1650" b="1">
+              <a:t>Viết lại (paraphrase) câu trả lời để không còn lộ agent nào đã thực sự gửi tin, nhưng vẫn giữ đúng nội dung.</a:t>
+            </a:r>
+          </a:p>
+        </p:txBody>
+      </p:sp>
+      <p:sp>
+        <p:nvSpPr>
+          <p:cNvPr id="38" name="Shape 38"/>
+          <p:cNvSpPr/>
+          <p:nvPr/>
+        </p:nvSpPr>
+        <p:spPr>
+          <a:xfrm>
+            <a:off x="411480" y="3703320"/>
+            <a:ext cx="5545836" cy="1280160"/>
+          </a:xfrm>
+          <a:prstGeom prst="roundRect">
+            <a:avLst>
+              <a:gd name="adj" fmla="val 8000"/>
+            </a:avLst>
+          </a:prstGeom>
+          <a:solidFill>
+            <a:srgbClr val="FFFFFF"/>
+          </a:solidFill>
+          <a:ln w="12700">
+            <a:solidFill>
+              <a:srgbClr val="003366"/>
+            </a:solidFill>
+          </a:ln>
+          <a:effectLst/>
+        </p:spPr>
+        <p:txBody>
+          <a:bodyPr wrap="square" rtlCol="0" anchor="ctr" lIns="73152" rIns="73152" tIns="36576" bIns="36576"/>
+          <a:lstStyle/>
+          <a:p>
+            <a:pPr algn="ctr">
+              <a:spcBef>
+                <a:spcPts val="0"/>
+              </a:spcBef>
+              <a:spcAft>
+                <a:spcPts val="0"/>
+              </a:spcAft>
+              <a:buNone/>
+            </a:pPr>
+            <a:r>
+              <a:rPr sz="1950" b="1">
                 <a:solidFill>
                   <a:srgbClr val="003366"/>
                 </a:solidFill>
@@ -24698,10 +24538,21 @@
                 <a:ea typeface="Roboto Black"/>
                 <a:cs typeface="Roboto Black"/>
               </a:rPr>
-              <a:t>không</a:t>
-            </a:r>
-            <a:r>
-              <a:rPr sz="1650" b="0">
+              <a:t>Bên trong hệ thống</a:t>
+            </a:r>
+          </a:p>
+          <a:p>
+            <a:pPr algn="ctr">
+              <a:spcBef>
+                <a:spcPts val="300"/>
+              </a:spcBef>
+              <a:spcAft>
+                <a:spcPts val="0"/>
+              </a:spcAft>
+              <a:buNone/>
+            </a:pPr>
+            <a:r>
+              <a:rPr sz="1700" b="0">
                 <a:solidFill>
                   <a:srgbClr val="222222"/>
                 </a:solidFill>
@@ -24709,7 +24560,147 @@
                 <a:ea typeface="Roboto Medium"/>
                 <a:cs typeface="Roboto Medium"/>
               </a:rPr>
-              <a:t> tăng đáp án đúng. Hạn chế: 1 tác vụ hẹp, chưa có defense.</a:t>
+              <a:t>vẫn chạy theo G thật → kết quả gần như không đổi</a:t>
+            </a:r>
+          </a:p>
+        </p:txBody>
+      </p:sp>
+      <p:sp>
+        <p:nvSpPr>
+          <p:cNvPr id="39" name="Shape 39"/>
+          <p:cNvSpPr/>
+          <p:nvPr/>
+        </p:nvSpPr>
+        <p:spPr>
+          <a:xfrm>
+            <a:off x="6231636" y="3703320"/>
+            <a:ext cx="5545836" cy="1280160"/>
+          </a:xfrm>
+          <a:prstGeom prst="roundRect">
+            <a:avLst>
+              <a:gd name="adj" fmla="val 8000"/>
+            </a:avLst>
+          </a:prstGeom>
+          <a:solidFill>
+            <a:srgbClr val="FCF4F4"/>
+          </a:solidFill>
+          <a:ln w="12700">
+            <a:solidFill>
+              <a:srgbClr val="C00000"/>
+            </a:solidFill>
+          </a:ln>
+          <a:effectLst/>
+        </p:spPr>
+        <p:txBody>
+          <a:bodyPr wrap="square" rtlCol="0" anchor="ctr" lIns="73152" rIns="73152" tIns="36576" bIns="36576"/>
+          <a:lstStyle/>
+          <a:p>
+            <a:pPr algn="ctr">
+              <a:spcBef>
+                <a:spcPts val="0"/>
+              </a:spcBef>
+              <a:spcAft>
+                <a:spcPts val="0"/>
+              </a:spcAft>
+              <a:buNone/>
+            </a:pPr>
+            <a:r>
+              <a:rPr sz="1950" b="1">
+                <a:solidFill>
+                  <a:srgbClr val="C00000"/>
+                </a:solidFill>
+                <a:latin typeface="Roboto Black"/>
+                <a:ea typeface="Roboto Black"/>
+                <a:cs typeface="Roboto Black"/>
+              </a:rPr>
+              <a:t>Bên ngoài (kẻ tấn công thấy)</a:t>
+            </a:r>
+          </a:p>
+          <a:p>
+            <a:pPr algn="ctr">
+              <a:spcBef>
+                <a:spcPts val="300"/>
+              </a:spcBef>
+              <a:spcAft>
+                <a:spcPts val="0"/>
+              </a:spcAft>
+              <a:buNone/>
+            </a:pPr>
+            <a:r>
+              <a:rPr sz="1700" b="0">
+                <a:solidFill>
+                  <a:srgbClr val="222222"/>
+                </a:solidFill>
+                <a:latin typeface="Roboto Medium"/>
+                <a:ea typeface="Roboto Medium"/>
+                <a:cs typeface="Roboto Medium"/>
+              </a:rPr>
+              <a:t>dấu vết khớp với G′ → đoán ra đồ thị giả</a:t>
+            </a:r>
+          </a:p>
+        </p:txBody>
+      </p:sp>
+      <p:sp>
+        <p:nvSpPr>
+          <p:cNvPr id="40" name="TextBox 40"/>
+          <p:cNvSpPr txBox="1"/>
+          <p:nvPr/>
+        </p:nvSpPr>
+        <p:spPr>
+          <a:xfrm>
+            <a:off x="411480" y="5166360"/>
+            <a:ext cx="11365992" cy="731520"/>
+          </a:xfrm>
+          <a:prstGeom prst="rect">
+            <a:avLst/>
+          </a:prstGeom>
+          <a:noFill/>
+        </p:spPr>
+        <p:txBody>
+          <a:bodyPr wrap="square" anchor="ctr" lIns="45720" rIns="45720" tIns="18288" bIns="18288"/>
+          <a:lstStyle/>
+          <a:p>
+            <a:pPr algn="ctr">
+              <a:spcBef>
+                <a:spcPts val="0"/>
+              </a:spcBef>
+              <a:spcAft>
+                <a:spcPts val="0"/>
+              </a:spcAft>
+              <a:buNone/>
+            </a:pPr>
+            <a:r>
+              <a:rPr sz="1700" b="0">
+                <a:solidFill>
+                  <a:srgbClr val="666666"/>
+                </a:solidFill>
+                <a:latin typeface="Roboto Medium"/>
+                <a:ea typeface="Roboto Medium"/>
+                <a:cs typeface="Roboto Medium"/>
+              </a:rPr>
+              <a:t xml:space="preserve">Bước 2 và 3 chỉ sửa phần </a:t>
+            </a:r>
+            <a:r>
+              <a:rPr sz="1700" b="0" i="1">
+                <a:solidFill>
+                  <a:srgbClr val="666666"/>
+                </a:solidFill>
+                <a:latin typeface="Roboto Medium"/>
+                <a:ea typeface="Roboto Medium"/>
+                <a:cs typeface="Roboto Medium"/>
+              </a:rPr>
+              <a:t>đưa ra ngoài</a:t>
+            </a:r>
+            <a:r>
+              <a:rPr sz="1700" b="0">
+                <a:solidFill>
+                  <a:srgbClr val="666666"/>
+                </a:solidFill>
+                <a:latin typeface="Roboto Medium"/>
+                <a:ea typeface="Roboto Medium"/>
+                <a:cs typeface="Roboto Medium"/>
+              </a:rPr>
+              <a:t>, không đụng tới cách các agent thật sự giao tiếp.</a:t>
             </a:r>
           </a:p>
         </p:txBody>
@@ -25323,7 +25314,7 @@
                 <a:ea typeface="Roboto Medium"/>
                 <a:cs typeface="Roboto Medium"/>
               </a:rPr>
-              <a:t>13</a:t>
+              <a:t>18</a:t>
             </a:r>
           </a:p>
         </p:txBody>
@@ -26762,7 +26753,7 @@
                 <a:ea typeface="Roboto Medium"/>
                 <a:cs typeface="Roboto Medium"/>
               </a:rPr>
-              <a:t>14</a:t>
+              <a:t>19</a:t>
             </a:r>
           </a:p>
         </p:txBody>
@@ -28481,7 +28472,7 @@
                 <a:ea typeface="Roboto Medium"/>
                 <a:cs typeface="Roboto Medium"/>
               </a:rPr>
-              <a:t>16</a:t>
+              <a:t>21</a:t>
             </a:r>
           </a:p>
         </p:txBody>
@@ -30066,7 +30057,7 @@
                 <a:ea typeface="Roboto Medium"/>
                 <a:cs typeface="Roboto Medium"/>
               </a:rPr>
-              <a:t>17</a:t>
+              <a:t>22</a:t>
             </a:r>
           </a:p>
         </p:txBody>
@@ -31285,7 +31276,7 @@
                 <a:ea typeface="Roboto Medium"/>
                 <a:cs typeface="Roboto Medium"/>
               </a:rPr>
-              <a:t>19</a:t>
+              <a:t>24</a:t>
             </a:r>
           </a:p>
         </p:txBody>
@@ -33914,7 +33905,7 @@
                 <a:ea typeface="Roboto Medium"/>
                 <a:cs typeface="Roboto Medium"/>
               </a:rPr>
-              <a:t>20</a:t>
+              <a:t>25</a:t>
             </a:r>
           </a:p>
         </p:txBody>
@@ -35841,7 +35832,7 @@
                 <a:ea typeface="Roboto Medium"/>
                 <a:cs typeface="Roboto Medium"/>
               </a:rPr>
-              <a:t>22</a:t>
+              <a:t>27</a:t>
             </a:r>
           </a:p>
         </p:txBody>
@@ -38073,7 +38064,7 @@
                 <a:ea typeface="Roboto Medium"/>
                 <a:cs typeface="Roboto Medium"/>
               </a:rPr>
-              <a:t>23</a:t>
+              <a:t>28</a:t>
             </a:r>
           </a:p>
         </p:txBody>
@@ -39088,7 +39079,7 @@
                 <a:ea typeface="Roboto Medium"/>
                 <a:cs typeface="Roboto Medium"/>
               </a:rPr>
-              <a:t>24</a:t>
+              <a:t>29</a:t>
             </a:r>
           </a:p>
         </p:txBody>
@@ -40680,7 +40671,7 @@
                 <a:ea typeface="Roboto Medium"/>
                 <a:cs typeface="Roboto Medium"/>
               </a:rPr>
-              <a:t>25</a:t>
+              <a:t>30</a:t>
             </a:r>
           </a:p>
         </p:txBody>
@@ -42292,6 +42283,3512 @@
 </p:sld>
 </file>
 
+<file path=ppt/slides/slide27.xml><?xml version="1.0" encoding="utf-8"?>
+<p:sld xmlns:a="http://schemas.openxmlformats.org/drawingml/2006/main" xmlns:p="http://schemas.openxmlformats.org/presentationml/2006/main" xmlns:r="http://schemas.openxmlformats.org/officeDocument/2006/relationships">
+  <p:cSld>
+    <p:spTree>
+      <p:nvGrpSpPr>
+        <p:cNvPr id="1" name=""/>
+        <p:cNvGrpSpPr/>
+        <p:nvPr/>
+      </p:nvGrpSpPr>
+      <p:grpSpPr/>
+      <p:sp>
+        <p:nvSpPr>
+          <p:cNvPr id="2" name="Title"/>
+          <p:cNvSpPr txBox="1"/>
+          <p:nvPr/>
+        </p:nvSpPr>
+        <p:spPr>
+          <a:xfrm>
+            <a:off x="320040" y="64008"/>
+            <a:ext cx="9509760" cy="548640"/>
+          </a:xfrm>
+          <a:prstGeom prst="rect">
+            <a:avLst/>
+          </a:prstGeom>
+          <a:noFill/>
+        </p:spPr>
+        <p:txBody>
+          <a:bodyPr wrap="square" anchor="ctr" lIns="45720" rIns="45720" tIns="18288" bIns="18288"/>
+          <a:lstStyle/>
+          <a:p>
+            <a:pPr>
+              <a:spcBef>
+                <a:spcPts val="0"/>
+              </a:spcBef>
+              <a:buNone/>
+            </a:pPr>
+            <a:r>
+              <a:rPr sz="2200" b="1">
+                <a:solidFill>
+                  <a:srgbClr val="FFFFFF"/>
+                </a:solidFill>
+                <a:latin typeface="Roboto Black"/>
+                <a:ea typeface="Roboto Black"/>
+                <a:cs typeface="Roboto Black"/>
+              </a:rPr>
+              <a:t>MIRAGE: kết quả và nhận xét</a:t>
+            </a:r>
+          </a:p>
+        </p:txBody>
+      </p:sp>
+      <p:sp>
+        <p:nvSpPr>
+          <p:cNvPr id="3" name="Section"/>
+          <p:cNvSpPr txBox="1"/>
+          <p:nvPr/>
+        </p:nvSpPr>
+        <p:spPr>
+          <a:xfrm>
+            <a:off x="9784080" y="64008"/>
+            <a:ext cx="2103120" cy="548640"/>
+          </a:xfrm>
+          <a:prstGeom prst="rect">
+            <a:avLst/>
+          </a:prstGeom>
+          <a:noFill/>
+        </p:spPr>
+        <p:txBody>
+          <a:bodyPr wrap="square" anchor="ctr" lIns="45720" rIns="45720" tIns="18288" bIns="18288"/>
+          <a:lstStyle/>
+          <a:p>
+            <a:pPr algn="r">
+              <a:spcBef>
+                <a:spcPts val="0"/>
+              </a:spcBef>
+              <a:buNone/>
+            </a:pPr>
+            <a:r>
+              <a:rPr sz="1100" b="0">
+                <a:solidFill>
+                  <a:srgbClr val="B8C6D4"/>
+                </a:solidFill>
+                <a:latin typeface="Roboto Medium"/>
+                <a:ea typeface="Roboto Medium"/>
+                <a:cs typeface="Roboto Medium"/>
+              </a:rPr>
+              <a:t>2. Safety</a:t>
+            </a:r>
+          </a:p>
+        </p:txBody>
+      </p:sp>
+      <p:sp>
+        <p:nvSpPr>
+          <p:cNvPr id="4" name="Slide number"/>
+          <p:cNvSpPr txBox="1"/>
+          <p:nvPr/>
+        </p:nvSpPr>
+        <p:spPr>
+          <a:xfrm>
+            <a:off x="11155680" y="6199632"/>
+            <a:ext cx="731520" cy="256032"/>
+          </a:xfrm>
+          <a:prstGeom prst="rect">
+            <a:avLst/>
+          </a:prstGeom>
+          <a:noFill/>
+        </p:spPr>
+        <p:txBody>
+          <a:bodyPr wrap="square" anchor="t" lIns="45720" rIns="45720" tIns="18288" bIns="18288"/>
+          <a:lstStyle/>
+          <a:p>
+            <a:pPr algn="r">
+              <a:spcBef>
+                <a:spcPts val="0"/>
+              </a:spcBef>
+              <a:buNone/>
+            </a:pPr>
+            <a:r>
+              <a:rPr sz="1000" b="0">
+                <a:solidFill>
+                  <a:srgbClr val="666666"/>
+                </a:solidFill>
+                <a:latin typeface="Roboto Medium"/>
+                <a:ea typeface="Roboto Medium"/>
+                <a:cs typeface="Roboto Medium"/>
+              </a:rPr>
+              <a:t>12</a:t>
+            </a:r>
+          </a:p>
+        </p:txBody>
+      </p:sp>
+      <p:sp>
+        <p:nvSpPr>
+          <p:cNvPr id="5" name="HUST footer name mask"/>
+          <p:cNvSpPr/>
+          <p:nvPr/>
+        </p:nvSpPr>
+        <p:spPr>
+          <a:xfrm>
+            <a:off x="649224" y="6126480"/>
+            <a:ext cx="3273552" cy="521207"/>
+          </a:xfrm>
+          <a:prstGeom prst="rect">
+            <a:avLst/>
+          </a:prstGeom>
+          <a:solidFill>
+            <a:srgbClr val="FFFFFF"/>
+          </a:solidFill>
+          <a:ln>
+            <a:noFill/>
+          </a:ln>
+          <a:effectLst/>
+        </p:spPr>
+        <p:style>
+          <a:lnRef idx="1">
+            <a:schemeClr val="accent1"/>
+          </a:lnRef>
+          <a:fillRef idx="3">
+            <a:schemeClr val="accent1"/>
+          </a:fillRef>
+          <a:effectRef idx="2">
+            <a:schemeClr val="accent1"/>
+          </a:effectRef>
+          <a:fontRef idx="minor">
+            <a:schemeClr val="lt1"/>
+          </a:fontRef>
+        </p:style>
+        <p:txBody>
+          <a:bodyPr rtlCol="0" anchor="ctr"/>
+          <a:lstStyle/>
+          <a:p/>
+        </p:txBody>
+      </p:sp>
+      <p:sp>
+        <p:nvSpPr>
+          <p:cNvPr id="6" name="HUST footer Vietnamese name"/>
+          <p:cNvSpPr txBox="1"/>
+          <p:nvPr/>
+        </p:nvSpPr>
+        <p:spPr>
+          <a:xfrm>
+            <a:off x="667512" y="6135624"/>
+            <a:ext cx="3236976" cy="256032"/>
+          </a:xfrm>
+          <a:prstGeom prst="rect">
+            <a:avLst/>
+          </a:prstGeom>
+          <a:noFill/>
+        </p:spPr>
+        <p:txBody>
+          <a:bodyPr wrap="square" anchor="t" lIns="0" rIns="0" tIns="0" bIns="0"/>
+          <a:lstStyle/>
+          <a:p>
+            <a:pPr>
+              <a:spcBef>
+                <a:spcPts val="0"/>
+              </a:spcBef>
+              <a:buNone/>
+            </a:pPr>
+            <a:r>
+              <a:rPr sz="1688" b="1">
+                <a:solidFill>
+                  <a:srgbClr val="3F3F3F"/>
+                </a:solidFill>
+                <a:latin typeface="Roboto Black"/>
+                <a:ea typeface="Roboto Black"/>
+                <a:cs typeface="Roboto Black"/>
+              </a:rPr>
+              <a:t>ĐẠI HỌC BÁCH KHOA HÀ NỘI</a:t>
+            </a:r>
+          </a:p>
+        </p:txBody>
+      </p:sp>
+      <p:sp>
+        <p:nvSpPr>
+          <p:cNvPr id="7" name="HUST footer English name"/>
+          <p:cNvSpPr txBox="1"/>
+          <p:nvPr/>
+        </p:nvSpPr>
+        <p:spPr>
+          <a:xfrm>
+            <a:off x="667512" y="6391656"/>
+            <a:ext cx="3236976" cy="219456"/>
+          </a:xfrm>
+          <a:prstGeom prst="rect">
+            <a:avLst/>
+          </a:prstGeom>
+          <a:noFill/>
+        </p:spPr>
+        <p:txBody>
+          <a:bodyPr wrap="square" anchor="t" lIns="0" rIns="0" tIns="0" bIns="0"/>
+          <a:lstStyle/>
+          <a:p>
+            <a:pPr>
+              <a:spcBef>
+                <a:spcPts val="0"/>
+              </a:spcBef>
+              <a:buNone/>
+            </a:pPr>
+            <a:r>
+              <a:rPr sz="1000" b="0">
+                <a:solidFill>
+                  <a:srgbClr val="3F3F3F"/>
+                </a:solidFill>
+                <a:latin typeface="Roboto Medium"/>
+                <a:ea typeface="Roboto Medium"/>
+                <a:cs typeface="Roboto Medium"/>
+              </a:rPr>
+              <a:t>HANOI UNIVERSITY OF SCIENCE AND TECHNOLOGY</a:t>
+            </a:r>
+          </a:p>
+        </p:txBody>
+      </p:sp>
+      <p:sp>
+        <p:nvSpPr>
+          <p:cNvPr id="21" name="TextBox 21"/>
+          <p:cNvSpPr txBox="1"/>
+          <p:nvPr/>
+        </p:nvSpPr>
+        <p:spPr>
+          <a:xfrm>
+            <a:off x="411480" y="868680"/>
+            <a:ext cx="6309360" cy="731520"/>
+          </a:xfrm>
+          <a:prstGeom prst="rect">
+            <a:avLst/>
+          </a:prstGeom>
+          <a:noFill/>
+        </p:spPr>
+        <p:txBody>
+          <a:bodyPr wrap="square" anchor="t" lIns="45720" rIns="45720" tIns="18288" bIns="18288"/>
+          <a:lstStyle/>
+          <a:p>
+            <a:pPr>
+              <a:spcBef>
+                <a:spcPts val="0"/>
+              </a:spcBef>
+              <a:spcAft>
+                <a:spcPts val="0"/>
+              </a:spcAft>
+              <a:buNone/>
+            </a:pPr>
+            <a:r>
+              <a:rPr sz="1700" b="0">
+                <a:solidFill>
+                  <a:srgbClr val="222222"/>
+                </a:solidFill>
+                <a:latin typeface="Roboto Medium"/>
+                <a:ea typeface="Roboto Medium"/>
+                <a:cs typeface="Roboto Medium"/>
+              </a:rPr>
+              <a:t xml:space="preserve">Thử trên 4 bộ dữ liệu, 3 cách xây MAS khác nhau. Đo </a:t>
+            </a:r>
+            <a:r>
+              <a:rPr sz="1700" b="1">
+                <a:solidFill>
+                  <a:srgbClr val="003366"/>
+                </a:solidFill>
+                <a:latin typeface="Roboto Black"/>
+                <a:ea typeface="Roboto Black"/>
+                <a:cs typeface="Roboto Black"/>
+              </a:rPr>
+              <a:t>AUC</a:t>
+            </a:r>
+            <a:r>
+              <a:rPr sz="1700" b="0">
+                <a:solidFill>
+                  <a:srgbClr val="222222"/>
+                </a:solidFill>
+                <a:latin typeface="Roboto Medium"/>
+                <a:ea typeface="Roboto Medium"/>
+                <a:cs typeface="Roboto Medium"/>
+              </a:rPr>
+              <a:t xml:space="preserve"> của tấn công: 0.5 = đoán ngẫu nhiên, càng thấp càng tốt.</a:t>
+            </a:r>
+          </a:p>
+        </p:txBody>
+      </p:sp>
+      <p:graphicFrame>
+        <p:nvGraphicFramePr>
+          <p:cNvPr id="22" name="Table 22"/>
+          <p:cNvGraphicFramePr>
+            <a:graphicFrameLocks noGrp="1"/>
+          </p:cNvGraphicFramePr>
+          <p:nvPr/>
+        </p:nvGraphicFramePr>
+        <p:xfrm>
+          <a:off x="411480" y="1737360"/>
+          <a:ext cx="6309360" cy="2286000"/>
+        </p:xfrm>
+        <a:graphic>
+          <a:graphicData uri="http://schemas.openxmlformats.org/drawingml/2006/table">
+            <a:tbl>
+              <a:tblPr firstRow="0" bandRow="0"/>
+              <a:tblGrid>
+                <a:gridCol w="1920240"/>
+                <a:gridCol w="2194560"/>
+                <a:gridCol w="2194560"/>
+              </a:tblGrid>
+              <a:tr h="457200">
+                <a:tc>
+                  <a:txBody>
+                    <a:bodyPr wrap="square"/>
+                    <a:lstStyle/>
+                    <a:p>
+                      <a:pPr>
+                        <a:spcBef>
+                          <a:spcPts val="0"/>
+                        </a:spcBef>
+                        <a:spcAft>
+                          <a:spcPts val="0"/>
+                        </a:spcAft>
+                        <a:buNone/>
+                      </a:pPr>
+                      <a:r>
+                        <a:rPr sz="1700" b="1">
+                          <a:solidFill>
+                            <a:srgbClr val="FFFFFF"/>
+                          </a:solidFill>
+                          <a:latin typeface="Roboto Black"/>
+                          <a:ea typeface="Roboto Black"/>
+                          <a:cs typeface="Roboto Black"/>
+                        </a:rPr>
+                        <a:t>Dataset</a:t>
+                      </a:r>
+                    </a:p>
+                  </a:txBody>
+                  <a:tcPr marL="64008" marR="64008" marT="27432" marB="27432" anchor="ctr">
+                    <a:lnL w="9525">
+                      <a:solidFill>
+                        <a:srgbClr val="CFDAE8"/>
+                      </a:solidFill>
+                    </a:lnL>
+                    <a:lnR w="9525">
+                      <a:solidFill>
+                        <a:srgbClr val="CFDAE8"/>
+                      </a:solidFill>
+                    </a:lnR>
+                    <a:lnT w="9525">
+                      <a:solidFill>
+                        <a:srgbClr val="CFDAE8"/>
+                      </a:solidFill>
+                    </a:lnT>
+                    <a:lnB w="9525">
+                      <a:solidFill>
+                        <a:srgbClr val="CFDAE8"/>
+                      </a:solidFill>
+                    </a:lnB>
+                    <a:solidFill>
+                      <a:srgbClr val="003366"/>
+                    </a:solidFill>
+                  </a:tcPr>
+                </a:tc>
+                <a:tc>
+                  <a:txBody>
+                    <a:bodyPr wrap="square"/>
+                    <a:lstStyle/>
+                    <a:p>
+                      <a:pPr algn="ctr">
+                        <a:spcBef>
+                          <a:spcPts val="0"/>
+                        </a:spcBef>
+                        <a:spcAft>
+                          <a:spcPts val="0"/>
+                        </a:spcAft>
+                        <a:buNone/>
+                      </a:pPr>
+                      <a:r>
+                        <a:rPr sz="1700" b="1">
+                          <a:solidFill>
+                            <a:srgbClr val="FFFFFF"/>
+                          </a:solidFill>
+                          <a:latin typeface="Roboto Black"/>
+                          <a:ea typeface="Roboto Black"/>
+                          <a:cs typeface="Roboto Black"/>
+                        </a:rPr>
+                        <a:t>Phòng thủ thường</a:t>
+                      </a:r>
+                    </a:p>
+                  </a:txBody>
+                  <a:tcPr marL="64008" marR="64008" marT="27432" marB="27432" anchor="ctr">
+                    <a:lnL w="9525">
+                      <a:solidFill>
+                        <a:srgbClr val="CFDAE8"/>
+                      </a:solidFill>
+                    </a:lnL>
+                    <a:lnR w="9525">
+                      <a:solidFill>
+                        <a:srgbClr val="CFDAE8"/>
+                      </a:solidFill>
+                    </a:lnR>
+                    <a:lnT w="9525">
+                      <a:solidFill>
+                        <a:srgbClr val="CFDAE8"/>
+                      </a:solidFill>
+                    </a:lnT>
+                    <a:lnB w="9525">
+                      <a:solidFill>
+                        <a:srgbClr val="CFDAE8"/>
+                      </a:solidFill>
+                    </a:lnB>
+                    <a:solidFill>
+                      <a:srgbClr val="003366"/>
+                    </a:solidFill>
+                  </a:tcPr>
+                </a:tc>
+                <a:tc>
+                  <a:txBody>
+                    <a:bodyPr wrap="square"/>
+                    <a:lstStyle/>
+                    <a:p>
+                      <a:pPr algn="ctr">
+                        <a:spcBef>
+                          <a:spcPts val="0"/>
+                        </a:spcBef>
+                        <a:spcAft>
+                          <a:spcPts val="0"/>
+                        </a:spcAft>
+                        <a:buNone/>
+                      </a:pPr>
+                      <a:r>
+                        <a:rPr sz="1700" b="1">
+                          <a:solidFill>
+                            <a:srgbClr val="FFFFFF"/>
+                          </a:solidFill>
+                          <a:latin typeface="Roboto Black"/>
+                          <a:ea typeface="Roboto Black"/>
+                          <a:cs typeface="Roboto Black"/>
+                        </a:rPr>
+                        <a:t>MIRAGE</a:t>
+                      </a:r>
+                    </a:p>
+                  </a:txBody>
+                  <a:tcPr marL="64008" marR="64008" marT="27432" marB="27432" anchor="ctr">
+                    <a:lnL w="9525">
+                      <a:solidFill>
+                        <a:srgbClr val="CFDAE8"/>
+                      </a:solidFill>
+                    </a:lnL>
+                    <a:lnR w="9525">
+                      <a:solidFill>
+                        <a:srgbClr val="CFDAE8"/>
+                      </a:solidFill>
+                    </a:lnR>
+                    <a:lnT w="9525">
+                      <a:solidFill>
+                        <a:srgbClr val="CFDAE8"/>
+                      </a:solidFill>
+                    </a:lnT>
+                    <a:lnB w="9525">
+                      <a:solidFill>
+                        <a:srgbClr val="CFDAE8"/>
+                      </a:solidFill>
+                    </a:lnB>
+                    <a:solidFill>
+                      <a:srgbClr val="003366"/>
+                    </a:solidFill>
+                  </a:tcPr>
+                </a:tc>
+              </a:tr>
+              <a:tr h="457200">
+                <a:tc>
+                  <a:txBody>
+                    <a:bodyPr wrap="square"/>
+                    <a:lstStyle/>
+                    <a:p>
+                      <a:pPr>
+                        <a:spcBef>
+                          <a:spcPts val="0"/>
+                        </a:spcBef>
+                        <a:spcAft>
+                          <a:spcPts val="0"/>
+                        </a:spcAft>
+                        <a:buNone/>
+                      </a:pPr>
+                      <a:r>
+                        <a:rPr sz="1700" b="1">
+                          <a:solidFill>
+                            <a:srgbClr val="003366"/>
+                          </a:solidFill>
+                          <a:latin typeface="Roboto Black"/>
+                          <a:ea typeface="Roboto Black"/>
+                          <a:cs typeface="Roboto Black"/>
+                        </a:rPr>
+                        <a:t>MMLU</a:t>
+                      </a:r>
+                    </a:p>
+                  </a:txBody>
+                  <a:tcPr marL="64008" marR="64008" marT="27432" marB="27432" anchor="ctr">
+                    <a:lnL w="9525">
+                      <a:solidFill>
+                        <a:srgbClr val="CFDAE8"/>
+                      </a:solidFill>
+                    </a:lnL>
+                    <a:lnR w="9525">
+                      <a:solidFill>
+                        <a:srgbClr val="CFDAE8"/>
+                      </a:solidFill>
+                    </a:lnR>
+                    <a:lnT w="9525">
+                      <a:solidFill>
+                        <a:srgbClr val="CFDAE8"/>
+                      </a:solidFill>
+                    </a:lnT>
+                    <a:lnB w="9525">
+                      <a:solidFill>
+                        <a:srgbClr val="CFDAE8"/>
+                      </a:solidFill>
+                    </a:lnB>
+                    <a:solidFill>
+                      <a:srgbClr val="FFFFFF"/>
+                    </a:solidFill>
+                  </a:tcPr>
+                </a:tc>
+                <a:tc>
+                  <a:txBody>
+                    <a:bodyPr wrap="square"/>
+                    <a:lstStyle/>
+                    <a:p>
+                      <a:pPr algn="ctr">
+                        <a:spcBef>
+                          <a:spcPts val="0"/>
+                        </a:spcBef>
+                        <a:spcAft>
+                          <a:spcPts val="0"/>
+                        </a:spcAft>
+                        <a:buNone/>
+                      </a:pPr>
+                      <a:r>
+                        <a:rPr sz="1700" b="0">
+                          <a:solidFill>
+                            <a:srgbClr val="222222"/>
+                          </a:solidFill>
+                          <a:latin typeface="Roboto Medium"/>
+                          <a:ea typeface="Roboto Medium"/>
+                          <a:cs typeface="Roboto Medium"/>
+                        </a:rPr>
+                        <a:t>0.76</a:t>
+                      </a:r>
+                    </a:p>
+                  </a:txBody>
+                  <a:tcPr marL="64008" marR="64008" marT="27432" marB="27432" anchor="ctr">
+                    <a:lnL w="9525">
+                      <a:solidFill>
+                        <a:srgbClr val="CFDAE8"/>
+                      </a:solidFill>
+                    </a:lnL>
+                    <a:lnR w="9525">
+                      <a:solidFill>
+                        <a:srgbClr val="CFDAE8"/>
+                      </a:solidFill>
+                    </a:lnR>
+                    <a:lnT w="9525">
+                      <a:solidFill>
+                        <a:srgbClr val="CFDAE8"/>
+                      </a:solidFill>
+                    </a:lnT>
+                    <a:lnB w="9525">
+                      <a:solidFill>
+                        <a:srgbClr val="CFDAE8"/>
+                      </a:solidFill>
+                    </a:lnB>
+                    <a:solidFill>
+                      <a:srgbClr val="FFFFFF"/>
+                    </a:solidFill>
+                  </a:tcPr>
+                </a:tc>
+                <a:tc>
+                  <a:txBody>
+                    <a:bodyPr wrap="square"/>
+                    <a:lstStyle/>
+                    <a:p>
+                      <a:pPr algn="ctr">
+                        <a:spcBef>
+                          <a:spcPts val="0"/>
+                        </a:spcBef>
+                        <a:spcAft>
+                          <a:spcPts val="0"/>
+                        </a:spcAft>
+                        <a:buNone/>
+                      </a:pPr>
+                      <a:r>
+                        <a:rPr sz="1700" b="1">
+                          <a:solidFill>
+                            <a:srgbClr val="003366"/>
+                          </a:solidFill>
+                          <a:latin typeface="Roboto Black"/>
+                          <a:ea typeface="Roboto Black"/>
+                          <a:cs typeface="Roboto Black"/>
+                        </a:rPr>
+                        <a:t>0.67</a:t>
+                      </a:r>
+                    </a:p>
+                  </a:txBody>
+                  <a:tcPr marL="64008" marR="64008" marT="27432" marB="27432" anchor="ctr">
+                    <a:lnL w="9525">
+                      <a:solidFill>
+                        <a:srgbClr val="CFDAE8"/>
+                      </a:solidFill>
+                    </a:lnL>
+                    <a:lnR w="9525">
+                      <a:solidFill>
+                        <a:srgbClr val="CFDAE8"/>
+                      </a:solidFill>
+                    </a:lnR>
+                    <a:lnT w="9525">
+                      <a:solidFill>
+                        <a:srgbClr val="CFDAE8"/>
+                      </a:solidFill>
+                    </a:lnT>
+                    <a:lnB w="9525">
+                      <a:solidFill>
+                        <a:srgbClr val="CFDAE8"/>
+                      </a:solidFill>
+                    </a:lnB>
+                    <a:solidFill>
+                      <a:srgbClr val="EEF3FA"/>
+                    </a:solidFill>
+                  </a:tcPr>
+                </a:tc>
+              </a:tr>
+              <a:tr h="457200">
+                <a:tc>
+                  <a:txBody>
+                    <a:bodyPr wrap="square"/>
+                    <a:lstStyle/>
+                    <a:p>
+                      <a:pPr>
+                        <a:spcBef>
+                          <a:spcPts val="0"/>
+                        </a:spcBef>
+                        <a:spcAft>
+                          <a:spcPts val="0"/>
+                        </a:spcAft>
+                        <a:buNone/>
+                      </a:pPr>
+                      <a:r>
+                        <a:rPr sz="1700" b="1">
+                          <a:solidFill>
+                            <a:srgbClr val="003366"/>
+                          </a:solidFill>
+                          <a:latin typeface="Roboto Black"/>
+                          <a:ea typeface="Roboto Black"/>
+                          <a:cs typeface="Roboto Black"/>
+                        </a:rPr>
+                        <a:t>GSM8K</a:t>
+                      </a:r>
+                    </a:p>
+                  </a:txBody>
+                  <a:tcPr marL="64008" marR="64008" marT="27432" marB="27432" anchor="ctr">
+                    <a:lnL w="9525">
+                      <a:solidFill>
+                        <a:srgbClr val="CFDAE8"/>
+                      </a:solidFill>
+                    </a:lnL>
+                    <a:lnR w="9525">
+                      <a:solidFill>
+                        <a:srgbClr val="CFDAE8"/>
+                      </a:solidFill>
+                    </a:lnR>
+                    <a:lnT w="9525">
+                      <a:solidFill>
+                        <a:srgbClr val="CFDAE8"/>
+                      </a:solidFill>
+                    </a:lnT>
+                    <a:lnB w="9525">
+                      <a:solidFill>
+                        <a:srgbClr val="CFDAE8"/>
+                      </a:solidFill>
+                    </a:lnB>
+                    <a:solidFill>
+                      <a:srgbClr val="FFFFFF"/>
+                    </a:solidFill>
+                  </a:tcPr>
+                </a:tc>
+                <a:tc>
+                  <a:txBody>
+                    <a:bodyPr wrap="square"/>
+                    <a:lstStyle/>
+                    <a:p>
+                      <a:pPr algn="ctr">
+                        <a:spcBef>
+                          <a:spcPts val="0"/>
+                        </a:spcBef>
+                        <a:spcAft>
+                          <a:spcPts val="0"/>
+                        </a:spcAft>
+                        <a:buNone/>
+                      </a:pPr>
+                      <a:r>
+                        <a:rPr sz="1700" b="0">
+                          <a:solidFill>
+                            <a:srgbClr val="222222"/>
+                          </a:solidFill>
+                          <a:latin typeface="Roboto Medium"/>
+                          <a:ea typeface="Roboto Medium"/>
+                          <a:cs typeface="Roboto Medium"/>
+                        </a:rPr>
+                        <a:t>0.80</a:t>
+                      </a:r>
+                    </a:p>
+                  </a:txBody>
+                  <a:tcPr marL="64008" marR="64008" marT="27432" marB="27432" anchor="ctr">
+                    <a:lnL w="9525">
+                      <a:solidFill>
+                        <a:srgbClr val="CFDAE8"/>
+                      </a:solidFill>
+                    </a:lnL>
+                    <a:lnR w="9525">
+                      <a:solidFill>
+                        <a:srgbClr val="CFDAE8"/>
+                      </a:solidFill>
+                    </a:lnR>
+                    <a:lnT w="9525">
+                      <a:solidFill>
+                        <a:srgbClr val="CFDAE8"/>
+                      </a:solidFill>
+                    </a:lnT>
+                    <a:lnB w="9525">
+                      <a:solidFill>
+                        <a:srgbClr val="CFDAE8"/>
+                      </a:solidFill>
+                    </a:lnB>
+                    <a:solidFill>
+                      <a:srgbClr val="FFFFFF"/>
+                    </a:solidFill>
+                  </a:tcPr>
+                </a:tc>
+                <a:tc>
+                  <a:txBody>
+                    <a:bodyPr wrap="square"/>
+                    <a:lstStyle/>
+                    <a:p>
+                      <a:pPr algn="ctr">
+                        <a:spcBef>
+                          <a:spcPts val="0"/>
+                        </a:spcBef>
+                        <a:spcAft>
+                          <a:spcPts val="0"/>
+                        </a:spcAft>
+                        <a:buNone/>
+                      </a:pPr>
+                      <a:r>
+                        <a:rPr sz="1700" b="1">
+                          <a:solidFill>
+                            <a:srgbClr val="003366"/>
+                          </a:solidFill>
+                          <a:latin typeface="Roboto Black"/>
+                          <a:ea typeface="Roboto Black"/>
+                          <a:cs typeface="Roboto Black"/>
+                        </a:rPr>
+                        <a:t>0.64</a:t>
+                      </a:r>
+                    </a:p>
+                  </a:txBody>
+                  <a:tcPr marL="64008" marR="64008" marT="27432" marB="27432" anchor="ctr">
+                    <a:lnL w="9525">
+                      <a:solidFill>
+                        <a:srgbClr val="CFDAE8"/>
+                      </a:solidFill>
+                    </a:lnL>
+                    <a:lnR w="9525">
+                      <a:solidFill>
+                        <a:srgbClr val="CFDAE8"/>
+                      </a:solidFill>
+                    </a:lnR>
+                    <a:lnT w="9525">
+                      <a:solidFill>
+                        <a:srgbClr val="CFDAE8"/>
+                      </a:solidFill>
+                    </a:lnT>
+                    <a:lnB w="9525">
+                      <a:solidFill>
+                        <a:srgbClr val="CFDAE8"/>
+                      </a:solidFill>
+                    </a:lnB>
+                    <a:solidFill>
+                      <a:srgbClr val="EEF3FA"/>
+                    </a:solidFill>
+                  </a:tcPr>
+                </a:tc>
+              </a:tr>
+              <a:tr h="457200">
+                <a:tc>
+                  <a:txBody>
+                    <a:bodyPr wrap="square"/>
+                    <a:lstStyle/>
+                    <a:p>
+                      <a:pPr>
+                        <a:spcBef>
+                          <a:spcPts val="0"/>
+                        </a:spcBef>
+                        <a:spcAft>
+                          <a:spcPts val="0"/>
+                        </a:spcAft>
+                        <a:buNone/>
+                      </a:pPr>
+                      <a:r>
+                        <a:rPr sz="1700" b="1">
+                          <a:solidFill>
+                            <a:srgbClr val="003366"/>
+                          </a:solidFill>
+                          <a:latin typeface="Roboto Black"/>
+                          <a:ea typeface="Roboto Black"/>
+                          <a:cs typeface="Roboto Black"/>
+                        </a:rPr>
+                        <a:t>SVAMP</a:t>
+                      </a:r>
+                    </a:p>
+                  </a:txBody>
+                  <a:tcPr marL="64008" marR="64008" marT="27432" marB="27432" anchor="ctr">
+                    <a:lnL w="9525">
+                      <a:solidFill>
+                        <a:srgbClr val="CFDAE8"/>
+                      </a:solidFill>
+                    </a:lnL>
+                    <a:lnR w="9525">
+                      <a:solidFill>
+                        <a:srgbClr val="CFDAE8"/>
+                      </a:solidFill>
+                    </a:lnR>
+                    <a:lnT w="9525">
+                      <a:solidFill>
+                        <a:srgbClr val="CFDAE8"/>
+                      </a:solidFill>
+                    </a:lnT>
+                    <a:lnB w="9525">
+                      <a:solidFill>
+                        <a:srgbClr val="CFDAE8"/>
+                      </a:solidFill>
+                    </a:lnB>
+                    <a:solidFill>
+                      <a:srgbClr val="FFFFFF"/>
+                    </a:solidFill>
+                  </a:tcPr>
+                </a:tc>
+                <a:tc>
+                  <a:txBody>
+                    <a:bodyPr wrap="square"/>
+                    <a:lstStyle/>
+                    <a:p>
+                      <a:pPr algn="ctr">
+                        <a:spcBef>
+                          <a:spcPts val="0"/>
+                        </a:spcBef>
+                        <a:spcAft>
+                          <a:spcPts val="0"/>
+                        </a:spcAft>
+                        <a:buNone/>
+                      </a:pPr>
+                      <a:r>
+                        <a:rPr sz="1700" b="0">
+                          <a:solidFill>
+                            <a:srgbClr val="222222"/>
+                          </a:solidFill>
+                          <a:latin typeface="Roboto Medium"/>
+                          <a:ea typeface="Roboto Medium"/>
+                          <a:cs typeface="Roboto Medium"/>
+                        </a:rPr>
+                        <a:t>0.70</a:t>
+                      </a:r>
+                    </a:p>
+                  </a:txBody>
+                  <a:tcPr marL="64008" marR="64008" marT="27432" marB="27432" anchor="ctr">
+                    <a:lnL w="9525">
+                      <a:solidFill>
+                        <a:srgbClr val="CFDAE8"/>
+                      </a:solidFill>
+                    </a:lnL>
+                    <a:lnR w="9525">
+                      <a:solidFill>
+                        <a:srgbClr val="CFDAE8"/>
+                      </a:solidFill>
+                    </a:lnR>
+                    <a:lnT w="9525">
+                      <a:solidFill>
+                        <a:srgbClr val="CFDAE8"/>
+                      </a:solidFill>
+                    </a:lnT>
+                    <a:lnB w="9525">
+                      <a:solidFill>
+                        <a:srgbClr val="CFDAE8"/>
+                      </a:solidFill>
+                    </a:lnB>
+                    <a:solidFill>
+                      <a:srgbClr val="FFFFFF"/>
+                    </a:solidFill>
+                  </a:tcPr>
+                </a:tc>
+                <a:tc>
+                  <a:txBody>
+                    <a:bodyPr wrap="square"/>
+                    <a:lstStyle/>
+                    <a:p>
+                      <a:pPr algn="ctr">
+                        <a:spcBef>
+                          <a:spcPts val="0"/>
+                        </a:spcBef>
+                        <a:spcAft>
+                          <a:spcPts val="0"/>
+                        </a:spcAft>
+                        <a:buNone/>
+                      </a:pPr>
+                      <a:r>
+                        <a:rPr sz="1700" b="1">
+                          <a:solidFill>
+                            <a:srgbClr val="003366"/>
+                          </a:solidFill>
+                          <a:latin typeface="Roboto Black"/>
+                          <a:ea typeface="Roboto Black"/>
+                          <a:cs typeface="Roboto Black"/>
+                        </a:rPr>
+                        <a:t>0.64</a:t>
+                      </a:r>
+                    </a:p>
+                  </a:txBody>
+                  <a:tcPr marL="64008" marR="64008" marT="27432" marB="27432" anchor="ctr">
+                    <a:lnL w="9525">
+                      <a:solidFill>
+                        <a:srgbClr val="CFDAE8"/>
+                      </a:solidFill>
+                    </a:lnL>
+                    <a:lnR w="9525">
+                      <a:solidFill>
+                        <a:srgbClr val="CFDAE8"/>
+                      </a:solidFill>
+                    </a:lnR>
+                    <a:lnT w="9525">
+                      <a:solidFill>
+                        <a:srgbClr val="CFDAE8"/>
+                      </a:solidFill>
+                    </a:lnT>
+                    <a:lnB w="9525">
+                      <a:solidFill>
+                        <a:srgbClr val="CFDAE8"/>
+                      </a:solidFill>
+                    </a:lnB>
+                    <a:solidFill>
+                      <a:srgbClr val="EEF3FA"/>
+                    </a:solidFill>
+                  </a:tcPr>
+                </a:tc>
+              </a:tr>
+              <a:tr h="457200">
+                <a:tc>
+                  <a:txBody>
+                    <a:bodyPr wrap="square"/>
+                    <a:lstStyle/>
+                    <a:p>
+                      <a:pPr>
+                        <a:spcBef>
+                          <a:spcPts val="0"/>
+                        </a:spcBef>
+                        <a:spcAft>
+                          <a:spcPts val="0"/>
+                        </a:spcAft>
+                        <a:buNone/>
+                      </a:pPr>
+                      <a:r>
+                        <a:rPr sz="1700" b="1">
+                          <a:solidFill>
+                            <a:srgbClr val="003366"/>
+                          </a:solidFill>
+                          <a:latin typeface="Roboto Black"/>
+                          <a:ea typeface="Roboto Black"/>
+                          <a:cs typeface="Roboto Black"/>
+                        </a:rPr>
+                        <a:t>HumanEval</a:t>
+                      </a:r>
+                    </a:p>
+                  </a:txBody>
+                  <a:tcPr marL="64008" marR="64008" marT="27432" marB="27432" anchor="ctr">
+                    <a:lnL w="9525">
+                      <a:solidFill>
+                        <a:srgbClr val="CFDAE8"/>
+                      </a:solidFill>
+                    </a:lnL>
+                    <a:lnR w="9525">
+                      <a:solidFill>
+                        <a:srgbClr val="CFDAE8"/>
+                      </a:solidFill>
+                    </a:lnR>
+                    <a:lnT w="9525">
+                      <a:solidFill>
+                        <a:srgbClr val="CFDAE8"/>
+                      </a:solidFill>
+                    </a:lnT>
+                    <a:lnB w="9525">
+                      <a:solidFill>
+                        <a:srgbClr val="CFDAE8"/>
+                      </a:solidFill>
+                    </a:lnB>
+                    <a:solidFill>
+                      <a:srgbClr val="FFFFFF"/>
+                    </a:solidFill>
+                  </a:tcPr>
+                </a:tc>
+                <a:tc>
+                  <a:txBody>
+                    <a:bodyPr wrap="square"/>
+                    <a:lstStyle/>
+                    <a:p>
+                      <a:pPr algn="ctr">
+                        <a:spcBef>
+                          <a:spcPts val="0"/>
+                        </a:spcBef>
+                        <a:spcAft>
+                          <a:spcPts val="0"/>
+                        </a:spcAft>
+                        <a:buNone/>
+                      </a:pPr>
+                      <a:r>
+                        <a:rPr sz="1700" b="0">
+                          <a:solidFill>
+                            <a:srgbClr val="222222"/>
+                          </a:solidFill>
+                          <a:latin typeface="Roboto Medium"/>
+                          <a:ea typeface="Roboto Medium"/>
+                          <a:cs typeface="Roboto Medium"/>
+                        </a:rPr>
+                        <a:t>0.76</a:t>
+                      </a:r>
+                    </a:p>
+                  </a:txBody>
+                  <a:tcPr marL="64008" marR="64008" marT="27432" marB="27432" anchor="ctr">
+                    <a:lnL w="9525">
+                      <a:solidFill>
+                        <a:srgbClr val="CFDAE8"/>
+                      </a:solidFill>
+                    </a:lnL>
+                    <a:lnR w="9525">
+                      <a:solidFill>
+                        <a:srgbClr val="CFDAE8"/>
+                      </a:solidFill>
+                    </a:lnR>
+                    <a:lnT w="9525">
+                      <a:solidFill>
+                        <a:srgbClr val="CFDAE8"/>
+                      </a:solidFill>
+                    </a:lnT>
+                    <a:lnB w="9525">
+                      <a:solidFill>
+                        <a:srgbClr val="CFDAE8"/>
+                      </a:solidFill>
+                    </a:lnB>
+                    <a:solidFill>
+                      <a:srgbClr val="FFFFFF"/>
+                    </a:solidFill>
+                  </a:tcPr>
+                </a:tc>
+                <a:tc>
+                  <a:txBody>
+                    <a:bodyPr wrap="square"/>
+                    <a:lstStyle/>
+                    <a:p>
+                      <a:pPr algn="ctr">
+                        <a:spcBef>
+                          <a:spcPts val="0"/>
+                        </a:spcBef>
+                        <a:spcAft>
+                          <a:spcPts val="0"/>
+                        </a:spcAft>
+                        <a:buNone/>
+                      </a:pPr>
+                      <a:r>
+                        <a:rPr sz="1700" b="1">
+                          <a:solidFill>
+                            <a:srgbClr val="003366"/>
+                          </a:solidFill>
+                          <a:latin typeface="Roboto Black"/>
+                          <a:ea typeface="Roboto Black"/>
+                          <a:cs typeface="Roboto Black"/>
+                        </a:rPr>
+                        <a:t>0.68</a:t>
+                      </a:r>
+                    </a:p>
+                  </a:txBody>
+                  <a:tcPr marL="64008" marR="64008" marT="27432" marB="27432" anchor="ctr">
+                    <a:lnL w="9525">
+                      <a:solidFill>
+                        <a:srgbClr val="CFDAE8"/>
+                      </a:solidFill>
+                    </a:lnL>
+                    <a:lnR w="9525">
+                      <a:solidFill>
+                        <a:srgbClr val="CFDAE8"/>
+                      </a:solidFill>
+                    </a:lnR>
+                    <a:lnT w="9525">
+                      <a:solidFill>
+                        <a:srgbClr val="CFDAE8"/>
+                      </a:solidFill>
+                    </a:lnT>
+                    <a:lnB w="9525">
+                      <a:solidFill>
+                        <a:srgbClr val="CFDAE8"/>
+                      </a:solidFill>
+                    </a:lnB>
+                    <a:solidFill>
+                      <a:srgbClr val="EEF3FA"/>
+                    </a:solidFill>
+                  </a:tcPr>
+                </a:tc>
+              </a:tr>
+            </a:tbl>
+          </a:graphicData>
+        </a:graphic>
+      </p:graphicFrame>
+      <p:sp>
+        <p:nvSpPr>
+          <p:cNvPr id="23" name="TextBox 23"/>
+          <p:cNvSpPr txBox="1"/>
+          <p:nvPr/>
+        </p:nvSpPr>
+        <p:spPr>
+          <a:xfrm>
+            <a:off x="411480" y="4160520"/>
+            <a:ext cx="6309360" cy="1737360"/>
+          </a:xfrm>
+          <a:prstGeom prst="rect">
+            <a:avLst/>
+          </a:prstGeom>
+          <a:noFill/>
+        </p:spPr>
+        <p:txBody>
+          <a:bodyPr wrap="square" anchor="t" lIns="45720" rIns="45720" tIns="18288" bIns="18288"/>
+          <a:lstStyle/>
+          <a:p>
+            <a:pPr>
+              <a:spcBef>
+                <a:spcPts val="0"/>
+              </a:spcBef>
+              <a:spcAft>
+                <a:spcPts val="0"/>
+              </a:spcAft>
+              <a:buNone/>
+            </a:pPr>
+            <a:r>
+              <a:rPr sz="1500" b="0">
+                <a:solidFill>
+                  <a:srgbClr val="666666"/>
+                </a:solidFill>
+                <a:latin typeface="Roboto Medium"/>
+                <a:ea typeface="Roboto Medium"/>
+                <a:cs typeface="Roboto Medium"/>
+              </a:rPr>
+              <a:t>“Phòng thủ thường”: thêm dấu phân cách (Delimiters) vào prompt, cách chống prompt injection phổ biến. Số liệu trên G-Designer.</a:t>
+            </a:r>
+          </a:p>
+          <a:p>
+            <a:pPr marL="134300" indent="-134300">
+              <a:spcBef>
+                <a:spcPts val="600"/>
+              </a:spcBef>
+              <a:spcAft>
+                <a:spcPts val="0"/>
+              </a:spcAft>
+              <a:buClr>
+                <a:srgbClr val="C00000"/>
+              </a:buClr>
+              <a:buFont typeface="Arial"/>
+              <a:buChar char="•"/>
+            </a:pPr>
+            <a:r>
+              <a:rPr sz="1700" b="0">
+                <a:solidFill>
+                  <a:srgbClr val="222222"/>
+                </a:solidFill>
+                <a:latin typeface="Roboto Medium"/>
+                <a:ea typeface="Roboto Medium"/>
+                <a:cs typeface="Roboto Medium"/>
+              </a:rPr>
+              <a:t>MIRAGE làm tấn công kém hơn trên mọi bộ dữ liệu, độ chính xác của tác vụ chỉ thay đổi nhỏ.</a:t>
+            </a:r>
+          </a:p>
+        </p:txBody>
+      </p:sp>
+      <p:sp>
+        <p:nvSpPr>
+          <p:cNvPr id="24" name="Card 24"/>
+          <p:cNvSpPr/>
+          <p:nvPr/>
+        </p:nvSpPr>
+        <p:spPr>
+          <a:xfrm>
+            <a:off x="7040880" y="914400"/>
+            <a:ext cx="4736592" cy="1965960"/>
+          </a:xfrm>
+          <a:prstGeom prst="rect">
+            <a:avLst/>
+          </a:prstGeom>
+          <a:solidFill>
+            <a:srgbClr val="F3F6FB"/>
+          </a:solidFill>
+          <a:ln w="9525">
+            <a:solidFill>
+              <a:srgbClr val="CFDAE8"/>
+            </a:solidFill>
+          </a:ln>
+          <a:effectLst/>
+        </p:spPr>
+        <p:txBody>
+          <a:bodyPr wrap="square" rtlCol="0" anchor="ctr" lIns="73152" rIns="73152" tIns="36576" bIns="36576"/>
+          <a:lstStyle/>
+          <a:p/>
+        </p:txBody>
+      </p:sp>
+      <p:sp>
+        <p:nvSpPr>
+          <p:cNvPr id="25" name="Card bar 25"/>
+          <p:cNvSpPr/>
+          <p:nvPr/>
+        </p:nvSpPr>
+        <p:spPr>
+          <a:xfrm>
+            <a:off x="7040880" y="914400"/>
+            <a:ext cx="4736592" cy="54864"/>
+          </a:xfrm>
+          <a:prstGeom prst="rect">
+            <a:avLst/>
+          </a:prstGeom>
+          <a:solidFill>
+            <a:srgbClr val="003366"/>
+          </a:solidFill>
+          <a:ln>
+            <a:noFill/>
+          </a:ln>
+          <a:effectLst/>
+        </p:spPr>
+        <p:txBody>
+          <a:bodyPr wrap="square" rtlCol="0" anchor="ctr" lIns="73152" rIns="73152" tIns="36576" bIns="36576"/>
+          <a:lstStyle/>
+          <a:p/>
+        </p:txBody>
+      </p:sp>
+      <p:sp>
+        <p:nvSpPr>
+          <p:cNvPr id="26" name="TextBox 26"/>
+          <p:cNvSpPr txBox="1"/>
+          <p:nvPr/>
+        </p:nvSpPr>
+        <p:spPr>
+          <a:xfrm>
+            <a:off x="7178040" y="1005840"/>
+            <a:ext cx="4462272" cy="1828800"/>
+          </a:xfrm>
+          <a:prstGeom prst="rect">
+            <a:avLst/>
+          </a:prstGeom>
+          <a:noFill/>
+        </p:spPr>
+        <p:txBody>
+          <a:bodyPr wrap="square" anchor="t" lIns="45720" rIns="45720" tIns="18288" bIns="18288"/>
+          <a:lstStyle/>
+          <a:p>
+            <a:pPr>
+              <a:spcBef>
+                <a:spcPts val="0"/>
+              </a:spcBef>
+              <a:spcAft>
+                <a:spcPts val="0"/>
+              </a:spcAft>
+              <a:buNone/>
+            </a:pPr>
+            <a:r>
+              <a:rPr sz="1950" b="1">
+                <a:solidFill>
+                  <a:srgbClr val="003366"/>
+                </a:solidFill>
+                <a:latin typeface="Roboto Black"/>
+                <a:ea typeface="Roboto Black"/>
+                <a:cs typeface="Roboto Black"/>
+              </a:rPr>
+              <a:t>Điểm mạnh</a:t>
+            </a:r>
+          </a:p>
+          <a:p>
+            <a:pPr marL="134300" indent="-134300">
+              <a:spcBef>
+                <a:spcPts val="400"/>
+              </a:spcBef>
+              <a:spcAft>
+                <a:spcPts val="0"/>
+              </a:spcAft>
+              <a:buClr>
+                <a:srgbClr val="C00000"/>
+              </a:buClr>
+              <a:buFont typeface="Arial"/>
+              <a:buChar char="•"/>
+            </a:pPr>
+            <a:r>
+              <a:rPr sz="1700" b="0">
+                <a:solidFill>
+                  <a:srgbClr val="222222"/>
+                </a:solidFill>
+                <a:latin typeface="Roboto Medium"/>
+                <a:ea typeface="Roboto Medium"/>
+                <a:cs typeface="Roboto Medium"/>
+              </a:rPr>
+              <a:t xml:space="preserve">Lần đầu bảo vệ </a:t>
+            </a:r>
+            <a:r>
+              <a:rPr sz="1700" b="1">
+                <a:solidFill>
+                  <a:srgbClr val="003366"/>
+                </a:solidFill>
+                <a:latin typeface="Roboto Black"/>
+                <a:ea typeface="Roboto Black"/>
+                <a:cs typeface="Roboto Black"/>
+              </a:rPr>
+              <a:t>bí mật cấu trúc</a:t>
+            </a:r>
+            <a:r>
+              <a:rPr sz="1700" b="0">
+                <a:solidFill>
+                  <a:srgbClr val="222222"/>
+                </a:solidFill>
+                <a:latin typeface="Roboto Medium"/>
+                <a:ea typeface="Roboto Medium"/>
+                <a:cs typeface="Roboto Medium"/>
+              </a:rPr>
+              <a:t xml:space="preserve"> của MAS.</a:t>
+            </a:r>
+          </a:p>
+          <a:p>
+            <a:pPr marL="134300" indent="-134300">
+              <a:spcBef>
+                <a:spcPts val="300"/>
+              </a:spcBef>
+              <a:spcAft>
+                <a:spcPts val="0"/>
+              </a:spcAft>
+              <a:buClr>
+                <a:srgbClr val="C00000"/>
+              </a:buClr>
+              <a:buFont typeface="Arial"/>
+              <a:buChar char="•"/>
+            </a:pPr>
+            <a:r>
+              <a:rPr sz="1700" b="0">
+                <a:solidFill>
+                  <a:srgbClr val="222222"/>
+                </a:solidFill>
+                <a:latin typeface="Roboto Medium"/>
+                <a:ea typeface="Roboto Medium"/>
+                <a:cs typeface="Roboto Medium"/>
+              </a:rPr>
+              <a:t>Không cần sửa agent, chỉ sửa phần đưa ra ngoài.</a:t>
+            </a:r>
+          </a:p>
+        </p:txBody>
+      </p:sp>
+      <p:sp>
+        <p:nvSpPr>
+          <p:cNvPr id="27" name="Card 27"/>
+          <p:cNvSpPr/>
+          <p:nvPr/>
+        </p:nvSpPr>
+        <p:spPr>
+          <a:xfrm>
+            <a:off x="7040880" y="3063240"/>
+            <a:ext cx="4736592" cy="2834640"/>
+          </a:xfrm>
+          <a:prstGeom prst="rect">
+            <a:avLst/>
+          </a:prstGeom>
+          <a:solidFill>
+            <a:srgbClr val="FCF4F4"/>
+          </a:solidFill>
+          <a:ln w="9525">
+            <a:solidFill>
+              <a:srgbClr val="EBCBCB"/>
+            </a:solidFill>
+          </a:ln>
+          <a:effectLst/>
+        </p:spPr>
+        <p:txBody>
+          <a:bodyPr wrap="square" rtlCol="0" anchor="ctr" lIns="73152" rIns="73152" tIns="36576" bIns="36576"/>
+          <a:lstStyle/>
+          <a:p/>
+        </p:txBody>
+      </p:sp>
+      <p:sp>
+        <p:nvSpPr>
+          <p:cNvPr id="28" name="Card bar 28"/>
+          <p:cNvSpPr/>
+          <p:nvPr/>
+        </p:nvSpPr>
+        <p:spPr>
+          <a:xfrm>
+            <a:off x="7040880" y="3063240"/>
+            <a:ext cx="4736592" cy="54864"/>
+          </a:xfrm>
+          <a:prstGeom prst="rect">
+            <a:avLst/>
+          </a:prstGeom>
+          <a:solidFill>
+            <a:srgbClr val="C00000"/>
+          </a:solidFill>
+          <a:ln>
+            <a:noFill/>
+          </a:ln>
+          <a:effectLst/>
+        </p:spPr>
+        <p:txBody>
+          <a:bodyPr wrap="square" rtlCol="0" anchor="ctr" lIns="73152" rIns="73152" tIns="36576" bIns="36576"/>
+          <a:lstStyle/>
+          <a:p/>
+        </p:txBody>
+      </p:sp>
+      <p:sp>
+        <p:nvSpPr>
+          <p:cNvPr id="29" name="TextBox 29"/>
+          <p:cNvSpPr txBox="1"/>
+          <p:nvPr/>
+        </p:nvSpPr>
+        <p:spPr>
+          <a:xfrm>
+            <a:off x="7178040" y="3154680"/>
+            <a:ext cx="4462272" cy="2697480"/>
+          </a:xfrm>
+          <a:prstGeom prst="rect">
+            <a:avLst/>
+          </a:prstGeom>
+          <a:noFill/>
+        </p:spPr>
+        <p:txBody>
+          <a:bodyPr wrap="square" anchor="t" lIns="45720" rIns="45720" tIns="18288" bIns="18288"/>
+          <a:lstStyle/>
+          <a:p>
+            <a:pPr>
+              <a:spcBef>
+                <a:spcPts val="0"/>
+              </a:spcBef>
+              <a:spcAft>
+                <a:spcPts val="0"/>
+              </a:spcAft>
+              <a:buNone/>
+            </a:pPr>
+            <a:r>
+              <a:rPr sz="1950" b="1">
+                <a:solidFill>
+                  <a:srgbClr val="C00000"/>
+                </a:solidFill>
+                <a:latin typeface="Roboto Black"/>
+                <a:ea typeface="Roboto Black"/>
+                <a:cs typeface="Roboto Black"/>
+              </a:rPr>
+              <a:t>Hạn chế</a:t>
+            </a:r>
+          </a:p>
+          <a:p>
+            <a:pPr marL="142200" indent="-142200">
+              <a:spcBef>
+                <a:spcPts val="600"/>
+              </a:spcBef>
+              <a:spcAft>
+                <a:spcPts val="0"/>
+              </a:spcAft>
+              <a:buClr>
+                <a:srgbClr val="C00000"/>
+              </a:buClr>
+              <a:buFont typeface="Arial"/>
+              <a:buChar char="•"/>
+            </a:pPr>
+            <a:r>
+              <a:rPr sz="1800" b="0">
+                <a:solidFill>
+                  <a:srgbClr val="222222"/>
+                </a:solidFill>
+                <a:latin typeface="Roboto Medium"/>
+                <a:ea typeface="Roboto Medium"/>
+                <a:cs typeface="Roboto Medium"/>
+              </a:rPr>
+              <a:t>Chỉ thử với 1 kiểu tấn công; kẻ tấn công biết MIRAGE thì sao?</a:t>
+            </a:r>
+          </a:p>
+          <a:p>
+            <a:pPr marL="142200" indent="-142200">
+              <a:spcBef>
+                <a:spcPts val="600"/>
+              </a:spcBef>
+              <a:spcAft>
+                <a:spcPts val="0"/>
+              </a:spcAft>
+              <a:buClr>
+                <a:srgbClr val="C00000"/>
+              </a:buClr>
+              <a:buFont typeface="Arial"/>
+              <a:buChar char="•"/>
+            </a:pPr>
+            <a:r>
+              <a:rPr sz="1800" b="0">
+                <a:solidFill>
+                  <a:srgbClr val="222222"/>
+                </a:solidFill>
+                <a:latin typeface="Roboto Medium"/>
+                <a:ea typeface="Roboto Medium"/>
+                <a:cs typeface="Roboto Medium"/>
+              </a:rPr>
+              <a:t>AUC còn 0.64–0.68, chưa về được 0.5.</a:t>
+            </a:r>
+          </a:p>
+          <a:p>
+            <a:pPr marL="142200" indent="-142200">
+              <a:spcBef>
+                <a:spcPts val="600"/>
+              </a:spcBef>
+              <a:spcAft>
+                <a:spcPts val="0"/>
+              </a:spcAft>
+              <a:buClr>
+                <a:srgbClr val="C00000"/>
+              </a:buClr>
+              <a:buFont typeface="Arial"/>
+              <a:buChar char="•"/>
+            </a:pPr>
+            <a:r>
+              <a:rPr sz="1800" b="0">
+                <a:solidFill>
+                  <a:srgbClr val="222222"/>
+                </a:solidFill>
+                <a:latin typeface="Roboto Medium"/>
+                <a:ea typeface="Roboto Medium"/>
+                <a:cs typeface="Roboto Medium"/>
+              </a:rPr>
+              <a:t>Không báo cáo chi phí gọi LLM thêm.</a:t>
+            </a:r>
+          </a:p>
+        </p:txBody>
+      </p:sp>
+    </p:spTree>
+  </p:cSld>
+  <p:clrMapOvr>
+    <a:masterClrMapping/>
+  </p:clrMapOvr>
+</p:sld>
+</file>
+
+<file path=ppt/slides/slide28.xml><?xml version="1.0" encoding="utf-8"?>
+<p:sld xmlns:a="http://schemas.openxmlformats.org/drawingml/2006/main" xmlns:p="http://schemas.openxmlformats.org/presentationml/2006/main" xmlns:r="http://schemas.openxmlformats.org/officeDocument/2006/relationships">
+  <p:cSld>
+    <p:spTree>
+      <p:nvGrpSpPr>
+        <p:cNvPr id="1" name=""/>
+        <p:cNvGrpSpPr/>
+        <p:nvPr/>
+      </p:nvGrpSpPr>
+      <p:grpSpPr/>
+      <p:sp>
+        <p:nvSpPr>
+          <p:cNvPr id="2" name="Title"/>
+          <p:cNvSpPr txBox="1"/>
+          <p:nvPr/>
+        </p:nvSpPr>
+        <p:spPr>
+          <a:xfrm>
+            <a:off x="320040" y="64008"/>
+            <a:ext cx="9509760" cy="548640"/>
+          </a:xfrm>
+          <a:prstGeom prst="rect">
+            <a:avLst/>
+          </a:prstGeom>
+          <a:noFill/>
+        </p:spPr>
+        <p:txBody>
+          <a:bodyPr wrap="square" anchor="ctr" lIns="45720" rIns="45720" tIns="18288" bIns="18288"/>
+          <a:lstStyle/>
+          <a:p>
+            <a:pPr>
+              <a:spcBef>
+                <a:spcPts val="0"/>
+              </a:spcBef>
+              <a:buNone/>
+            </a:pPr>
+            <a:r>
+              <a:rPr sz="2200" b="1">
+                <a:solidFill>
+                  <a:srgbClr val="FFFFFF"/>
+                </a:solidFill>
+                <a:latin typeface="Roboto Black"/>
+                <a:ea typeface="Roboto Black"/>
+                <a:cs typeface="Roboto Black"/>
+              </a:rPr>
+              <a:t>TIDE: một agent nói dối thì cả nhóm ra sao?</a:t>
+            </a:r>
+          </a:p>
+        </p:txBody>
+      </p:sp>
+      <p:sp>
+        <p:nvSpPr>
+          <p:cNvPr id="3" name="Section"/>
+          <p:cNvSpPr txBox="1"/>
+          <p:nvPr/>
+        </p:nvSpPr>
+        <p:spPr>
+          <a:xfrm>
+            <a:off x="9784080" y="64008"/>
+            <a:ext cx="2103120" cy="548640"/>
+          </a:xfrm>
+          <a:prstGeom prst="rect">
+            <a:avLst/>
+          </a:prstGeom>
+          <a:noFill/>
+        </p:spPr>
+        <p:txBody>
+          <a:bodyPr wrap="square" anchor="ctr" lIns="45720" rIns="45720" tIns="18288" bIns="18288"/>
+          <a:lstStyle/>
+          <a:p>
+            <a:pPr algn="r">
+              <a:spcBef>
+                <a:spcPts val="0"/>
+              </a:spcBef>
+              <a:buNone/>
+            </a:pPr>
+            <a:r>
+              <a:rPr sz="1100" b="0">
+                <a:solidFill>
+                  <a:srgbClr val="B8C6D4"/>
+                </a:solidFill>
+                <a:latin typeface="Roboto Medium"/>
+                <a:ea typeface="Roboto Medium"/>
+                <a:cs typeface="Roboto Medium"/>
+              </a:rPr>
+              <a:t>2. Safety</a:t>
+            </a:r>
+          </a:p>
+        </p:txBody>
+      </p:sp>
+      <p:sp>
+        <p:nvSpPr>
+          <p:cNvPr id="4" name="Slide number"/>
+          <p:cNvSpPr txBox="1"/>
+          <p:nvPr/>
+        </p:nvSpPr>
+        <p:spPr>
+          <a:xfrm>
+            <a:off x="11155680" y="6199632"/>
+            <a:ext cx="731520" cy="256032"/>
+          </a:xfrm>
+          <a:prstGeom prst="rect">
+            <a:avLst/>
+          </a:prstGeom>
+          <a:noFill/>
+        </p:spPr>
+        <p:txBody>
+          <a:bodyPr wrap="square" anchor="t" lIns="45720" rIns="45720" tIns="18288" bIns="18288"/>
+          <a:lstStyle/>
+          <a:p>
+            <a:pPr algn="r">
+              <a:spcBef>
+                <a:spcPts val="0"/>
+              </a:spcBef>
+              <a:buNone/>
+            </a:pPr>
+            <a:r>
+              <a:rPr sz="1000" b="0">
+                <a:solidFill>
+                  <a:srgbClr val="666666"/>
+                </a:solidFill>
+                <a:latin typeface="Roboto Medium"/>
+                <a:ea typeface="Roboto Medium"/>
+                <a:cs typeface="Roboto Medium"/>
+              </a:rPr>
+              <a:t>13</a:t>
+            </a:r>
+          </a:p>
+        </p:txBody>
+      </p:sp>
+      <p:sp>
+        <p:nvSpPr>
+          <p:cNvPr id="5" name="HUST footer name mask"/>
+          <p:cNvSpPr/>
+          <p:nvPr/>
+        </p:nvSpPr>
+        <p:spPr>
+          <a:xfrm>
+            <a:off x="649224" y="6126480"/>
+            <a:ext cx="3273552" cy="521207"/>
+          </a:xfrm>
+          <a:prstGeom prst="rect">
+            <a:avLst/>
+          </a:prstGeom>
+          <a:solidFill>
+            <a:srgbClr val="FFFFFF"/>
+          </a:solidFill>
+          <a:ln>
+            <a:noFill/>
+          </a:ln>
+          <a:effectLst/>
+        </p:spPr>
+        <p:style>
+          <a:lnRef idx="1">
+            <a:schemeClr val="accent1"/>
+          </a:lnRef>
+          <a:fillRef idx="3">
+            <a:schemeClr val="accent1"/>
+          </a:fillRef>
+          <a:effectRef idx="2">
+            <a:schemeClr val="accent1"/>
+          </a:effectRef>
+          <a:fontRef idx="minor">
+            <a:schemeClr val="lt1"/>
+          </a:fontRef>
+        </p:style>
+        <p:txBody>
+          <a:bodyPr rtlCol="0" anchor="ctr"/>
+          <a:lstStyle/>
+          <a:p/>
+        </p:txBody>
+      </p:sp>
+      <p:sp>
+        <p:nvSpPr>
+          <p:cNvPr id="6" name="HUST footer Vietnamese name"/>
+          <p:cNvSpPr txBox="1"/>
+          <p:nvPr/>
+        </p:nvSpPr>
+        <p:spPr>
+          <a:xfrm>
+            <a:off x="667512" y="6135624"/>
+            <a:ext cx="3236976" cy="256032"/>
+          </a:xfrm>
+          <a:prstGeom prst="rect">
+            <a:avLst/>
+          </a:prstGeom>
+          <a:noFill/>
+        </p:spPr>
+        <p:txBody>
+          <a:bodyPr wrap="square" anchor="t" lIns="0" rIns="0" tIns="0" bIns="0"/>
+          <a:lstStyle/>
+          <a:p>
+            <a:pPr>
+              <a:spcBef>
+                <a:spcPts val="0"/>
+              </a:spcBef>
+              <a:buNone/>
+            </a:pPr>
+            <a:r>
+              <a:rPr sz="1688" b="1">
+                <a:solidFill>
+                  <a:srgbClr val="3F3F3F"/>
+                </a:solidFill>
+                <a:latin typeface="Roboto Black"/>
+                <a:ea typeface="Roboto Black"/>
+                <a:cs typeface="Roboto Black"/>
+              </a:rPr>
+              <a:t>ĐẠI HỌC BÁCH KHOA HÀ NỘI</a:t>
+            </a:r>
+          </a:p>
+        </p:txBody>
+      </p:sp>
+      <p:sp>
+        <p:nvSpPr>
+          <p:cNvPr id="7" name="HUST footer English name"/>
+          <p:cNvSpPr txBox="1"/>
+          <p:nvPr/>
+        </p:nvSpPr>
+        <p:spPr>
+          <a:xfrm>
+            <a:off x="667512" y="6391656"/>
+            <a:ext cx="3236976" cy="219456"/>
+          </a:xfrm>
+          <a:prstGeom prst="rect">
+            <a:avLst/>
+          </a:prstGeom>
+          <a:noFill/>
+        </p:spPr>
+        <p:txBody>
+          <a:bodyPr wrap="square" anchor="t" lIns="0" rIns="0" tIns="0" bIns="0"/>
+          <a:lstStyle/>
+          <a:p>
+            <a:pPr>
+              <a:spcBef>
+                <a:spcPts val="0"/>
+              </a:spcBef>
+              <a:buNone/>
+            </a:pPr>
+            <a:r>
+              <a:rPr sz="1000" b="0">
+                <a:solidFill>
+                  <a:srgbClr val="3F3F3F"/>
+                </a:solidFill>
+                <a:latin typeface="Roboto Medium"/>
+                <a:ea typeface="Roboto Medium"/>
+                <a:cs typeface="Roboto Medium"/>
+              </a:rPr>
+              <a:t>HANOI UNIVERSITY OF SCIENCE AND TECHNOLOGY</a:t>
+            </a:r>
+          </a:p>
+        </p:txBody>
+      </p:sp>
+      <p:sp>
+        <p:nvSpPr>
+          <p:cNvPr id="21" name="TextBox 21"/>
+          <p:cNvSpPr txBox="1"/>
+          <p:nvPr/>
+        </p:nvSpPr>
+        <p:spPr>
+          <a:xfrm>
+            <a:off x="411480" y="868680"/>
+            <a:ext cx="11365992" cy="548640"/>
+          </a:xfrm>
+          <a:prstGeom prst="rect">
+            <a:avLst/>
+          </a:prstGeom>
+          <a:noFill/>
+        </p:spPr>
+        <p:txBody>
+          <a:bodyPr wrap="square" anchor="t" lIns="45720" rIns="45720" tIns="18288" bIns="18288"/>
+          <a:lstStyle/>
+          <a:p>
+            <a:pPr>
+              <a:spcBef>
+                <a:spcPts val="0"/>
+              </a:spcBef>
+              <a:spcAft>
+                <a:spcPts val="0"/>
+              </a:spcAft>
+              <a:buNone/>
+            </a:pPr>
+            <a:r>
+              <a:rPr sz="1850" b="0">
+                <a:solidFill>
+                  <a:srgbClr val="222222"/>
+                </a:solidFill>
+                <a:latin typeface="Roboto Medium"/>
+                <a:ea typeface="Roboto Medium"/>
+                <a:cs typeface="Roboto Medium"/>
+              </a:rPr>
+              <a:t xml:space="preserve">Thí nghiệm: một đồ vật được chuyển qua nhiều chỗ; </a:t>
+            </a:r>
+            <a:r>
+              <a:rPr sz="1850" b="0" i="1">
+                <a:solidFill>
+                  <a:srgbClr val="222222"/>
+                </a:solidFill>
+                <a:latin typeface="Roboto Medium"/>
+                <a:ea typeface="Roboto Medium"/>
+                <a:cs typeface="Roboto Medium"/>
+              </a:rPr>
+              <a:t>mỗi agent chỉ thấy một đoạn</a:t>
+            </a:r>
+            <a:r>
+              <a:rPr sz="1850" b="0">
+                <a:solidFill>
+                  <a:srgbClr val="222222"/>
+                </a:solidFill>
+                <a:latin typeface="Roboto Medium"/>
+                <a:ea typeface="Roboto Medium"/>
+                <a:cs typeface="Roboto Medium"/>
+              </a:rPr>
+              <a:t>, gộp lại mới biết vị trí cuối.</a:t>
+            </a:r>
+          </a:p>
+        </p:txBody>
+      </p:sp>
+      <p:sp>
+        <p:nvSpPr>
+          <p:cNvPr id="22" name="Shape 22"/>
+          <p:cNvSpPr/>
+          <p:nvPr/>
+        </p:nvSpPr>
+        <p:spPr>
+          <a:xfrm>
+            <a:off x="411480" y="1600200"/>
+            <a:ext cx="1874520" cy="777240"/>
+          </a:xfrm>
+          <a:prstGeom prst="roundRect">
+            <a:avLst>
+              <a:gd name="adj" fmla="val 8000"/>
+            </a:avLst>
+          </a:prstGeom>
+          <a:solidFill>
+            <a:srgbClr val="F3F6FB"/>
+          </a:solidFill>
+          <a:ln w="12700">
+            <a:solidFill>
+              <a:srgbClr val="003366"/>
+            </a:solidFill>
+          </a:ln>
+          <a:effectLst/>
+        </p:spPr>
+        <p:txBody>
+          <a:bodyPr wrap="square" rtlCol="0" anchor="ctr" lIns="73152" rIns="73152" tIns="36576" bIns="36576"/>
+          <a:lstStyle/>
+          <a:p>
+            <a:pPr algn="ctr">
+              <a:spcBef>
+                <a:spcPts val="0"/>
+              </a:spcBef>
+              <a:spcAft>
+                <a:spcPts val="0"/>
+              </a:spcAft>
+              <a:buNone/>
+            </a:pPr>
+            <a:r>
+              <a:rPr sz="1850" b="1">
+                <a:solidFill>
+                  <a:srgbClr val="003366"/>
+                </a:solidFill>
+                <a:latin typeface="Roboto Black"/>
+                <a:ea typeface="Roboto Black"/>
+                <a:cs typeface="Roboto Black"/>
+              </a:rPr>
+              <a:t>l₀</a:t>
+            </a:r>
+          </a:p>
+        </p:txBody>
+      </p:sp>
+      <p:cxnSp>
+        <p:nvCxnSpPr>
+          <p:cNvPr id="23" name="Connector 23"/>
+          <p:cNvCxnSpPr/>
+          <p:nvPr/>
+        </p:nvCxnSpPr>
+        <p:spPr>
+          <a:xfrm>
+            <a:off x="2322576" y="1988820"/>
+            <a:ext cx="425196" cy="0"/>
+          </a:xfrm>
+          <a:prstGeom prst="straightConnector1">
+            <a:avLst/>
+          </a:prstGeom>
+          <a:ln w="22225">
+            <a:solidFill>
+              <a:srgbClr val="003366"/>
+            </a:solidFill>
+            <a:tailEnd type="triangle" w="med" len="med"/>
+          </a:ln>
+        </p:spPr>
+      </p:cxnSp>
+      <p:sp>
+        <p:nvSpPr>
+          <p:cNvPr id="24" name="Shape 24"/>
+          <p:cNvSpPr/>
+          <p:nvPr/>
+        </p:nvSpPr>
+        <p:spPr>
+          <a:xfrm>
+            <a:off x="2784348" y="1600200"/>
+            <a:ext cx="1874520" cy="777240"/>
+          </a:xfrm>
+          <a:prstGeom prst="roundRect">
+            <a:avLst>
+              <a:gd name="adj" fmla="val 8000"/>
+            </a:avLst>
+          </a:prstGeom>
+          <a:solidFill>
+            <a:srgbClr val="F3F6FB"/>
+          </a:solidFill>
+          <a:ln w="12700">
+            <a:solidFill>
+              <a:srgbClr val="003366"/>
+            </a:solidFill>
+          </a:ln>
+          <a:effectLst/>
+        </p:spPr>
+        <p:txBody>
+          <a:bodyPr wrap="square" rtlCol="0" anchor="ctr" lIns="73152" rIns="73152" tIns="36576" bIns="36576"/>
+          <a:lstStyle/>
+          <a:p>
+            <a:pPr algn="ctr">
+              <a:spcBef>
+                <a:spcPts val="0"/>
+              </a:spcBef>
+              <a:spcAft>
+                <a:spcPts val="0"/>
+              </a:spcAft>
+              <a:buNone/>
+            </a:pPr>
+            <a:r>
+              <a:rPr sz="1850" b="1">
+                <a:solidFill>
+                  <a:srgbClr val="003366"/>
+                </a:solidFill>
+                <a:latin typeface="Roboto Black"/>
+                <a:ea typeface="Roboto Black"/>
+                <a:cs typeface="Roboto Black"/>
+              </a:rPr>
+              <a:t>l₁</a:t>
+            </a:r>
+          </a:p>
+        </p:txBody>
+      </p:sp>
+      <p:cxnSp>
+        <p:nvCxnSpPr>
+          <p:cNvPr id="25" name="Connector 25"/>
+          <p:cNvCxnSpPr/>
+          <p:nvPr/>
+        </p:nvCxnSpPr>
+        <p:spPr>
+          <a:xfrm>
+            <a:off x="4695444" y="1988820"/>
+            <a:ext cx="425196" cy="0"/>
+          </a:xfrm>
+          <a:prstGeom prst="straightConnector1">
+            <a:avLst/>
+          </a:prstGeom>
+          <a:ln w="22225">
+            <a:solidFill>
+              <a:srgbClr val="003366"/>
+            </a:solidFill>
+            <a:tailEnd type="triangle" w="med" len="med"/>
+          </a:ln>
+        </p:spPr>
+      </p:cxnSp>
+      <p:sp>
+        <p:nvSpPr>
+          <p:cNvPr id="26" name="Shape 26"/>
+          <p:cNvSpPr/>
+          <p:nvPr/>
+        </p:nvSpPr>
+        <p:spPr>
+          <a:xfrm>
+            <a:off x="5157216" y="1600200"/>
+            <a:ext cx="1874520" cy="777240"/>
+          </a:xfrm>
+          <a:prstGeom prst="roundRect">
+            <a:avLst>
+              <a:gd name="adj" fmla="val 8000"/>
+            </a:avLst>
+          </a:prstGeom>
+          <a:solidFill>
+            <a:srgbClr val="F3F6FB"/>
+          </a:solidFill>
+          <a:ln w="12700">
+            <a:solidFill>
+              <a:srgbClr val="003366"/>
+            </a:solidFill>
+          </a:ln>
+          <a:effectLst/>
+        </p:spPr>
+        <p:txBody>
+          <a:bodyPr wrap="square" rtlCol="0" anchor="ctr" lIns="73152" rIns="73152" tIns="36576" bIns="36576"/>
+          <a:lstStyle/>
+          <a:p>
+            <a:pPr algn="ctr">
+              <a:spcBef>
+                <a:spcPts val="0"/>
+              </a:spcBef>
+              <a:spcAft>
+                <a:spcPts val="0"/>
+              </a:spcAft>
+              <a:buNone/>
+            </a:pPr>
+            <a:r>
+              <a:rPr sz="1850" b="1">
+                <a:solidFill>
+                  <a:srgbClr val="003366"/>
+                </a:solidFill>
+                <a:latin typeface="Roboto Black"/>
+                <a:ea typeface="Roboto Black"/>
+                <a:cs typeface="Roboto Black"/>
+              </a:rPr>
+              <a:t>…</a:t>
+            </a:r>
+          </a:p>
+        </p:txBody>
+      </p:sp>
+      <p:cxnSp>
+        <p:nvCxnSpPr>
+          <p:cNvPr id="27" name="Connector 27"/>
+          <p:cNvCxnSpPr/>
+          <p:nvPr/>
+        </p:nvCxnSpPr>
+        <p:spPr>
+          <a:xfrm>
+            <a:off x="7068312" y="1988820"/>
+            <a:ext cx="425196" cy="0"/>
+          </a:xfrm>
+          <a:prstGeom prst="straightConnector1">
+            <a:avLst/>
+          </a:prstGeom>
+          <a:ln w="22225">
+            <a:solidFill>
+              <a:srgbClr val="003366"/>
+            </a:solidFill>
+            <a:tailEnd type="triangle" w="med" len="med"/>
+          </a:ln>
+        </p:spPr>
+      </p:cxnSp>
+      <p:sp>
+        <p:nvSpPr>
+          <p:cNvPr id="28" name="Shape 28"/>
+          <p:cNvSpPr/>
+          <p:nvPr/>
+        </p:nvSpPr>
+        <p:spPr>
+          <a:xfrm>
+            <a:off x="7530084" y="1600200"/>
+            <a:ext cx="1874520" cy="777240"/>
+          </a:xfrm>
+          <a:prstGeom prst="roundRect">
+            <a:avLst>
+              <a:gd name="adj" fmla="val 8000"/>
+            </a:avLst>
+          </a:prstGeom>
+          <a:solidFill>
+            <a:srgbClr val="FCF4F4"/>
+          </a:solidFill>
+          <a:ln w="15875">
+            <a:solidFill>
+              <a:srgbClr val="C00000"/>
+            </a:solidFill>
+          </a:ln>
+          <a:effectLst/>
+        </p:spPr>
+        <p:txBody>
+          <a:bodyPr wrap="square" rtlCol="0" anchor="ctr" lIns="73152" rIns="73152" tIns="36576" bIns="36576"/>
+          <a:lstStyle/>
+          <a:p>
+            <a:pPr algn="ctr">
+              <a:spcBef>
+                <a:spcPts val="0"/>
+              </a:spcBef>
+              <a:spcAft>
+                <a:spcPts val="0"/>
+              </a:spcAft>
+              <a:buNone/>
+            </a:pPr>
+            <a:r>
+              <a:rPr sz="1700" b="1">
+                <a:solidFill>
+                  <a:srgbClr val="C00000"/>
+                </a:solidFill>
+                <a:latin typeface="Roboto Black"/>
+                <a:ea typeface="Roboto Black"/>
+                <a:cs typeface="Roboto Black"/>
+              </a:rPr>
+              <a:t>lₘ₋₁ (mồi)</a:t>
+            </a:r>
+          </a:p>
+        </p:txBody>
+      </p:sp>
+      <p:cxnSp>
+        <p:nvCxnSpPr>
+          <p:cNvPr id="29" name="Connector 29"/>
+          <p:cNvCxnSpPr/>
+          <p:nvPr/>
+        </p:nvCxnSpPr>
+        <p:spPr>
+          <a:xfrm>
+            <a:off x="9441180" y="1988820"/>
+            <a:ext cx="425196" cy="0"/>
+          </a:xfrm>
+          <a:prstGeom prst="straightConnector1">
+            <a:avLst/>
+          </a:prstGeom>
+          <a:ln w="22225">
+            <a:solidFill>
+              <a:srgbClr val="003366"/>
+            </a:solidFill>
+            <a:tailEnd type="triangle" w="med" len="med"/>
+          </a:ln>
+        </p:spPr>
+      </p:cxnSp>
+      <p:sp>
+        <p:nvSpPr>
+          <p:cNvPr id="30" name="Shape 30"/>
+          <p:cNvSpPr/>
+          <p:nvPr/>
+        </p:nvSpPr>
+        <p:spPr>
+          <a:xfrm>
+            <a:off x="9902952" y="1600200"/>
+            <a:ext cx="1874520" cy="777240"/>
+          </a:xfrm>
+          <a:prstGeom prst="roundRect">
+            <a:avLst>
+              <a:gd name="adj" fmla="val 8000"/>
+            </a:avLst>
+          </a:prstGeom>
+          <a:solidFill>
+            <a:srgbClr val="003366"/>
+          </a:solidFill>
+          <a:ln>
+            <a:noFill/>
+          </a:ln>
+          <a:effectLst/>
+        </p:spPr>
+        <p:txBody>
+          <a:bodyPr wrap="square" rtlCol="0" anchor="ctr" lIns="73152" rIns="73152" tIns="36576" bIns="36576"/>
+          <a:lstStyle/>
+          <a:p>
+            <a:pPr algn="ctr">
+              <a:spcBef>
+                <a:spcPts val="0"/>
+              </a:spcBef>
+              <a:spcAft>
+                <a:spcPts val="0"/>
+              </a:spcAft>
+              <a:buNone/>
+            </a:pPr>
+            <a:r>
+              <a:rPr sz="1700" b="1">
+                <a:solidFill>
+                  <a:srgbClr val="FFFFFF"/>
+                </a:solidFill>
+                <a:latin typeface="Roboto Black"/>
+                <a:ea typeface="Roboto Black"/>
+                <a:cs typeface="Roboto Black"/>
+              </a:rPr>
+              <a:t>lₘ (đúng)</a:t>
+            </a:r>
+          </a:p>
+        </p:txBody>
+      </p:sp>
+      <p:sp>
+        <p:nvSpPr>
+          <p:cNvPr id="31" name="Card 31"/>
+          <p:cNvSpPr/>
+          <p:nvPr/>
+        </p:nvSpPr>
+        <p:spPr>
+          <a:xfrm>
+            <a:off x="411480" y="2697480"/>
+            <a:ext cx="5545836" cy="1737360"/>
+          </a:xfrm>
+          <a:prstGeom prst="rect">
+            <a:avLst/>
+          </a:prstGeom>
+          <a:solidFill>
+            <a:srgbClr val="F3F6FB"/>
+          </a:solidFill>
+          <a:ln w="9525">
+            <a:solidFill>
+              <a:srgbClr val="CFDAE8"/>
+            </a:solidFill>
+          </a:ln>
+          <a:effectLst/>
+        </p:spPr>
+        <p:txBody>
+          <a:bodyPr wrap="square" rtlCol="0" anchor="ctr" lIns="73152" rIns="73152" tIns="36576" bIns="36576"/>
+          <a:lstStyle/>
+          <a:p/>
+        </p:txBody>
+      </p:sp>
+      <p:sp>
+        <p:nvSpPr>
+          <p:cNvPr id="32" name="Card bar 32"/>
+          <p:cNvSpPr/>
+          <p:nvPr/>
+        </p:nvSpPr>
+        <p:spPr>
+          <a:xfrm>
+            <a:off x="411480" y="2697480"/>
+            <a:ext cx="5545836" cy="54864"/>
+          </a:xfrm>
+          <a:prstGeom prst="rect">
+            <a:avLst/>
+          </a:prstGeom>
+          <a:solidFill>
+            <a:srgbClr val="003366"/>
+          </a:solidFill>
+          <a:ln>
+            <a:noFill/>
+          </a:ln>
+          <a:effectLst/>
+        </p:spPr>
+        <p:txBody>
+          <a:bodyPr wrap="square" rtlCol="0" anchor="ctr" lIns="73152" rIns="73152" tIns="36576" bIns="36576"/>
+          <a:lstStyle/>
+          <a:p/>
+        </p:txBody>
+      </p:sp>
+      <p:sp>
+        <p:nvSpPr>
+          <p:cNvPr id="33" name="TextBox 33"/>
+          <p:cNvSpPr txBox="1"/>
+          <p:nvPr/>
+        </p:nvSpPr>
+        <p:spPr>
+          <a:xfrm>
+            <a:off x="548640" y="2788920"/>
+            <a:ext cx="5271516" cy="1600200"/>
+          </a:xfrm>
+          <a:prstGeom prst="rect">
+            <a:avLst/>
+          </a:prstGeom>
+          <a:noFill/>
+        </p:spPr>
+        <p:txBody>
+          <a:bodyPr wrap="square" anchor="t" lIns="45720" rIns="45720" tIns="18288" bIns="18288"/>
+          <a:lstStyle/>
+          <a:p>
+            <a:pPr>
+              <a:spcBef>
+                <a:spcPts val="0"/>
+              </a:spcBef>
+              <a:spcAft>
+                <a:spcPts val="0"/>
+              </a:spcAft>
+              <a:buNone/>
+            </a:pPr>
+            <a:r>
+              <a:rPr sz="1950" b="1">
+                <a:solidFill>
+                  <a:srgbClr val="003366"/>
+                </a:solidFill>
+                <a:latin typeface="Roboto Black"/>
+                <a:ea typeface="Roboto Black"/>
+                <a:cs typeface="Roboto Black"/>
+              </a:rPr>
+              <a:t>C0: cả nhóm trung thực</a:t>
+            </a:r>
+          </a:p>
+          <a:p>
+            <a:pPr>
+              <a:spcBef>
+                <a:spcPts val="400"/>
+              </a:spcBef>
+              <a:spcAft>
+                <a:spcPts val="0"/>
+              </a:spcAft>
+              <a:buNone/>
+            </a:pPr>
+            <a:r>
+              <a:rPr sz="1700" b="0">
+                <a:solidFill>
+                  <a:srgbClr val="222222"/>
+                </a:solidFill>
+                <a:latin typeface="Roboto Medium"/>
+                <a:ea typeface="Roboto Medium"/>
+                <a:cs typeface="Roboto Medium"/>
+              </a:rPr>
+              <a:t>5 agent chia sẻ những gì mình thấy, thảo luận 3 vòng rồi bỏ phiếu.</a:t>
+            </a:r>
+          </a:p>
+        </p:txBody>
+      </p:sp>
+      <p:sp>
+        <p:nvSpPr>
+          <p:cNvPr id="34" name="Card 34"/>
+          <p:cNvSpPr/>
+          <p:nvPr/>
+        </p:nvSpPr>
+        <p:spPr>
+          <a:xfrm>
+            <a:off x="6231636" y="2697480"/>
+            <a:ext cx="5545836" cy="1737360"/>
+          </a:xfrm>
+          <a:prstGeom prst="rect">
+            <a:avLst/>
+          </a:prstGeom>
+          <a:solidFill>
+            <a:srgbClr val="FCF4F4"/>
+          </a:solidFill>
+          <a:ln w="9525">
+            <a:solidFill>
+              <a:srgbClr val="EBCBCB"/>
+            </a:solidFill>
+          </a:ln>
+          <a:effectLst/>
+        </p:spPr>
+        <p:txBody>
+          <a:bodyPr wrap="square" rtlCol="0" anchor="ctr" lIns="73152" rIns="73152" tIns="36576" bIns="36576"/>
+          <a:lstStyle/>
+          <a:p/>
+        </p:txBody>
+      </p:sp>
+      <p:sp>
+        <p:nvSpPr>
+          <p:cNvPr id="35" name="Card bar 35"/>
+          <p:cNvSpPr/>
+          <p:nvPr/>
+        </p:nvSpPr>
+        <p:spPr>
+          <a:xfrm>
+            <a:off x="6231636" y="2697480"/>
+            <a:ext cx="5545836" cy="54864"/>
+          </a:xfrm>
+          <a:prstGeom prst="rect">
+            <a:avLst/>
+          </a:prstGeom>
+          <a:solidFill>
+            <a:srgbClr val="C00000"/>
+          </a:solidFill>
+          <a:ln>
+            <a:noFill/>
+          </a:ln>
+          <a:effectLst/>
+        </p:spPr>
+        <p:txBody>
+          <a:bodyPr wrap="square" rtlCol="0" anchor="ctr" lIns="73152" rIns="73152" tIns="36576" bIns="36576"/>
+          <a:lstStyle/>
+          <a:p/>
+        </p:txBody>
+      </p:sp>
+      <p:sp>
+        <p:nvSpPr>
+          <p:cNvPr id="36" name="TextBox 36"/>
+          <p:cNvSpPr txBox="1"/>
+          <p:nvPr/>
+        </p:nvSpPr>
+        <p:spPr>
+          <a:xfrm>
+            <a:off x="6368796" y="2788920"/>
+            <a:ext cx="5271516" cy="1600200"/>
+          </a:xfrm>
+          <a:prstGeom prst="rect">
+            <a:avLst/>
+          </a:prstGeom>
+          <a:noFill/>
+        </p:spPr>
+        <p:txBody>
+          <a:bodyPr wrap="square" anchor="t" lIns="45720" rIns="45720" tIns="18288" bIns="18288"/>
+          <a:lstStyle/>
+          <a:p>
+            <a:pPr>
+              <a:spcBef>
+                <a:spcPts val="0"/>
+              </a:spcBef>
+              <a:spcAft>
+                <a:spcPts val="0"/>
+              </a:spcAft>
+              <a:buNone/>
+            </a:pPr>
+            <a:r>
+              <a:rPr sz="1950" b="1">
+                <a:solidFill>
+                  <a:srgbClr val="C00000"/>
+                </a:solidFill>
+                <a:latin typeface="Roboto Black"/>
+                <a:ea typeface="Roboto Black"/>
+                <a:cs typeface="Roboto Black"/>
+              </a:rPr>
+              <a:t>C1: một agent nói dối</a:t>
+            </a:r>
+          </a:p>
+          <a:p>
+            <a:pPr>
+              <a:spcBef>
+                <a:spcPts val="400"/>
+              </a:spcBef>
+              <a:spcAft>
+                <a:spcPts val="0"/>
+              </a:spcAft>
+              <a:buNone/>
+            </a:pPr>
+            <a:r>
+              <a:rPr sz="1700" b="0">
+                <a:solidFill>
+                  <a:srgbClr val="222222"/>
+                </a:solidFill>
+                <a:latin typeface="Roboto Medium"/>
+                <a:ea typeface="Roboto Medium"/>
+                <a:cs typeface="Roboto Medium"/>
+              </a:rPr>
+              <a:t>Agent thấy bước cuối cố tình kéo nhóm về đáp án mồi lₘ₋₁.</a:t>
+            </a:r>
+          </a:p>
+        </p:txBody>
+      </p:sp>
+      <p:sp>
+        <p:nvSpPr>
+          <p:cNvPr id="37" name="Shape 37"/>
+          <p:cNvSpPr/>
+          <p:nvPr/>
+        </p:nvSpPr>
+        <p:spPr>
+          <a:xfrm>
+            <a:off x="411480" y="4663440"/>
+            <a:ext cx="11365992" cy="1234440"/>
+          </a:xfrm>
+          <a:prstGeom prst="rect">
+            <a:avLst/>
+          </a:prstGeom>
+          <a:solidFill>
+            <a:srgbClr val="EEF3FA"/>
+          </a:solidFill>
+          <a:ln>
+            <a:noFill/>
+          </a:ln>
+          <a:effectLst/>
+        </p:spPr>
+        <p:txBody>
+          <a:bodyPr wrap="square" rtlCol="0" anchor="ctr" lIns="182880" rIns="182880" tIns="91440" bIns="91440"/>
+          <a:lstStyle/>
+          <a:p>
+            <a:pPr>
+              <a:spcBef>
+                <a:spcPts val="0"/>
+              </a:spcBef>
+              <a:spcAft>
+                <a:spcPts val="0"/>
+              </a:spcAft>
+              <a:buNone/>
+            </a:pPr>
+            <a:r>
+              <a:rPr sz="1850" b="1">
+                <a:solidFill>
+                  <a:srgbClr val="003366"/>
+                </a:solidFill>
+                <a:latin typeface="Roboto Black"/>
+                <a:ea typeface="Roboto Black"/>
+                <a:cs typeface="Roboto Black"/>
+              </a:rPr>
+              <a:t>Câu hỏi:</a:t>
+            </a:r>
+            <a:r>
+              <a:rPr sz="1850" b="0">
+                <a:solidFill>
+                  <a:srgbClr val="222222"/>
+                </a:solidFill>
+                <a:latin typeface="Roboto Medium"/>
+                <a:ea typeface="Roboto Medium"/>
+                <a:cs typeface="Roboto Medium"/>
+              </a:rPr>
+              <a:t xml:space="preserve"> chỉ một agent nói dối thì cả nhóm có còn tìm ra sự thật? Thảo luận có giúp sửa sai không?</a:t>
+            </a:r>
+          </a:p>
+          <a:p>
+            <a:pPr>
+              <a:spcBef>
+                <a:spcPts val="300"/>
+              </a:spcBef>
+              <a:spcAft>
+                <a:spcPts val="0"/>
+              </a:spcAft>
+              <a:buNone/>
+            </a:pPr>
+            <a:r>
+              <a:rPr sz="1550" b="0">
+                <a:solidFill>
+                  <a:srgbClr val="666666"/>
+                </a:solidFill>
+                <a:latin typeface="Roboto Medium"/>
+                <a:ea typeface="Roboto Medium"/>
+                <a:cs typeface="Roboto Medium"/>
+              </a:rPr>
+              <a:t>120 câu chuyện · 3 model: GPT-5.5, DeepSeek-v4-pro, Grok-4.5</a:t>
+            </a:r>
+          </a:p>
+        </p:txBody>
+      </p:sp>
+    </p:spTree>
+  </p:cSld>
+  <p:clrMapOvr>
+    <a:masterClrMapping/>
+  </p:clrMapOvr>
+</p:sld>
+</file>
+
+<file path=ppt/slides/slide29.xml><?xml version="1.0" encoding="utf-8"?>
+<p:sld xmlns:a="http://schemas.openxmlformats.org/drawingml/2006/main" xmlns:p="http://schemas.openxmlformats.org/presentationml/2006/main" xmlns:r="http://schemas.openxmlformats.org/officeDocument/2006/relationships">
+  <p:cSld>
+    <p:spTree>
+      <p:nvGrpSpPr>
+        <p:cNvPr id="1" name=""/>
+        <p:cNvGrpSpPr/>
+        <p:nvPr/>
+      </p:nvGrpSpPr>
+      <p:grpSpPr/>
+      <p:sp>
+        <p:nvSpPr>
+          <p:cNvPr id="2" name="Title"/>
+          <p:cNvSpPr txBox="1"/>
+          <p:nvPr/>
+        </p:nvSpPr>
+        <p:spPr>
+          <a:xfrm>
+            <a:off x="320040" y="64008"/>
+            <a:ext cx="9509760" cy="548640"/>
+          </a:xfrm>
+          <a:prstGeom prst="rect">
+            <a:avLst/>
+          </a:prstGeom>
+          <a:noFill/>
+        </p:spPr>
+        <p:txBody>
+          <a:bodyPr wrap="square" anchor="ctr" lIns="45720" rIns="45720" tIns="18288" bIns="18288"/>
+          <a:lstStyle/>
+          <a:p>
+            <a:pPr>
+              <a:spcBef>
+                <a:spcPts val="0"/>
+              </a:spcBef>
+              <a:buNone/>
+            </a:pPr>
+            <a:r>
+              <a:rPr sz="2200" b="1">
+                <a:solidFill>
+                  <a:srgbClr val="FFFFFF"/>
+                </a:solidFill>
+                <a:latin typeface="Roboto Black"/>
+                <a:ea typeface="Roboto Black"/>
+                <a:cs typeface="Roboto Black"/>
+              </a:rPr>
+              <a:t>TIDE: thông tin sai thắng thông tin đúng</a:t>
+            </a:r>
+          </a:p>
+        </p:txBody>
+      </p:sp>
+      <p:sp>
+        <p:nvSpPr>
+          <p:cNvPr id="3" name="Section"/>
+          <p:cNvSpPr txBox="1"/>
+          <p:nvPr/>
+        </p:nvSpPr>
+        <p:spPr>
+          <a:xfrm>
+            <a:off x="9784080" y="64008"/>
+            <a:ext cx="2103120" cy="548640"/>
+          </a:xfrm>
+          <a:prstGeom prst="rect">
+            <a:avLst/>
+          </a:prstGeom>
+          <a:noFill/>
+        </p:spPr>
+        <p:txBody>
+          <a:bodyPr wrap="square" anchor="ctr" lIns="45720" rIns="45720" tIns="18288" bIns="18288"/>
+          <a:lstStyle/>
+          <a:p>
+            <a:pPr algn="r">
+              <a:spcBef>
+                <a:spcPts val="0"/>
+              </a:spcBef>
+              <a:buNone/>
+            </a:pPr>
+            <a:r>
+              <a:rPr sz="1100" b="0">
+                <a:solidFill>
+                  <a:srgbClr val="B8C6D4"/>
+                </a:solidFill>
+                <a:latin typeface="Roboto Medium"/>
+                <a:ea typeface="Roboto Medium"/>
+                <a:cs typeface="Roboto Medium"/>
+              </a:rPr>
+              <a:t>2. Safety</a:t>
+            </a:r>
+          </a:p>
+        </p:txBody>
+      </p:sp>
+      <p:sp>
+        <p:nvSpPr>
+          <p:cNvPr id="4" name="Slide number"/>
+          <p:cNvSpPr txBox="1"/>
+          <p:nvPr/>
+        </p:nvSpPr>
+        <p:spPr>
+          <a:xfrm>
+            <a:off x="11155680" y="6199632"/>
+            <a:ext cx="731520" cy="256032"/>
+          </a:xfrm>
+          <a:prstGeom prst="rect">
+            <a:avLst/>
+          </a:prstGeom>
+          <a:noFill/>
+        </p:spPr>
+        <p:txBody>
+          <a:bodyPr wrap="square" anchor="t" lIns="45720" rIns="45720" tIns="18288" bIns="18288"/>
+          <a:lstStyle/>
+          <a:p>
+            <a:pPr algn="r">
+              <a:spcBef>
+                <a:spcPts val="0"/>
+              </a:spcBef>
+              <a:buNone/>
+            </a:pPr>
+            <a:r>
+              <a:rPr sz="1000" b="0">
+                <a:solidFill>
+                  <a:srgbClr val="666666"/>
+                </a:solidFill>
+                <a:latin typeface="Roboto Medium"/>
+                <a:ea typeface="Roboto Medium"/>
+                <a:cs typeface="Roboto Medium"/>
+              </a:rPr>
+              <a:t>14</a:t>
+            </a:r>
+          </a:p>
+        </p:txBody>
+      </p:sp>
+      <p:sp>
+        <p:nvSpPr>
+          <p:cNvPr id="5" name="HUST footer name mask"/>
+          <p:cNvSpPr/>
+          <p:nvPr/>
+        </p:nvSpPr>
+        <p:spPr>
+          <a:xfrm>
+            <a:off x="649224" y="6126480"/>
+            <a:ext cx="3273552" cy="521207"/>
+          </a:xfrm>
+          <a:prstGeom prst="rect">
+            <a:avLst/>
+          </a:prstGeom>
+          <a:solidFill>
+            <a:srgbClr val="FFFFFF"/>
+          </a:solidFill>
+          <a:ln>
+            <a:noFill/>
+          </a:ln>
+          <a:effectLst/>
+        </p:spPr>
+        <p:style>
+          <a:lnRef idx="1">
+            <a:schemeClr val="accent1"/>
+          </a:lnRef>
+          <a:fillRef idx="3">
+            <a:schemeClr val="accent1"/>
+          </a:fillRef>
+          <a:effectRef idx="2">
+            <a:schemeClr val="accent1"/>
+          </a:effectRef>
+          <a:fontRef idx="minor">
+            <a:schemeClr val="lt1"/>
+          </a:fontRef>
+        </p:style>
+        <p:txBody>
+          <a:bodyPr rtlCol="0" anchor="ctr"/>
+          <a:lstStyle/>
+          <a:p/>
+        </p:txBody>
+      </p:sp>
+      <p:sp>
+        <p:nvSpPr>
+          <p:cNvPr id="6" name="HUST footer Vietnamese name"/>
+          <p:cNvSpPr txBox="1"/>
+          <p:nvPr/>
+        </p:nvSpPr>
+        <p:spPr>
+          <a:xfrm>
+            <a:off x="667512" y="6135624"/>
+            <a:ext cx="3236976" cy="256032"/>
+          </a:xfrm>
+          <a:prstGeom prst="rect">
+            <a:avLst/>
+          </a:prstGeom>
+          <a:noFill/>
+        </p:spPr>
+        <p:txBody>
+          <a:bodyPr wrap="square" anchor="t" lIns="0" rIns="0" tIns="0" bIns="0"/>
+          <a:lstStyle/>
+          <a:p>
+            <a:pPr>
+              <a:spcBef>
+                <a:spcPts val="0"/>
+              </a:spcBef>
+              <a:buNone/>
+            </a:pPr>
+            <a:r>
+              <a:rPr sz="1688" b="1">
+                <a:solidFill>
+                  <a:srgbClr val="3F3F3F"/>
+                </a:solidFill>
+                <a:latin typeface="Roboto Black"/>
+                <a:ea typeface="Roboto Black"/>
+                <a:cs typeface="Roboto Black"/>
+              </a:rPr>
+              <a:t>ĐẠI HỌC BÁCH KHOA HÀ NỘI</a:t>
+            </a:r>
+          </a:p>
+        </p:txBody>
+      </p:sp>
+      <p:sp>
+        <p:nvSpPr>
+          <p:cNvPr id="7" name="HUST footer English name"/>
+          <p:cNvSpPr txBox="1"/>
+          <p:nvPr/>
+        </p:nvSpPr>
+        <p:spPr>
+          <a:xfrm>
+            <a:off x="667512" y="6391656"/>
+            <a:ext cx="3236976" cy="219456"/>
+          </a:xfrm>
+          <a:prstGeom prst="rect">
+            <a:avLst/>
+          </a:prstGeom>
+          <a:noFill/>
+        </p:spPr>
+        <p:txBody>
+          <a:bodyPr wrap="square" anchor="t" lIns="0" rIns="0" tIns="0" bIns="0"/>
+          <a:lstStyle/>
+          <a:p>
+            <a:pPr>
+              <a:spcBef>
+                <a:spcPts val="0"/>
+              </a:spcBef>
+              <a:buNone/>
+            </a:pPr>
+            <a:r>
+              <a:rPr sz="1000" b="0">
+                <a:solidFill>
+                  <a:srgbClr val="3F3F3F"/>
+                </a:solidFill>
+                <a:latin typeface="Roboto Medium"/>
+                <a:ea typeface="Roboto Medium"/>
+                <a:cs typeface="Roboto Medium"/>
+              </a:rPr>
+              <a:t>HANOI UNIVERSITY OF SCIENCE AND TECHNOLOGY</a:t>
+            </a:r>
+          </a:p>
+        </p:txBody>
+      </p:sp>
+      <p:sp>
+        <p:nvSpPr>
+          <p:cNvPr id="21" name="Card 21"/>
+          <p:cNvSpPr/>
+          <p:nvPr/>
+        </p:nvSpPr>
+        <p:spPr>
+          <a:xfrm>
+            <a:off x="411480" y="914400"/>
+            <a:ext cx="3605784" cy="2286000"/>
+          </a:xfrm>
+          <a:prstGeom prst="rect">
+            <a:avLst/>
+          </a:prstGeom>
+          <a:solidFill>
+            <a:srgbClr val="F3F6FB"/>
+          </a:solidFill>
+          <a:ln w="9525">
+            <a:solidFill>
+              <a:srgbClr val="CFDAE8"/>
+            </a:solidFill>
+          </a:ln>
+          <a:effectLst/>
+        </p:spPr>
+        <p:txBody>
+          <a:bodyPr wrap="square" rtlCol="0" anchor="ctr" lIns="73152" rIns="73152" tIns="36576" bIns="36576"/>
+          <a:lstStyle/>
+          <a:p/>
+        </p:txBody>
+      </p:sp>
+      <p:sp>
+        <p:nvSpPr>
+          <p:cNvPr id="22" name="Card bar 22"/>
+          <p:cNvSpPr/>
+          <p:nvPr/>
+        </p:nvSpPr>
+        <p:spPr>
+          <a:xfrm>
+            <a:off x="411480" y="914400"/>
+            <a:ext cx="3605784" cy="54864"/>
+          </a:xfrm>
+          <a:prstGeom prst="rect">
+            <a:avLst/>
+          </a:prstGeom>
+          <a:solidFill>
+            <a:srgbClr val="003366"/>
+          </a:solidFill>
+          <a:ln>
+            <a:noFill/>
+          </a:ln>
+          <a:effectLst/>
+        </p:spPr>
+        <p:txBody>
+          <a:bodyPr wrap="square" rtlCol="0" anchor="ctr" lIns="73152" rIns="73152" tIns="36576" bIns="36576"/>
+          <a:lstStyle/>
+          <a:p/>
+        </p:txBody>
+      </p:sp>
+      <p:sp>
+        <p:nvSpPr>
+          <p:cNvPr id="23" name="TextBox 23"/>
+          <p:cNvSpPr txBox="1"/>
+          <p:nvPr/>
+        </p:nvSpPr>
+        <p:spPr>
+          <a:xfrm>
+            <a:off x="548640" y="1097280"/>
+            <a:ext cx="3331464" cy="868680"/>
+          </a:xfrm>
+          <a:prstGeom prst="rect">
+            <a:avLst/>
+          </a:prstGeom>
+          <a:noFill/>
+        </p:spPr>
+        <p:txBody>
+          <a:bodyPr wrap="square" anchor="ctr" lIns="45720" rIns="45720" tIns="18288" bIns="18288"/>
+          <a:lstStyle/>
+          <a:p>
+            <a:pPr algn="ctr">
+              <a:spcBef>
+                <a:spcPts val="0"/>
+              </a:spcBef>
+              <a:spcAft>
+                <a:spcPts val="0"/>
+              </a:spcAft>
+              <a:buNone/>
+            </a:pPr>
+            <a:r>
+              <a:rPr sz="3100" b="1">
+                <a:solidFill>
+                  <a:srgbClr val="003366"/>
+                </a:solidFill>
+                <a:latin typeface="Roboto Black"/>
+                <a:ea typeface="Roboto Black"/>
+                <a:cs typeface="Roboto Black"/>
+              </a:rPr>
+              <a:t xml:space="preserve">72.5% → </a:t>
+            </a:r>
+            <a:r>
+              <a:rPr sz="3100" b="1">
+                <a:solidFill>
+                  <a:srgbClr val="C00000"/>
+                </a:solidFill>
+                <a:latin typeface="Roboto Black"/>
+                <a:ea typeface="Roboto Black"/>
+                <a:cs typeface="Roboto Black"/>
+              </a:rPr>
+              <a:t>14.2%</a:t>
+            </a:r>
+          </a:p>
+        </p:txBody>
+      </p:sp>
+      <p:sp>
+        <p:nvSpPr>
+          <p:cNvPr id="24" name="TextBox 24"/>
+          <p:cNvSpPr txBox="1"/>
+          <p:nvPr/>
+        </p:nvSpPr>
+        <p:spPr>
+          <a:xfrm>
+            <a:off x="548640" y="1965960"/>
+            <a:ext cx="3331464" cy="1143000"/>
+          </a:xfrm>
+          <a:prstGeom prst="rect">
+            <a:avLst/>
+          </a:prstGeom>
+          <a:noFill/>
+        </p:spPr>
+        <p:txBody>
+          <a:bodyPr wrap="square" anchor="t" lIns="45720" rIns="45720" tIns="18288" bIns="18288"/>
+          <a:lstStyle/>
+          <a:p>
+            <a:pPr algn="ctr">
+              <a:spcBef>
+                <a:spcPts val="0"/>
+              </a:spcBef>
+              <a:spcAft>
+                <a:spcPts val="0"/>
+              </a:spcAft>
+              <a:buNone/>
+            </a:pPr>
+            <a:r>
+              <a:rPr sz="1650" b="0">
+                <a:solidFill>
+                  <a:srgbClr val="222222"/>
+                </a:solidFill>
+                <a:latin typeface="Roboto Medium"/>
+                <a:ea typeface="Roboto Medium"/>
+                <a:cs typeface="Roboto Medium"/>
+              </a:rPr>
+              <a:t>nhóm chọn đúng đáp án</a:t>
+            </a:r>
+          </a:p>
+          <a:p>
+            <a:pPr algn="ctr">
+              <a:spcBef>
+                <a:spcPts val="0"/>
+              </a:spcBef>
+              <a:spcAft>
+                <a:spcPts val="0"/>
+              </a:spcAft>
+              <a:buNone/>
+            </a:pPr>
+            <a:r>
+              <a:rPr sz="1650" b="0">
+                <a:solidFill>
+                  <a:srgbClr val="222222"/>
+                </a:solidFill>
+                <a:latin typeface="Roboto Medium"/>
+                <a:ea typeface="Roboto Medium"/>
+                <a:cs typeface="Roboto Medium"/>
+              </a:rPr>
+              <a:t>(trung thực → có người nói dối)</a:t>
+            </a:r>
+          </a:p>
+        </p:txBody>
+      </p:sp>
+      <p:sp>
+        <p:nvSpPr>
+          <p:cNvPr id="25" name="Card 25"/>
+          <p:cNvSpPr/>
+          <p:nvPr/>
+        </p:nvSpPr>
+        <p:spPr>
+          <a:xfrm>
+            <a:off x="4291584" y="914400"/>
+            <a:ext cx="3605784" cy="2286000"/>
+          </a:xfrm>
+          <a:prstGeom prst="rect">
+            <a:avLst/>
+          </a:prstGeom>
+          <a:solidFill>
+            <a:srgbClr val="FCF4F4"/>
+          </a:solidFill>
+          <a:ln w="9525">
+            <a:solidFill>
+              <a:srgbClr val="EBCBCB"/>
+            </a:solidFill>
+          </a:ln>
+          <a:effectLst/>
+        </p:spPr>
+        <p:txBody>
+          <a:bodyPr wrap="square" rtlCol="0" anchor="ctr" lIns="73152" rIns="73152" tIns="36576" bIns="36576"/>
+          <a:lstStyle/>
+          <a:p/>
+        </p:txBody>
+      </p:sp>
+      <p:sp>
+        <p:nvSpPr>
+          <p:cNvPr id="26" name="Card bar 26"/>
+          <p:cNvSpPr/>
+          <p:nvPr/>
+        </p:nvSpPr>
+        <p:spPr>
+          <a:xfrm>
+            <a:off x="4291584" y="914400"/>
+            <a:ext cx="3605784" cy="54864"/>
+          </a:xfrm>
+          <a:prstGeom prst="rect">
+            <a:avLst/>
+          </a:prstGeom>
+          <a:solidFill>
+            <a:srgbClr val="C00000"/>
+          </a:solidFill>
+          <a:ln>
+            <a:noFill/>
+          </a:ln>
+          <a:effectLst/>
+        </p:spPr>
+        <p:txBody>
+          <a:bodyPr wrap="square" rtlCol="0" anchor="ctr" lIns="73152" rIns="73152" tIns="36576" bIns="36576"/>
+          <a:lstStyle/>
+          <a:p/>
+        </p:txBody>
+      </p:sp>
+      <p:sp>
+        <p:nvSpPr>
+          <p:cNvPr id="27" name="TextBox 27"/>
+          <p:cNvSpPr txBox="1"/>
+          <p:nvPr/>
+        </p:nvSpPr>
+        <p:spPr>
+          <a:xfrm>
+            <a:off x="4428744" y="1097280"/>
+            <a:ext cx="3331464" cy="868680"/>
+          </a:xfrm>
+          <a:prstGeom prst="rect">
+            <a:avLst/>
+          </a:prstGeom>
+          <a:noFill/>
+        </p:spPr>
+        <p:txBody>
+          <a:bodyPr wrap="square" anchor="ctr" lIns="45720" rIns="45720" tIns="18288" bIns="18288"/>
+          <a:lstStyle/>
+          <a:p>
+            <a:pPr algn="ctr">
+              <a:spcBef>
+                <a:spcPts val="0"/>
+              </a:spcBef>
+              <a:spcAft>
+                <a:spcPts val="0"/>
+              </a:spcAft>
+              <a:buNone/>
+            </a:pPr>
+            <a:r>
+              <a:rPr sz="3100" b="1">
+                <a:solidFill>
+                  <a:srgbClr val="C00000"/>
+                </a:solidFill>
+                <a:latin typeface="Roboto Black"/>
+                <a:ea typeface="Roboto Black"/>
+                <a:cs typeface="Roboto Black"/>
+              </a:rPr>
+              <a:t>70.7% vs 25.4%</a:t>
+            </a:r>
+          </a:p>
+        </p:txBody>
+      </p:sp>
+      <p:sp>
+        <p:nvSpPr>
+          <p:cNvPr id="28" name="TextBox 28"/>
+          <p:cNvSpPr txBox="1"/>
+          <p:nvPr/>
+        </p:nvSpPr>
+        <p:spPr>
+          <a:xfrm>
+            <a:off x="4428744" y="1965960"/>
+            <a:ext cx="3331464" cy="1143000"/>
+          </a:xfrm>
+          <a:prstGeom prst="rect">
+            <a:avLst/>
+          </a:prstGeom>
+          <a:noFill/>
+        </p:spPr>
+        <p:txBody>
+          <a:bodyPr wrap="square" anchor="t" lIns="45720" rIns="45720" tIns="18288" bIns="18288"/>
+          <a:lstStyle/>
+          <a:p>
+            <a:pPr algn="ctr">
+              <a:spcBef>
+                <a:spcPts val="0"/>
+              </a:spcBef>
+              <a:spcAft>
+                <a:spcPts val="0"/>
+              </a:spcAft>
+              <a:buNone/>
+            </a:pPr>
+            <a:r>
+              <a:rPr sz="1650" b="0">
+                <a:solidFill>
+                  <a:srgbClr val="222222"/>
+                </a:solidFill>
+                <a:latin typeface="Roboto Medium"/>
+                <a:ea typeface="Roboto Medium"/>
+                <a:cs typeface="Roboto Medium"/>
+              </a:rPr>
+              <a:t>lời khai sai được tin, so với lời khai đúng</a:t>
+            </a:r>
+          </a:p>
+        </p:txBody>
+      </p:sp>
+      <p:sp>
+        <p:nvSpPr>
+          <p:cNvPr id="29" name="Card 29"/>
+          <p:cNvSpPr/>
+          <p:nvPr/>
+        </p:nvSpPr>
+        <p:spPr>
+          <a:xfrm>
+            <a:off x="8171688" y="914400"/>
+            <a:ext cx="3605784" cy="2286000"/>
+          </a:xfrm>
+          <a:prstGeom prst="rect">
+            <a:avLst/>
+          </a:prstGeom>
+          <a:solidFill>
+            <a:srgbClr val="F3F6FB"/>
+          </a:solidFill>
+          <a:ln w="9525">
+            <a:solidFill>
+              <a:srgbClr val="CFDAE8"/>
+            </a:solidFill>
+          </a:ln>
+          <a:effectLst/>
+        </p:spPr>
+        <p:txBody>
+          <a:bodyPr wrap="square" rtlCol="0" anchor="ctr" lIns="73152" rIns="73152" tIns="36576" bIns="36576"/>
+          <a:lstStyle/>
+          <a:p/>
+        </p:txBody>
+      </p:sp>
+      <p:sp>
+        <p:nvSpPr>
+          <p:cNvPr id="30" name="Card bar 30"/>
+          <p:cNvSpPr/>
+          <p:nvPr/>
+        </p:nvSpPr>
+        <p:spPr>
+          <a:xfrm>
+            <a:off x="8171688" y="914400"/>
+            <a:ext cx="3605784" cy="54864"/>
+          </a:xfrm>
+          <a:prstGeom prst="rect">
+            <a:avLst/>
+          </a:prstGeom>
+          <a:solidFill>
+            <a:srgbClr val="003366"/>
+          </a:solidFill>
+          <a:ln>
+            <a:noFill/>
+          </a:ln>
+          <a:effectLst/>
+        </p:spPr>
+        <p:txBody>
+          <a:bodyPr wrap="square" rtlCol="0" anchor="ctr" lIns="73152" rIns="73152" tIns="36576" bIns="36576"/>
+          <a:lstStyle/>
+          <a:p/>
+        </p:txBody>
+      </p:sp>
+      <p:sp>
+        <p:nvSpPr>
+          <p:cNvPr id="31" name="TextBox 31"/>
+          <p:cNvSpPr txBox="1"/>
+          <p:nvPr/>
+        </p:nvSpPr>
+        <p:spPr>
+          <a:xfrm>
+            <a:off x="8308848" y="1097280"/>
+            <a:ext cx="3331464" cy="868680"/>
+          </a:xfrm>
+          <a:prstGeom prst="rect">
+            <a:avLst/>
+          </a:prstGeom>
+          <a:noFill/>
+        </p:spPr>
+        <p:txBody>
+          <a:bodyPr wrap="square" anchor="ctr" lIns="45720" rIns="45720" tIns="18288" bIns="18288"/>
+          <a:lstStyle/>
+          <a:p>
+            <a:pPr algn="ctr">
+              <a:spcBef>
+                <a:spcPts val="0"/>
+              </a:spcBef>
+              <a:spcAft>
+                <a:spcPts val="0"/>
+              </a:spcAft>
+              <a:buNone/>
+            </a:pPr>
+            <a:r>
+              <a:rPr sz="3100" b="1">
+                <a:solidFill>
+                  <a:srgbClr val="003366"/>
+                </a:solidFill>
+                <a:latin typeface="Roboto Black"/>
+                <a:ea typeface="Roboto Black"/>
+                <a:cs typeface="Roboto Black"/>
+              </a:rPr>
+              <a:t>2.66 vs 1.33</a:t>
+            </a:r>
+          </a:p>
+        </p:txBody>
+      </p:sp>
+      <p:sp>
+        <p:nvSpPr>
+          <p:cNvPr id="32" name="TextBox 32"/>
+          <p:cNvSpPr txBox="1"/>
+          <p:nvPr/>
+        </p:nvSpPr>
+        <p:spPr>
+          <a:xfrm>
+            <a:off x="8308848" y="1965960"/>
+            <a:ext cx="3331464" cy="1143000"/>
+          </a:xfrm>
+          <a:prstGeom prst="rect">
+            <a:avLst/>
+          </a:prstGeom>
+          <a:noFill/>
+        </p:spPr>
+        <p:txBody>
+          <a:bodyPr wrap="square" anchor="t" lIns="45720" rIns="45720" tIns="18288" bIns="18288"/>
+          <a:lstStyle/>
+          <a:p>
+            <a:pPr algn="ctr">
+              <a:spcBef>
+                <a:spcPts val="0"/>
+              </a:spcBef>
+              <a:spcAft>
+                <a:spcPts val="0"/>
+              </a:spcAft>
+              <a:buNone/>
+            </a:pPr>
+            <a:r>
+              <a:rPr sz="1650" b="0">
+                <a:solidFill>
+                  <a:srgbClr val="222222"/>
+                </a:solidFill>
+                <a:latin typeface="Roboto Medium"/>
+                <a:ea typeface="Roboto Medium"/>
+                <a:cs typeface="Roboto Medium"/>
+              </a:rPr>
+              <a:t>số bước thông tin sai lan đi, so với thông tin đúng</a:t>
+            </a:r>
+          </a:p>
+        </p:txBody>
+      </p:sp>
+      <p:sp>
+        <p:nvSpPr>
+          <p:cNvPr id="33" name="TextBox 33"/>
+          <p:cNvSpPr txBox="1"/>
+          <p:nvPr/>
+        </p:nvSpPr>
+        <p:spPr>
+          <a:xfrm>
+            <a:off x="411480" y="3429000"/>
+            <a:ext cx="11365992" cy="1188720"/>
+          </a:xfrm>
+          <a:prstGeom prst="rect">
+            <a:avLst/>
+          </a:prstGeom>
+          <a:noFill/>
+        </p:spPr>
+        <p:txBody>
+          <a:bodyPr wrap="square" anchor="t" lIns="45720" rIns="45720" tIns="18288" bIns="18288"/>
+          <a:lstStyle/>
+          <a:p>
+            <a:pPr marL="146150" indent="-146150">
+              <a:spcBef>
+                <a:spcPts val="0"/>
+              </a:spcBef>
+              <a:spcAft>
+                <a:spcPts val="0"/>
+              </a:spcAft>
+              <a:buClr>
+                <a:srgbClr val="C00000"/>
+              </a:buClr>
+              <a:buFont typeface="Arial"/>
+              <a:buChar char="•"/>
+            </a:pPr>
+            <a:r>
+              <a:rPr sz="1850" b="0">
+                <a:solidFill>
+                  <a:srgbClr val="222222"/>
+                </a:solidFill>
+                <a:latin typeface="Roboto Medium"/>
+                <a:ea typeface="Roboto Medium"/>
+                <a:cs typeface="Roboto Medium"/>
+              </a:rPr>
+              <a:t xml:space="preserve">Thông tin đúng </a:t>
+            </a:r>
+            <a:r>
+              <a:rPr sz="1850" b="0" i="1">
+                <a:solidFill>
+                  <a:srgbClr val="222222"/>
+                </a:solidFill>
+                <a:latin typeface="Roboto Medium"/>
+                <a:ea typeface="Roboto Medium"/>
+                <a:cs typeface="Roboto Medium"/>
+              </a:rPr>
+              <a:t>vẫn được nhắc tới</a:t>
+            </a:r>
+            <a:r>
+              <a:rPr sz="1850" b="0">
+                <a:solidFill>
+                  <a:srgbClr val="222222"/>
+                </a:solidFill>
+                <a:latin typeface="Roboto Medium"/>
+                <a:ea typeface="Roboto Medium"/>
+                <a:cs typeface="Roboto Medium"/>
+              </a:rPr>
+              <a:t>, nhưng ít được tin; thông tin sai được chuyền tay xa hơn.</a:t>
+            </a:r>
+          </a:p>
+          <a:p>
+            <a:pPr marL="146150" indent="-146150">
+              <a:spcBef>
+                <a:spcPts val="400"/>
+              </a:spcBef>
+              <a:spcAft>
+                <a:spcPts val="0"/>
+              </a:spcAft>
+              <a:buClr>
+                <a:srgbClr val="C00000"/>
+              </a:buClr>
+              <a:buFont typeface="Arial"/>
+              <a:buChar char="•"/>
+            </a:pPr>
+            <a:r>
+              <a:rPr sz="1850" b="0">
+                <a:solidFill>
+                  <a:srgbClr val="222222"/>
+                </a:solidFill>
+                <a:latin typeface="Roboto Medium"/>
+                <a:ea typeface="Roboto Medium"/>
+                <a:cs typeface="Roboto Medium"/>
+              </a:rPr>
+              <a:t xml:space="preserve">Khoảng </a:t>
+            </a:r>
+            <a:r>
+              <a:rPr sz="1850" b="1">
+                <a:solidFill>
+                  <a:srgbClr val="003366"/>
+                </a:solidFill>
+                <a:latin typeface="Roboto Black"/>
+                <a:ea typeface="Roboto Black"/>
+                <a:cs typeface="Roboto Black"/>
+              </a:rPr>
+              <a:t>85%</a:t>
+            </a:r>
+            <a:r>
+              <a:rPr sz="1850" b="0">
+                <a:solidFill>
+                  <a:srgbClr val="222222"/>
+                </a:solidFill>
+                <a:latin typeface="Roboto Medium"/>
+                <a:ea typeface="Roboto Medium"/>
+                <a:cs typeface="Roboto Medium"/>
+              </a:rPr>
+              <a:t xml:space="preserve"> sự chênh lệch đã có ngay khi các agent chia sẻ lời khai, trước khi thảo luận.</a:t>
+            </a:r>
+          </a:p>
+        </p:txBody>
+      </p:sp>
+      <p:sp>
+        <p:nvSpPr>
+          <p:cNvPr id="34" name="Shape 34"/>
+          <p:cNvSpPr/>
+          <p:nvPr/>
+        </p:nvSpPr>
+        <p:spPr>
+          <a:xfrm>
+            <a:off x="411480" y="4754880"/>
+            <a:ext cx="11365992" cy="1143000"/>
+          </a:xfrm>
+          <a:prstGeom prst="rect">
+            <a:avLst/>
+          </a:prstGeom>
+          <a:solidFill>
+            <a:srgbClr val="EEF3FA"/>
+          </a:solidFill>
+          <a:ln>
+            <a:noFill/>
+          </a:ln>
+          <a:effectLst/>
+        </p:spPr>
+        <p:txBody>
+          <a:bodyPr wrap="square" rtlCol="0" anchor="ctr" lIns="182880" rIns="182880" tIns="91440" bIns="91440"/>
+          <a:lstStyle/>
+          <a:p>
+            <a:pPr>
+              <a:spcBef>
+                <a:spcPts val="0"/>
+              </a:spcBef>
+              <a:spcAft>
+                <a:spcPts val="0"/>
+              </a:spcAft>
+              <a:buNone/>
+            </a:pPr>
+            <a:r>
+              <a:rPr sz="1850" b="1">
+                <a:solidFill>
+                  <a:srgbClr val="003366"/>
+                </a:solidFill>
+                <a:latin typeface="Roboto Black"/>
+                <a:ea typeface="Roboto Black"/>
+                <a:cs typeface="Roboto Black"/>
+              </a:rPr>
+              <a:t>Thông điệp:</a:t>
+            </a:r>
+            <a:r>
+              <a:rPr sz="1850" b="0">
+                <a:solidFill>
+                  <a:srgbClr val="222222"/>
+                </a:solidFill>
+                <a:latin typeface="Roboto Medium"/>
+                <a:ea typeface="Roboto Medium"/>
+                <a:cs typeface="Roboto Medium"/>
+              </a:rPr>
+              <a:t xml:space="preserve"> thảo luận </a:t>
+            </a:r>
+            <a:r>
+              <a:rPr sz="1850" b="0" i="1">
+                <a:solidFill>
+                  <a:srgbClr val="222222"/>
+                </a:solidFill>
+                <a:latin typeface="Roboto Medium"/>
+                <a:ea typeface="Roboto Medium"/>
+                <a:cs typeface="Roboto Medium"/>
+              </a:rPr>
+              <a:t>không sửa sai</a:t>
+            </a:r>
+            <a:r>
+              <a:rPr sz="1850" b="0">
+                <a:solidFill>
+                  <a:srgbClr val="222222"/>
+                </a:solidFill>
+                <a:latin typeface="Roboto Medium"/>
+                <a:ea typeface="Roboto Medium"/>
+                <a:cs typeface="Roboto Medium"/>
+              </a:rPr>
+              <a:t xml:space="preserve"> mà chỉ khuếch đại hướng có sẵn: nhóm trung thực đúng thêm, nhóm có người nói dối càng tin vào đáp án mồi.</a:t>
+            </a:r>
+          </a:p>
+        </p:txBody>
+      </p:sp>
+    </p:spTree>
+  </p:cSld>
+  <p:clrMapOvr>
+    <a:masterClrMapping/>
+  </p:clrMapOvr>
+</p:sld>
+</file>
+
 <file path=ppt/slides/slide3.xml><?xml version="1.0" encoding="utf-8"?>
 <p:sld xmlns:a="http://schemas.openxmlformats.org/drawingml/2006/main" xmlns:p="http://schemas.openxmlformats.org/presentationml/2006/main" xmlns:r="http://schemas.openxmlformats.org/officeDocument/2006/relationships">
   <p:cSld>
@@ -43004,6 +46501,1817 @@
                 <a:cs typeface="Roboto Medium"/>
               </a:rPr>
               <a:t>Taxonomy bốn hướng nghiên cứu</a:t>
+            </a:r>
+          </a:p>
+        </p:txBody>
+      </p:sp>
+    </p:spTree>
+  </p:cSld>
+  <p:clrMapOvr>
+    <a:masterClrMapping/>
+  </p:clrMapOvr>
+</p:sld>
+</file>
+
+<file path=ppt/slides/slide30.xml><?xml version="1.0" encoding="utf-8"?>
+<p:sld xmlns:a="http://schemas.openxmlformats.org/drawingml/2006/main" xmlns:p="http://schemas.openxmlformats.org/presentationml/2006/main" xmlns:r="http://schemas.openxmlformats.org/officeDocument/2006/relationships">
+  <p:cSld>
+    <p:spTree>
+      <p:nvGrpSpPr>
+        <p:cNvPr id="1" name=""/>
+        <p:cNvGrpSpPr/>
+        <p:nvPr/>
+      </p:nvGrpSpPr>
+      <p:grpSpPr/>
+      <p:sp>
+        <p:nvSpPr>
+          <p:cNvPr id="2" name="Title"/>
+          <p:cNvSpPr txBox="1"/>
+          <p:nvPr/>
+        </p:nvSpPr>
+        <p:spPr>
+          <a:xfrm>
+            <a:off x="320040" y="64008"/>
+            <a:ext cx="9509760" cy="548640"/>
+          </a:xfrm>
+          <a:prstGeom prst="rect">
+            <a:avLst/>
+          </a:prstGeom>
+          <a:noFill/>
+        </p:spPr>
+        <p:txBody>
+          <a:bodyPr wrap="square" anchor="ctr" lIns="45720" rIns="45720" tIns="18288" bIns="18288"/>
+          <a:lstStyle/>
+          <a:p>
+            <a:pPr>
+              <a:spcBef>
+                <a:spcPts val="0"/>
+              </a:spcBef>
+              <a:buNone/>
+            </a:pPr>
+            <a:r>
+              <a:rPr sz="2200" b="1">
+                <a:solidFill>
+                  <a:srgbClr val="FFFFFF"/>
+                </a:solidFill>
+                <a:latin typeface="Roboto Black"/>
+                <a:ea typeface="Roboto Black"/>
+                <a:cs typeface="Roboto Black"/>
+              </a:rPr>
+              <a:t>TIDE: phân tích thêm và nhận xét</a:t>
+            </a:r>
+          </a:p>
+        </p:txBody>
+      </p:sp>
+      <p:sp>
+        <p:nvSpPr>
+          <p:cNvPr id="3" name="Section"/>
+          <p:cNvSpPr txBox="1"/>
+          <p:nvPr/>
+        </p:nvSpPr>
+        <p:spPr>
+          <a:xfrm>
+            <a:off x="9784080" y="64008"/>
+            <a:ext cx="2103120" cy="548640"/>
+          </a:xfrm>
+          <a:prstGeom prst="rect">
+            <a:avLst/>
+          </a:prstGeom>
+          <a:noFill/>
+        </p:spPr>
+        <p:txBody>
+          <a:bodyPr wrap="square" anchor="ctr" lIns="45720" rIns="45720" tIns="18288" bIns="18288"/>
+          <a:lstStyle/>
+          <a:p>
+            <a:pPr algn="r">
+              <a:spcBef>
+                <a:spcPts val="0"/>
+              </a:spcBef>
+              <a:buNone/>
+            </a:pPr>
+            <a:r>
+              <a:rPr sz="1100" b="0">
+                <a:solidFill>
+                  <a:srgbClr val="B8C6D4"/>
+                </a:solidFill>
+                <a:latin typeface="Roboto Medium"/>
+                <a:ea typeface="Roboto Medium"/>
+                <a:cs typeface="Roboto Medium"/>
+              </a:rPr>
+              <a:t>2. Safety</a:t>
+            </a:r>
+          </a:p>
+        </p:txBody>
+      </p:sp>
+      <p:sp>
+        <p:nvSpPr>
+          <p:cNvPr id="4" name="Slide number"/>
+          <p:cNvSpPr txBox="1"/>
+          <p:nvPr/>
+        </p:nvSpPr>
+        <p:spPr>
+          <a:xfrm>
+            <a:off x="11155680" y="6199632"/>
+            <a:ext cx="731520" cy="256032"/>
+          </a:xfrm>
+          <a:prstGeom prst="rect">
+            <a:avLst/>
+          </a:prstGeom>
+          <a:noFill/>
+        </p:spPr>
+        <p:txBody>
+          <a:bodyPr wrap="square" anchor="t" lIns="45720" rIns="45720" tIns="18288" bIns="18288"/>
+          <a:lstStyle/>
+          <a:p>
+            <a:pPr algn="r">
+              <a:spcBef>
+                <a:spcPts val="0"/>
+              </a:spcBef>
+              <a:buNone/>
+            </a:pPr>
+            <a:r>
+              <a:rPr sz="1000" b="0">
+                <a:solidFill>
+                  <a:srgbClr val="666666"/>
+                </a:solidFill>
+                <a:latin typeface="Roboto Medium"/>
+                <a:ea typeface="Roboto Medium"/>
+                <a:cs typeface="Roboto Medium"/>
+              </a:rPr>
+              <a:t>15</a:t>
+            </a:r>
+          </a:p>
+        </p:txBody>
+      </p:sp>
+      <p:sp>
+        <p:nvSpPr>
+          <p:cNvPr id="5" name="HUST footer name mask"/>
+          <p:cNvSpPr/>
+          <p:nvPr/>
+        </p:nvSpPr>
+        <p:spPr>
+          <a:xfrm>
+            <a:off x="649224" y="6126480"/>
+            <a:ext cx="3273552" cy="521207"/>
+          </a:xfrm>
+          <a:prstGeom prst="rect">
+            <a:avLst/>
+          </a:prstGeom>
+          <a:solidFill>
+            <a:srgbClr val="FFFFFF"/>
+          </a:solidFill>
+          <a:ln>
+            <a:noFill/>
+          </a:ln>
+          <a:effectLst/>
+        </p:spPr>
+        <p:style>
+          <a:lnRef idx="1">
+            <a:schemeClr val="accent1"/>
+          </a:lnRef>
+          <a:fillRef idx="3">
+            <a:schemeClr val="accent1"/>
+          </a:fillRef>
+          <a:effectRef idx="2">
+            <a:schemeClr val="accent1"/>
+          </a:effectRef>
+          <a:fontRef idx="minor">
+            <a:schemeClr val="lt1"/>
+          </a:fontRef>
+        </p:style>
+        <p:txBody>
+          <a:bodyPr rtlCol="0" anchor="ctr"/>
+          <a:lstStyle/>
+          <a:p/>
+        </p:txBody>
+      </p:sp>
+      <p:sp>
+        <p:nvSpPr>
+          <p:cNvPr id="6" name="HUST footer Vietnamese name"/>
+          <p:cNvSpPr txBox="1"/>
+          <p:nvPr/>
+        </p:nvSpPr>
+        <p:spPr>
+          <a:xfrm>
+            <a:off x="667512" y="6135624"/>
+            <a:ext cx="3236976" cy="256032"/>
+          </a:xfrm>
+          <a:prstGeom prst="rect">
+            <a:avLst/>
+          </a:prstGeom>
+          <a:noFill/>
+        </p:spPr>
+        <p:txBody>
+          <a:bodyPr wrap="square" anchor="t" lIns="0" rIns="0" tIns="0" bIns="0"/>
+          <a:lstStyle/>
+          <a:p>
+            <a:pPr>
+              <a:spcBef>
+                <a:spcPts val="0"/>
+              </a:spcBef>
+              <a:buNone/>
+            </a:pPr>
+            <a:r>
+              <a:rPr sz="1688" b="1">
+                <a:solidFill>
+                  <a:srgbClr val="3F3F3F"/>
+                </a:solidFill>
+                <a:latin typeface="Roboto Black"/>
+                <a:ea typeface="Roboto Black"/>
+                <a:cs typeface="Roboto Black"/>
+              </a:rPr>
+              <a:t>ĐẠI HỌC BÁCH KHOA HÀ NỘI</a:t>
+            </a:r>
+          </a:p>
+        </p:txBody>
+      </p:sp>
+      <p:sp>
+        <p:nvSpPr>
+          <p:cNvPr id="7" name="HUST footer English name"/>
+          <p:cNvSpPr txBox="1"/>
+          <p:nvPr/>
+        </p:nvSpPr>
+        <p:spPr>
+          <a:xfrm>
+            <a:off x="667512" y="6391656"/>
+            <a:ext cx="3236976" cy="219456"/>
+          </a:xfrm>
+          <a:prstGeom prst="rect">
+            <a:avLst/>
+          </a:prstGeom>
+          <a:noFill/>
+        </p:spPr>
+        <p:txBody>
+          <a:bodyPr wrap="square" anchor="t" lIns="0" rIns="0" tIns="0" bIns="0"/>
+          <a:lstStyle/>
+          <a:p>
+            <a:pPr>
+              <a:spcBef>
+                <a:spcPts val="0"/>
+              </a:spcBef>
+              <a:buNone/>
+            </a:pPr>
+            <a:r>
+              <a:rPr sz="1000" b="0">
+                <a:solidFill>
+                  <a:srgbClr val="3F3F3F"/>
+                </a:solidFill>
+                <a:latin typeface="Roboto Medium"/>
+                <a:ea typeface="Roboto Medium"/>
+                <a:cs typeface="Roboto Medium"/>
+              </a:rPr>
+              <a:t>HANOI UNIVERSITY OF SCIENCE AND TECHNOLOGY</a:t>
+            </a:r>
+          </a:p>
+        </p:txBody>
+      </p:sp>
+      <p:sp>
+        <p:nvSpPr>
+          <p:cNvPr id="21" name="Card 21"/>
+          <p:cNvSpPr/>
+          <p:nvPr/>
+        </p:nvSpPr>
+        <p:spPr>
+          <a:xfrm>
+            <a:off x="411480" y="914400"/>
+            <a:ext cx="6035040" cy="2377440"/>
+          </a:xfrm>
+          <a:prstGeom prst="rect">
+            <a:avLst/>
+          </a:prstGeom>
+          <a:solidFill>
+            <a:srgbClr val="F3F6FB"/>
+          </a:solidFill>
+          <a:ln w="9525">
+            <a:solidFill>
+              <a:srgbClr val="CFDAE8"/>
+            </a:solidFill>
+          </a:ln>
+          <a:effectLst/>
+        </p:spPr>
+        <p:txBody>
+          <a:bodyPr wrap="square" rtlCol="0" anchor="ctr" lIns="73152" rIns="73152" tIns="36576" bIns="36576"/>
+          <a:lstStyle/>
+          <a:p/>
+        </p:txBody>
+      </p:sp>
+      <p:sp>
+        <p:nvSpPr>
+          <p:cNvPr id="22" name="Card bar 22"/>
+          <p:cNvSpPr/>
+          <p:nvPr/>
+        </p:nvSpPr>
+        <p:spPr>
+          <a:xfrm>
+            <a:off x="411480" y="914400"/>
+            <a:ext cx="6035040" cy="54864"/>
+          </a:xfrm>
+          <a:prstGeom prst="rect">
+            <a:avLst/>
+          </a:prstGeom>
+          <a:solidFill>
+            <a:srgbClr val="003366"/>
+          </a:solidFill>
+          <a:ln>
+            <a:noFill/>
+          </a:ln>
+          <a:effectLst/>
+        </p:spPr>
+        <p:txBody>
+          <a:bodyPr wrap="square" rtlCol="0" anchor="ctr" lIns="73152" rIns="73152" tIns="36576" bIns="36576"/>
+          <a:lstStyle/>
+          <a:p/>
+        </p:txBody>
+      </p:sp>
+      <p:sp>
+        <p:nvSpPr>
+          <p:cNvPr id="23" name="TextBox 23"/>
+          <p:cNvSpPr txBox="1"/>
+          <p:nvPr/>
+        </p:nvSpPr>
+        <p:spPr>
+          <a:xfrm>
+            <a:off x="548640" y="1005840"/>
+            <a:ext cx="5760720" cy="2240280"/>
+          </a:xfrm>
+          <a:prstGeom prst="rect">
+            <a:avLst/>
+          </a:prstGeom>
+          <a:noFill/>
+        </p:spPr>
+        <p:txBody>
+          <a:bodyPr wrap="square" anchor="t" lIns="45720" rIns="45720" tIns="18288" bIns="18288"/>
+          <a:lstStyle/>
+          <a:p>
+            <a:pPr>
+              <a:spcBef>
+                <a:spcPts val="0"/>
+              </a:spcBef>
+              <a:spcAft>
+                <a:spcPts val="0"/>
+              </a:spcAft>
+              <a:buNone/>
+            </a:pPr>
+            <a:r>
+              <a:rPr sz="1950" b="1">
+                <a:solidFill>
+                  <a:srgbClr val="003366"/>
+                </a:solidFill>
+                <a:latin typeface="Roboto Black"/>
+                <a:ea typeface="Roboto Black"/>
+                <a:cs typeface="Roboto Black"/>
+              </a:rPr>
+              <a:t>Kẻ nói dối rời nhóm sớm</a:t>
+            </a:r>
+          </a:p>
+          <a:p>
+            <a:pPr>
+              <a:spcBef>
+                <a:spcPts val="500"/>
+              </a:spcBef>
+              <a:spcAft>
+                <a:spcPts val="0"/>
+              </a:spcAft>
+              <a:buNone/>
+            </a:pPr>
+            <a:r>
+              <a:rPr sz="1850" b="0">
+                <a:solidFill>
+                  <a:srgbClr val="222222"/>
+                </a:solidFill>
+                <a:latin typeface="Roboto Medium"/>
+                <a:ea typeface="Roboto Medium"/>
+                <a:cs typeface="Roboto Medium"/>
+              </a:rPr>
+              <a:t xml:space="preserve">Nói dối xong rồi rời đi, không thảo luận nữa → tỉ lệ chọn đúng vẫn thấp hơn </a:t>
+            </a:r>
+            <a:r>
+              <a:rPr sz="1850" b="1">
+                <a:solidFill>
+                  <a:srgbClr val="003366"/>
+                </a:solidFill>
+                <a:latin typeface="Roboto Black"/>
+                <a:ea typeface="Roboto Black"/>
+                <a:cs typeface="Roboto Black"/>
+              </a:rPr>
+              <a:t>46.67 điểm</a:t>
+            </a:r>
+            <a:r>
+              <a:rPr sz="1850" b="0">
+                <a:solidFill>
+                  <a:srgbClr val="222222"/>
+                </a:solidFill>
+                <a:latin typeface="Roboto Medium"/>
+                <a:ea typeface="Roboto Medium"/>
+                <a:cs typeface="Roboto Medium"/>
+              </a:rPr>
+              <a:t xml:space="preserve"> so với khi agent đó rời đi mà không nói gì.</a:t>
+            </a:r>
+          </a:p>
+          <a:p>
+            <a:pPr>
+              <a:spcBef>
+                <a:spcPts val="600"/>
+              </a:spcBef>
+              <a:spcAft>
+                <a:spcPts val="0"/>
+              </a:spcAft>
+              <a:buNone/>
+            </a:pPr>
+            <a:r>
+              <a:rPr sz="1850" b="1">
+                <a:solidFill>
+                  <a:srgbClr val="C00000"/>
+                </a:solidFill>
+                <a:latin typeface="Roboto Black"/>
+                <a:ea typeface="Roboto Black"/>
+                <a:cs typeface="Roboto Black"/>
+              </a:rPr>
+              <a:t>→ Thông tin sai tự lan qua những agent trung thực.</a:t>
+            </a:r>
+          </a:p>
+        </p:txBody>
+      </p:sp>
+      <p:sp>
+        <p:nvSpPr>
+          <p:cNvPr id="24" name="Card 24"/>
+          <p:cNvSpPr/>
+          <p:nvPr/>
+        </p:nvSpPr>
+        <p:spPr>
+          <a:xfrm>
+            <a:off x="411480" y="3520440"/>
+            <a:ext cx="6035040" cy="2377440"/>
+          </a:xfrm>
+          <a:prstGeom prst="rect">
+            <a:avLst/>
+          </a:prstGeom>
+          <a:solidFill>
+            <a:srgbClr val="F3F6FB"/>
+          </a:solidFill>
+          <a:ln w="9525">
+            <a:solidFill>
+              <a:srgbClr val="CFDAE8"/>
+            </a:solidFill>
+          </a:ln>
+          <a:effectLst/>
+        </p:spPr>
+        <p:txBody>
+          <a:bodyPr wrap="square" rtlCol="0" anchor="ctr" lIns="73152" rIns="73152" tIns="36576" bIns="36576"/>
+          <a:lstStyle/>
+          <a:p/>
+        </p:txBody>
+      </p:sp>
+      <p:sp>
+        <p:nvSpPr>
+          <p:cNvPr id="25" name="Card bar 25"/>
+          <p:cNvSpPr/>
+          <p:nvPr/>
+        </p:nvSpPr>
+        <p:spPr>
+          <a:xfrm>
+            <a:off x="411480" y="3520440"/>
+            <a:ext cx="6035040" cy="54864"/>
+          </a:xfrm>
+          <a:prstGeom prst="rect">
+            <a:avLst/>
+          </a:prstGeom>
+          <a:solidFill>
+            <a:srgbClr val="003366"/>
+          </a:solidFill>
+          <a:ln>
+            <a:noFill/>
+          </a:ln>
+          <a:effectLst/>
+        </p:spPr>
+        <p:txBody>
+          <a:bodyPr wrap="square" rtlCol="0" anchor="ctr" lIns="73152" rIns="73152" tIns="36576" bIns="36576"/>
+          <a:lstStyle/>
+          <a:p/>
+        </p:txBody>
+      </p:sp>
+      <p:sp>
+        <p:nvSpPr>
+          <p:cNvPr id="26" name="TextBox 26"/>
+          <p:cNvSpPr txBox="1"/>
+          <p:nvPr/>
+        </p:nvSpPr>
+        <p:spPr>
+          <a:xfrm>
+            <a:off x="548640" y="3611880"/>
+            <a:ext cx="5760720" cy="2240280"/>
+          </a:xfrm>
+          <a:prstGeom prst="rect">
+            <a:avLst/>
+          </a:prstGeom>
+          <a:noFill/>
+        </p:spPr>
+        <p:txBody>
+          <a:bodyPr wrap="square" anchor="t" lIns="45720" rIns="45720" tIns="18288" bIns="18288"/>
+          <a:lstStyle/>
+          <a:p>
+            <a:pPr>
+              <a:spcBef>
+                <a:spcPts val="0"/>
+              </a:spcBef>
+              <a:spcAft>
+                <a:spcPts val="0"/>
+              </a:spcAft>
+              <a:buNone/>
+            </a:pPr>
+            <a:r>
+              <a:rPr sz="1950" b="1">
+                <a:solidFill>
+                  <a:srgbClr val="003366"/>
+                </a:solidFill>
+                <a:latin typeface="Roboto Black"/>
+                <a:ea typeface="Roboto Black"/>
+                <a:cs typeface="Roboto Black"/>
+              </a:rPr>
+              <a:t>Thêm người quan sát</a:t>
+            </a:r>
+          </a:p>
+          <a:p>
+            <a:pPr>
+              <a:spcBef>
+                <a:spcPts val="500"/>
+              </a:spcBef>
+              <a:spcAft>
+                <a:spcPts val="0"/>
+              </a:spcAft>
+              <a:buNone/>
+            </a:pPr>
+            <a:r>
+              <a:rPr sz="1850" b="0">
+                <a:solidFill>
+                  <a:srgbClr val="222222"/>
+                </a:solidFill>
+                <a:latin typeface="Roboto Medium"/>
+                <a:ea typeface="Roboto Medium"/>
+                <a:cs typeface="Roboto Medium"/>
+              </a:rPr>
+              <a:t xml:space="preserve">3 agent không có thông tin, chỉ theo dõi và góp ý → số lần cả nhóm đồng ý </a:t>
+            </a:r>
+            <a:r>
+              <a:rPr sz="1850" b="0" i="1">
+                <a:solidFill>
+                  <a:srgbClr val="222222"/>
+                </a:solidFill>
+                <a:latin typeface="Roboto Medium"/>
+                <a:ea typeface="Roboto Medium"/>
+                <a:cs typeface="Roboto Medium"/>
+              </a:rPr>
+              <a:t>sai</a:t>
+            </a:r>
+            <a:r>
+              <a:rPr sz="1850" b="0">
+                <a:solidFill>
+                  <a:srgbClr val="222222"/>
+                </a:solidFill>
+                <a:latin typeface="Roboto Medium"/>
+                <a:ea typeface="Roboto Medium"/>
+                <a:cs typeface="Roboto Medium"/>
+              </a:rPr>
+              <a:t xml:space="preserve"> giảm </a:t>
+            </a:r>
+            <a:r>
+              <a:rPr sz="1850" b="1">
+                <a:solidFill>
+                  <a:srgbClr val="003366"/>
+                </a:solidFill>
+                <a:latin typeface="Roboto Black"/>
+                <a:ea typeface="Roboto Black"/>
+                <a:cs typeface="Roboto Black"/>
+              </a:rPr>
+              <a:t>~90%</a:t>
+            </a:r>
+            <a:r>
+              <a:rPr sz="1850" b="0">
+                <a:solidFill>
+                  <a:srgbClr val="222222"/>
+                </a:solidFill>
+                <a:latin typeface="Roboto Medium"/>
+                <a:ea typeface="Roboto Medium"/>
+                <a:cs typeface="Roboto Medium"/>
+              </a:rPr>
+              <a:t xml:space="preserve">, nhưng số lần chọn đúng </a:t>
+            </a:r>
+            <a:r>
+              <a:rPr sz="1850" b="0" i="1">
+                <a:solidFill>
+                  <a:srgbClr val="222222"/>
+                </a:solidFill>
+                <a:latin typeface="Roboto Medium"/>
+                <a:ea typeface="Roboto Medium"/>
+                <a:cs typeface="Roboto Medium"/>
+              </a:rPr>
+              <a:t>không tăng</a:t>
+            </a:r>
+            <a:r>
+              <a:rPr sz="1850" b="0">
+                <a:solidFill>
+                  <a:srgbClr val="222222"/>
+                </a:solidFill>
+                <a:latin typeface="Roboto Medium"/>
+                <a:ea typeface="Roboto Medium"/>
+                <a:cs typeface="Roboto Medium"/>
+              </a:rPr>
+              <a:t>.</a:t>
+            </a:r>
+          </a:p>
+          <a:p>
+            <a:pPr>
+              <a:spcBef>
+                <a:spcPts val="600"/>
+              </a:spcBef>
+              <a:spcAft>
+                <a:spcPts val="0"/>
+              </a:spcAft>
+              <a:buNone/>
+            </a:pPr>
+            <a:r>
+              <a:rPr sz="1850" b="1">
+                <a:solidFill>
+                  <a:srgbClr val="C00000"/>
+                </a:solidFill>
+                <a:latin typeface="Roboto Black"/>
+                <a:ea typeface="Roboto Black"/>
+                <a:cs typeface="Roboto Black"/>
+              </a:rPr>
+              <a:t>→ Giúp nhóm thận trọng hơn, chưa giúp tìm ra sự thật.</a:t>
+            </a:r>
+          </a:p>
+        </p:txBody>
+      </p:sp>
+      <p:sp>
+        <p:nvSpPr>
+          <p:cNvPr id="27" name="Card 27"/>
+          <p:cNvSpPr/>
+          <p:nvPr/>
+        </p:nvSpPr>
+        <p:spPr>
+          <a:xfrm>
+            <a:off x="6720840" y="914400"/>
+            <a:ext cx="5056632" cy="2057400"/>
+          </a:xfrm>
+          <a:prstGeom prst="rect">
+            <a:avLst/>
+          </a:prstGeom>
+          <a:solidFill>
+            <a:srgbClr val="F3F6FB"/>
+          </a:solidFill>
+          <a:ln w="9525">
+            <a:solidFill>
+              <a:srgbClr val="CFDAE8"/>
+            </a:solidFill>
+          </a:ln>
+          <a:effectLst/>
+        </p:spPr>
+        <p:txBody>
+          <a:bodyPr wrap="square" rtlCol="0" anchor="ctr" lIns="73152" rIns="73152" tIns="36576" bIns="36576"/>
+          <a:lstStyle/>
+          <a:p/>
+        </p:txBody>
+      </p:sp>
+      <p:sp>
+        <p:nvSpPr>
+          <p:cNvPr id="28" name="Card bar 28"/>
+          <p:cNvSpPr/>
+          <p:nvPr/>
+        </p:nvSpPr>
+        <p:spPr>
+          <a:xfrm>
+            <a:off x="6720840" y="914400"/>
+            <a:ext cx="5056632" cy="54864"/>
+          </a:xfrm>
+          <a:prstGeom prst="rect">
+            <a:avLst/>
+          </a:prstGeom>
+          <a:solidFill>
+            <a:srgbClr val="003366"/>
+          </a:solidFill>
+          <a:ln>
+            <a:noFill/>
+          </a:ln>
+          <a:effectLst/>
+        </p:spPr>
+        <p:txBody>
+          <a:bodyPr wrap="square" rtlCol="0" anchor="ctr" lIns="73152" rIns="73152" tIns="36576" bIns="36576"/>
+          <a:lstStyle/>
+          <a:p/>
+        </p:txBody>
+      </p:sp>
+      <p:sp>
+        <p:nvSpPr>
+          <p:cNvPr id="29" name="TextBox 29"/>
+          <p:cNvSpPr txBox="1"/>
+          <p:nvPr/>
+        </p:nvSpPr>
+        <p:spPr>
+          <a:xfrm>
+            <a:off x="6858000" y="1005840"/>
+            <a:ext cx="4782312" cy="1920240"/>
+          </a:xfrm>
+          <a:prstGeom prst="rect">
+            <a:avLst/>
+          </a:prstGeom>
+          <a:noFill/>
+        </p:spPr>
+        <p:txBody>
+          <a:bodyPr wrap="square" anchor="t" lIns="45720" rIns="45720" tIns="18288" bIns="18288"/>
+          <a:lstStyle/>
+          <a:p>
+            <a:pPr>
+              <a:spcBef>
+                <a:spcPts val="0"/>
+              </a:spcBef>
+              <a:spcAft>
+                <a:spcPts val="0"/>
+              </a:spcAft>
+              <a:buNone/>
+            </a:pPr>
+            <a:r>
+              <a:rPr sz="1950" b="1">
+                <a:solidFill>
+                  <a:srgbClr val="003366"/>
+                </a:solidFill>
+                <a:latin typeface="Roboto Black"/>
+                <a:ea typeface="Roboto Black"/>
+                <a:cs typeface="Roboto Black"/>
+              </a:rPr>
+              <a:t>Điểm mạnh</a:t>
+            </a:r>
+          </a:p>
+          <a:p>
+            <a:pPr marL="130350" indent="-130350">
+              <a:spcBef>
+                <a:spcPts val="400"/>
+              </a:spcBef>
+              <a:spcAft>
+                <a:spcPts val="0"/>
+              </a:spcAft>
+              <a:buClr>
+                <a:srgbClr val="C00000"/>
+              </a:buClr>
+              <a:buFont typeface="Arial"/>
+              <a:buChar char="•"/>
+            </a:pPr>
+            <a:r>
+              <a:rPr sz="1650" b="0">
+                <a:solidFill>
+                  <a:srgbClr val="222222"/>
+                </a:solidFill>
+                <a:latin typeface="Roboto Medium"/>
+                <a:ea typeface="Roboto Medium"/>
+                <a:cs typeface="Roboto Medium"/>
+              </a:rPr>
+              <a:t>So sánh có/không nói dối trên cùng câu chuyện → đo đúng tác động.</a:t>
+            </a:r>
+          </a:p>
+          <a:p>
+            <a:pPr marL="130350" indent="-130350">
+              <a:spcBef>
+                <a:spcPts val="300"/>
+              </a:spcBef>
+              <a:spcAft>
+                <a:spcPts val="0"/>
+              </a:spcAft>
+              <a:buClr>
+                <a:srgbClr val="C00000"/>
+              </a:buClr>
+              <a:buFont typeface="Arial"/>
+              <a:buChar char="•"/>
+            </a:pPr>
+            <a:r>
+              <a:rPr sz="1650" b="0">
+                <a:solidFill>
+                  <a:srgbClr val="222222"/>
+                </a:solidFill>
+                <a:latin typeface="Roboto Medium"/>
+                <a:ea typeface="Roboto Medium"/>
+                <a:cs typeface="Roboto Medium"/>
+              </a:rPr>
+              <a:t>Theo dõi được thông tin sai lan qua từng agent.</a:t>
+            </a:r>
+          </a:p>
+        </p:txBody>
+      </p:sp>
+      <p:sp>
+        <p:nvSpPr>
+          <p:cNvPr id="30" name="Card 30"/>
+          <p:cNvSpPr/>
+          <p:nvPr/>
+        </p:nvSpPr>
+        <p:spPr>
+          <a:xfrm>
+            <a:off x="6720840" y="3200400"/>
+            <a:ext cx="5056632" cy="2697480"/>
+          </a:xfrm>
+          <a:prstGeom prst="rect">
+            <a:avLst/>
+          </a:prstGeom>
+          <a:solidFill>
+            <a:srgbClr val="FCF4F4"/>
+          </a:solidFill>
+          <a:ln w="9525">
+            <a:solidFill>
+              <a:srgbClr val="EBCBCB"/>
+            </a:solidFill>
+          </a:ln>
+          <a:effectLst/>
+        </p:spPr>
+        <p:txBody>
+          <a:bodyPr wrap="square" rtlCol="0" anchor="ctr" lIns="73152" rIns="73152" tIns="36576" bIns="36576"/>
+          <a:lstStyle/>
+          <a:p/>
+        </p:txBody>
+      </p:sp>
+      <p:sp>
+        <p:nvSpPr>
+          <p:cNvPr id="31" name="Card bar 31"/>
+          <p:cNvSpPr/>
+          <p:nvPr/>
+        </p:nvSpPr>
+        <p:spPr>
+          <a:xfrm>
+            <a:off x="6720840" y="3200400"/>
+            <a:ext cx="5056632" cy="54864"/>
+          </a:xfrm>
+          <a:prstGeom prst="rect">
+            <a:avLst/>
+          </a:prstGeom>
+          <a:solidFill>
+            <a:srgbClr val="C00000"/>
+          </a:solidFill>
+          <a:ln>
+            <a:noFill/>
+          </a:ln>
+          <a:effectLst/>
+        </p:spPr>
+        <p:txBody>
+          <a:bodyPr wrap="square" rtlCol="0" anchor="ctr" lIns="73152" rIns="73152" tIns="36576" bIns="36576"/>
+          <a:lstStyle/>
+          <a:p/>
+        </p:txBody>
+      </p:sp>
+      <p:sp>
+        <p:nvSpPr>
+          <p:cNvPr id="32" name="TextBox 32"/>
+          <p:cNvSpPr txBox="1"/>
+          <p:nvPr/>
+        </p:nvSpPr>
+        <p:spPr>
+          <a:xfrm>
+            <a:off x="6858000" y="3291840"/>
+            <a:ext cx="4782312" cy="2560320"/>
+          </a:xfrm>
+          <a:prstGeom prst="rect">
+            <a:avLst/>
+          </a:prstGeom>
+          <a:noFill/>
+        </p:spPr>
+        <p:txBody>
+          <a:bodyPr wrap="square" anchor="t" lIns="45720" rIns="45720" tIns="18288" bIns="18288"/>
+          <a:lstStyle/>
+          <a:p>
+            <a:pPr>
+              <a:spcBef>
+                <a:spcPts val="0"/>
+              </a:spcBef>
+              <a:spcAft>
+                <a:spcPts val="0"/>
+              </a:spcAft>
+              <a:buNone/>
+            </a:pPr>
+            <a:r>
+              <a:rPr sz="1950" b="1">
+                <a:solidFill>
+                  <a:srgbClr val="C00000"/>
+                </a:solidFill>
+                <a:latin typeface="Roboto Black"/>
+                <a:ea typeface="Roboto Black"/>
+                <a:cs typeface="Roboto Black"/>
+              </a:rPr>
+              <a:t>Hạn chế</a:t>
+            </a:r>
+          </a:p>
+          <a:p>
+            <a:pPr marL="134300" indent="-134300">
+              <a:spcBef>
+                <a:spcPts val="600"/>
+              </a:spcBef>
+              <a:spcAft>
+                <a:spcPts val="0"/>
+              </a:spcAft>
+              <a:buClr>
+                <a:srgbClr val="C00000"/>
+              </a:buClr>
+              <a:buFont typeface="Arial"/>
+              <a:buChar char="•"/>
+            </a:pPr>
+            <a:r>
+              <a:rPr sz="1700" b="0">
+                <a:solidFill>
+                  <a:srgbClr val="222222"/>
+                </a:solidFill>
+                <a:latin typeface="Roboto Medium"/>
+                <a:ea typeface="Roboto Medium"/>
+                <a:cs typeface="Roboto Medium"/>
+              </a:rPr>
+              <a:t>Chỉ 1 loại bài toán (tìm vị trí đồ vật).</a:t>
+            </a:r>
+          </a:p>
+          <a:p>
+            <a:pPr marL="134300" indent="-134300">
+              <a:spcBef>
+                <a:spcPts val="600"/>
+              </a:spcBef>
+              <a:spcAft>
+                <a:spcPts val="0"/>
+              </a:spcAft>
+              <a:buClr>
+                <a:srgbClr val="C00000"/>
+              </a:buClr>
+              <a:buFont typeface="Arial"/>
+              <a:buChar char="•"/>
+            </a:pPr>
+            <a:r>
+              <a:rPr sz="1700" b="0">
+                <a:solidFill>
+                  <a:srgbClr val="222222"/>
+                </a:solidFill>
+                <a:latin typeface="Roboto Medium"/>
+                <a:ea typeface="Roboto Medium"/>
+                <a:cs typeface="Roboto Medium"/>
+              </a:rPr>
+              <a:t>Các agent dùng cùng một model.</a:t>
+            </a:r>
+          </a:p>
+          <a:p>
+            <a:pPr marL="134300" indent="-134300">
+              <a:spcBef>
+                <a:spcPts val="600"/>
+              </a:spcBef>
+              <a:spcAft>
+                <a:spcPts val="0"/>
+              </a:spcAft>
+              <a:buClr>
+                <a:srgbClr val="C00000"/>
+              </a:buClr>
+              <a:buFont typeface="Arial"/>
+              <a:buChar char="•"/>
+            </a:pPr>
+            <a:r>
+              <a:rPr sz="1700" b="0">
+                <a:solidFill>
+                  <a:srgbClr val="222222"/>
+                </a:solidFill>
+                <a:latin typeface="Roboto Medium"/>
+                <a:ea typeface="Roboto Medium"/>
+                <a:cs typeface="Roboto Medium"/>
+              </a:rPr>
+              <a:t>Chưa đề xuất cách phòng thủ.</a:t>
+            </a:r>
+          </a:p>
+        </p:txBody>
+      </p:sp>
+    </p:spTree>
+  </p:cSld>
+  <p:clrMapOvr>
+    <a:masterClrMapping/>
+  </p:clrMapOvr>
+</p:sld>
+</file>
+
+<file path=ppt/slides/slide31.xml><?xml version="1.0" encoding="utf-8"?>
+<p:sld xmlns:a="http://schemas.openxmlformats.org/drawingml/2006/main" xmlns:p="http://schemas.openxmlformats.org/presentationml/2006/main" xmlns:r="http://schemas.openxmlformats.org/officeDocument/2006/relationships">
+  <p:cSld>
+    <p:spTree>
+      <p:nvGrpSpPr>
+        <p:cNvPr id="1" name=""/>
+        <p:cNvGrpSpPr/>
+        <p:nvPr/>
+      </p:nvGrpSpPr>
+      <p:grpSpPr/>
+      <p:sp>
+        <p:nvSpPr>
+          <p:cNvPr id="2" name="Title"/>
+          <p:cNvSpPr txBox="1"/>
+          <p:nvPr/>
+        </p:nvSpPr>
+        <p:spPr>
+          <a:xfrm>
+            <a:off x="320040" y="64008"/>
+            <a:ext cx="9509760" cy="548640"/>
+          </a:xfrm>
+          <a:prstGeom prst="rect">
+            <a:avLst/>
+          </a:prstGeom>
+          <a:noFill/>
+        </p:spPr>
+        <p:txBody>
+          <a:bodyPr wrap="square" anchor="ctr" lIns="45720" rIns="45720" tIns="18288" bIns="18288"/>
+          <a:lstStyle/>
+          <a:p>
+            <a:pPr>
+              <a:spcBef>
+                <a:spcPts val="0"/>
+              </a:spcBef>
+              <a:buNone/>
+            </a:pPr>
+            <a:r>
+              <a:rPr sz="2200" b="1">
+                <a:solidFill>
+                  <a:srgbClr val="FFFFFF"/>
+                </a:solidFill>
+                <a:latin typeface="Roboto Black"/>
+                <a:ea typeface="Roboto Black"/>
+                <a:cs typeface="Roboto Black"/>
+              </a:rPr>
+              <a:t>MIRAGE và TIDE: hai góc nhìn về an toàn</a:t>
+            </a:r>
+          </a:p>
+        </p:txBody>
+      </p:sp>
+      <p:sp>
+        <p:nvSpPr>
+          <p:cNvPr id="3" name="Section"/>
+          <p:cNvSpPr txBox="1"/>
+          <p:nvPr/>
+        </p:nvSpPr>
+        <p:spPr>
+          <a:xfrm>
+            <a:off x="9784080" y="64008"/>
+            <a:ext cx="2103120" cy="548640"/>
+          </a:xfrm>
+          <a:prstGeom prst="rect">
+            <a:avLst/>
+          </a:prstGeom>
+          <a:noFill/>
+        </p:spPr>
+        <p:txBody>
+          <a:bodyPr wrap="square" anchor="ctr" lIns="45720" rIns="45720" tIns="18288" bIns="18288"/>
+          <a:lstStyle/>
+          <a:p>
+            <a:pPr algn="r">
+              <a:spcBef>
+                <a:spcPts val="0"/>
+              </a:spcBef>
+              <a:buNone/>
+            </a:pPr>
+            <a:r>
+              <a:rPr sz="1100" b="0">
+                <a:solidFill>
+                  <a:srgbClr val="B8C6D4"/>
+                </a:solidFill>
+                <a:latin typeface="Roboto Medium"/>
+                <a:ea typeface="Roboto Medium"/>
+                <a:cs typeface="Roboto Medium"/>
+              </a:rPr>
+              <a:t>2. Safety</a:t>
+            </a:r>
+          </a:p>
+        </p:txBody>
+      </p:sp>
+      <p:sp>
+        <p:nvSpPr>
+          <p:cNvPr id="4" name="Slide number"/>
+          <p:cNvSpPr txBox="1"/>
+          <p:nvPr/>
+        </p:nvSpPr>
+        <p:spPr>
+          <a:xfrm>
+            <a:off x="11155680" y="6199632"/>
+            <a:ext cx="731520" cy="256032"/>
+          </a:xfrm>
+          <a:prstGeom prst="rect">
+            <a:avLst/>
+          </a:prstGeom>
+          <a:noFill/>
+        </p:spPr>
+        <p:txBody>
+          <a:bodyPr wrap="square" anchor="t" lIns="45720" rIns="45720" tIns="18288" bIns="18288"/>
+          <a:lstStyle/>
+          <a:p>
+            <a:pPr algn="r">
+              <a:spcBef>
+                <a:spcPts val="0"/>
+              </a:spcBef>
+              <a:buNone/>
+            </a:pPr>
+            <a:r>
+              <a:rPr sz="1000" b="0">
+                <a:solidFill>
+                  <a:srgbClr val="666666"/>
+                </a:solidFill>
+                <a:latin typeface="Roboto Medium"/>
+                <a:ea typeface="Roboto Medium"/>
+                <a:cs typeface="Roboto Medium"/>
+              </a:rPr>
+              <a:t>16</a:t>
+            </a:r>
+          </a:p>
+        </p:txBody>
+      </p:sp>
+      <p:sp>
+        <p:nvSpPr>
+          <p:cNvPr id="5" name="HUST footer name mask"/>
+          <p:cNvSpPr/>
+          <p:nvPr/>
+        </p:nvSpPr>
+        <p:spPr>
+          <a:xfrm>
+            <a:off x="649224" y="6126480"/>
+            <a:ext cx="3273552" cy="521207"/>
+          </a:xfrm>
+          <a:prstGeom prst="rect">
+            <a:avLst/>
+          </a:prstGeom>
+          <a:solidFill>
+            <a:srgbClr val="FFFFFF"/>
+          </a:solidFill>
+          <a:ln>
+            <a:noFill/>
+          </a:ln>
+          <a:effectLst/>
+        </p:spPr>
+        <p:style>
+          <a:lnRef idx="1">
+            <a:schemeClr val="accent1"/>
+          </a:lnRef>
+          <a:fillRef idx="3">
+            <a:schemeClr val="accent1"/>
+          </a:fillRef>
+          <a:effectRef idx="2">
+            <a:schemeClr val="accent1"/>
+          </a:effectRef>
+          <a:fontRef idx="minor">
+            <a:schemeClr val="lt1"/>
+          </a:fontRef>
+        </p:style>
+        <p:txBody>
+          <a:bodyPr rtlCol="0" anchor="ctr"/>
+          <a:lstStyle/>
+          <a:p/>
+        </p:txBody>
+      </p:sp>
+      <p:sp>
+        <p:nvSpPr>
+          <p:cNvPr id="6" name="HUST footer Vietnamese name"/>
+          <p:cNvSpPr txBox="1"/>
+          <p:nvPr/>
+        </p:nvSpPr>
+        <p:spPr>
+          <a:xfrm>
+            <a:off x="667512" y="6135624"/>
+            <a:ext cx="3236976" cy="256032"/>
+          </a:xfrm>
+          <a:prstGeom prst="rect">
+            <a:avLst/>
+          </a:prstGeom>
+          <a:noFill/>
+        </p:spPr>
+        <p:txBody>
+          <a:bodyPr wrap="square" anchor="t" lIns="0" rIns="0" tIns="0" bIns="0"/>
+          <a:lstStyle/>
+          <a:p>
+            <a:pPr>
+              <a:spcBef>
+                <a:spcPts val="0"/>
+              </a:spcBef>
+              <a:buNone/>
+            </a:pPr>
+            <a:r>
+              <a:rPr sz="1688" b="1">
+                <a:solidFill>
+                  <a:srgbClr val="3F3F3F"/>
+                </a:solidFill>
+                <a:latin typeface="Roboto Black"/>
+                <a:ea typeface="Roboto Black"/>
+                <a:cs typeface="Roboto Black"/>
+              </a:rPr>
+              <a:t>ĐẠI HỌC BÁCH KHOA HÀ NỘI</a:t>
+            </a:r>
+          </a:p>
+        </p:txBody>
+      </p:sp>
+      <p:sp>
+        <p:nvSpPr>
+          <p:cNvPr id="7" name="HUST footer English name"/>
+          <p:cNvSpPr txBox="1"/>
+          <p:nvPr/>
+        </p:nvSpPr>
+        <p:spPr>
+          <a:xfrm>
+            <a:off x="667512" y="6391656"/>
+            <a:ext cx="3236976" cy="219456"/>
+          </a:xfrm>
+          <a:prstGeom prst="rect">
+            <a:avLst/>
+          </a:prstGeom>
+          <a:noFill/>
+        </p:spPr>
+        <p:txBody>
+          <a:bodyPr wrap="square" anchor="t" lIns="0" rIns="0" tIns="0" bIns="0"/>
+          <a:lstStyle/>
+          <a:p>
+            <a:pPr>
+              <a:spcBef>
+                <a:spcPts val="0"/>
+              </a:spcBef>
+              <a:buNone/>
+            </a:pPr>
+            <a:r>
+              <a:rPr sz="1000" b="0">
+                <a:solidFill>
+                  <a:srgbClr val="3F3F3F"/>
+                </a:solidFill>
+                <a:latin typeface="Roboto Medium"/>
+                <a:ea typeface="Roboto Medium"/>
+                <a:cs typeface="Roboto Medium"/>
+              </a:rPr>
+              <a:t>HANOI UNIVERSITY OF SCIENCE AND TECHNOLOGY</a:t>
+            </a:r>
+          </a:p>
+        </p:txBody>
+      </p:sp>
+      <p:sp>
+        <p:nvSpPr>
+          <p:cNvPr id="21" name="Card 21"/>
+          <p:cNvSpPr/>
+          <p:nvPr/>
+        </p:nvSpPr>
+        <p:spPr>
+          <a:xfrm>
+            <a:off x="411480" y="914400"/>
+            <a:ext cx="5545836" cy="3291840"/>
+          </a:xfrm>
+          <a:prstGeom prst="rect">
+            <a:avLst/>
+          </a:prstGeom>
+          <a:solidFill>
+            <a:srgbClr val="F3F6FB"/>
+          </a:solidFill>
+          <a:ln w="9525">
+            <a:solidFill>
+              <a:srgbClr val="CFDAE8"/>
+            </a:solidFill>
+          </a:ln>
+          <a:effectLst/>
+        </p:spPr>
+        <p:txBody>
+          <a:bodyPr wrap="square" rtlCol="0" anchor="ctr" lIns="73152" rIns="73152" tIns="36576" bIns="36576"/>
+          <a:lstStyle/>
+          <a:p/>
+        </p:txBody>
+      </p:sp>
+      <p:sp>
+        <p:nvSpPr>
+          <p:cNvPr id="22" name="Card bar 22"/>
+          <p:cNvSpPr/>
+          <p:nvPr/>
+        </p:nvSpPr>
+        <p:spPr>
+          <a:xfrm>
+            <a:off x="411480" y="914400"/>
+            <a:ext cx="5545836" cy="54864"/>
+          </a:xfrm>
+          <a:prstGeom prst="rect">
+            <a:avLst/>
+          </a:prstGeom>
+          <a:solidFill>
+            <a:srgbClr val="003366"/>
+          </a:solidFill>
+          <a:ln>
+            <a:noFill/>
+          </a:ln>
+          <a:effectLst/>
+        </p:spPr>
+        <p:txBody>
+          <a:bodyPr wrap="square" rtlCol="0" anchor="ctr" lIns="73152" rIns="73152" tIns="36576" bIns="36576"/>
+          <a:lstStyle/>
+          <a:p/>
+        </p:txBody>
+      </p:sp>
+      <p:sp>
+        <p:nvSpPr>
+          <p:cNvPr id="23" name="TextBox 23"/>
+          <p:cNvSpPr txBox="1"/>
+          <p:nvPr/>
+        </p:nvSpPr>
+        <p:spPr>
+          <a:xfrm>
+            <a:off x="594360" y="1024128"/>
+            <a:ext cx="5180076" cy="3108960"/>
+          </a:xfrm>
+          <a:prstGeom prst="rect">
+            <a:avLst/>
+          </a:prstGeom>
+          <a:noFill/>
+        </p:spPr>
+        <p:txBody>
+          <a:bodyPr wrap="square" anchor="t" lIns="45720" rIns="45720" tIns="18288" bIns="18288"/>
+          <a:lstStyle/>
+          <a:p>
+            <a:pPr>
+              <a:spcBef>
+                <a:spcPts val="0"/>
+              </a:spcBef>
+              <a:spcAft>
+                <a:spcPts val="0"/>
+              </a:spcAft>
+              <a:buNone/>
+            </a:pPr>
+            <a:r>
+              <a:rPr sz="2600" b="1">
+                <a:solidFill>
+                  <a:srgbClr val="003366"/>
+                </a:solidFill>
+                <a:latin typeface="Roboto Black"/>
+                <a:ea typeface="Roboto Black"/>
+                <a:cs typeface="Roboto Black"/>
+              </a:rPr>
+              <a:t>MIRAGE</a:t>
+            </a:r>
+          </a:p>
+          <a:p>
+            <a:pPr>
+              <a:spcBef>
+                <a:spcPts val="1300"/>
+              </a:spcBef>
+              <a:spcAft>
+                <a:spcPts val="0"/>
+              </a:spcAft>
+              <a:buNone/>
+            </a:pPr>
+            <a:r>
+              <a:rPr sz="1950" b="1">
+                <a:solidFill>
+                  <a:srgbClr val="003366"/>
+                </a:solidFill>
+                <a:latin typeface="Roboto Black"/>
+                <a:ea typeface="Roboto Black"/>
+                <a:cs typeface="Roboto Black"/>
+              </a:rPr>
+              <a:t>Loại:</a:t>
+            </a:r>
+            <a:r>
+              <a:rPr sz="1950" b="0">
+                <a:solidFill>
+                  <a:srgbClr val="222222"/>
+                </a:solidFill>
+                <a:latin typeface="Roboto Medium"/>
+                <a:ea typeface="Roboto Medium"/>
+                <a:cs typeface="Roboto Medium"/>
+              </a:rPr>
+              <a:t xml:space="preserve"> phương pháp phòng thủ</a:t>
+            </a:r>
+          </a:p>
+          <a:p>
+            <a:pPr>
+              <a:spcBef>
+                <a:spcPts val="1300"/>
+              </a:spcBef>
+              <a:spcAft>
+                <a:spcPts val="0"/>
+              </a:spcAft>
+              <a:buNone/>
+            </a:pPr>
+            <a:r>
+              <a:rPr sz="1950" b="1">
+                <a:solidFill>
+                  <a:srgbClr val="003366"/>
+                </a:solidFill>
+                <a:latin typeface="Roboto Black"/>
+                <a:ea typeface="Roboto Black"/>
+                <a:cs typeface="Roboto Black"/>
+              </a:rPr>
+              <a:t>Mối đe dọa:</a:t>
+            </a:r>
+            <a:r>
+              <a:rPr sz="1950" b="0">
+                <a:solidFill>
+                  <a:srgbClr val="222222"/>
+                </a:solidFill>
+                <a:latin typeface="Roboto Medium"/>
+                <a:ea typeface="Roboto Medium"/>
+                <a:cs typeface="Roboto Medium"/>
+              </a:rPr>
+              <a:t xml:space="preserve"> kẻ tấn công bên ngoài</a:t>
+            </a:r>
+          </a:p>
+          <a:p>
+            <a:pPr>
+              <a:spcBef>
+                <a:spcPts val="1300"/>
+              </a:spcBef>
+              <a:spcAft>
+                <a:spcPts val="0"/>
+              </a:spcAft>
+              <a:buNone/>
+            </a:pPr>
+            <a:r>
+              <a:rPr sz="1950" b="1">
+                <a:solidFill>
+                  <a:srgbClr val="003366"/>
+                </a:solidFill>
+                <a:latin typeface="Roboto Black"/>
+                <a:ea typeface="Roboto Black"/>
+                <a:cs typeface="Roboto Black"/>
+              </a:rPr>
+              <a:t>Bảo vệ:</a:t>
+            </a:r>
+            <a:r>
+              <a:rPr sz="1950" b="0">
+                <a:solidFill>
+                  <a:srgbClr val="222222"/>
+                </a:solidFill>
+                <a:latin typeface="Roboto Medium"/>
+                <a:ea typeface="Roboto Medium"/>
+                <a:cs typeface="Roboto Medium"/>
+              </a:rPr>
+              <a:t xml:space="preserve"> bí mật của topology</a:t>
+            </a:r>
+          </a:p>
+          <a:p>
+            <a:pPr>
+              <a:spcBef>
+                <a:spcPts val="1300"/>
+              </a:spcBef>
+              <a:spcAft>
+                <a:spcPts val="0"/>
+              </a:spcAft>
+              <a:buNone/>
+            </a:pPr>
+            <a:r>
+              <a:rPr sz="1950" b="1">
+                <a:solidFill>
+                  <a:srgbClr val="003366"/>
+                </a:solidFill>
+                <a:latin typeface="Roboto Black"/>
+                <a:ea typeface="Roboto Black"/>
+                <a:cs typeface="Roboto Black"/>
+              </a:rPr>
+              <a:t>Kết quả:</a:t>
+            </a:r>
+            <a:r>
+              <a:rPr sz="1950" b="0">
+                <a:solidFill>
+                  <a:srgbClr val="222222"/>
+                </a:solidFill>
+                <a:latin typeface="Roboto Medium"/>
+                <a:ea typeface="Roboto Medium"/>
+                <a:cs typeface="Roboto Medium"/>
+              </a:rPr>
+              <a:t xml:space="preserve"> AUC tấn công còn 0.64–0.68</a:t>
+            </a:r>
+          </a:p>
+        </p:txBody>
+      </p:sp>
+      <p:sp>
+        <p:nvSpPr>
+          <p:cNvPr id="24" name="Card 24"/>
+          <p:cNvSpPr/>
+          <p:nvPr/>
+        </p:nvSpPr>
+        <p:spPr>
+          <a:xfrm>
+            <a:off x="6231636" y="914400"/>
+            <a:ext cx="5545836" cy="3291840"/>
+          </a:xfrm>
+          <a:prstGeom prst="rect">
+            <a:avLst/>
+          </a:prstGeom>
+          <a:solidFill>
+            <a:srgbClr val="FCF4F4"/>
+          </a:solidFill>
+          <a:ln w="9525">
+            <a:solidFill>
+              <a:srgbClr val="EBCBCB"/>
+            </a:solidFill>
+          </a:ln>
+          <a:effectLst/>
+        </p:spPr>
+        <p:txBody>
+          <a:bodyPr wrap="square" rtlCol="0" anchor="ctr" lIns="73152" rIns="73152" tIns="36576" bIns="36576"/>
+          <a:lstStyle/>
+          <a:p/>
+        </p:txBody>
+      </p:sp>
+      <p:sp>
+        <p:nvSpPr>
+          <p:cNvPr id="25" name="Card bar 25"/>
+          <p:cNvSpPr/>
+          <p:nvPr/>
+        </p:nvSpPr>
+        <p:spPr>
+          <a:xfrm>
+            <a:off x="6231636" y="914400"/>
+            <a:ext cx="5545836" cy="54864"/>
+          </a:xfrm>
+          <a:prstGeom prst="rect">
+            <a:avLst/>
+          </a:prstGeom>
+          <a:solidFill>
+            <a:srgbClr val="C00000"/>
+          </a:solidFill>
+          <a:ln>
+            <a:noFill/>
+          </a:ln>
+          <a:effectLst/>
+        </p:spPr>
+        <p:txBody>
+          <a:bodyPr wrap="square" rtlCol="0" anchor="ctr" lIns="73152" rIns="73152" tIns="36576" bIns="36576"/>
+          <a:lstStyle/>
+          <a:p/>
+        </p:txBody>
+      </p:sp>
+      <p:sp>
+        <p:nvSpPr>
+          <p:cNvPr id="26" name="TextBox 26"/>
+          <p:cNvSpPr txBox="1"/>
+          <p:nvPr/>
+        </p:nvSpPr>
+        <p:spPr>
+          <a:xfrm>
+            <a:off x="6414516" y="1024128"/>
+            <a:ext cx="5180076" cy="3108960"/>
+          </a:xfrm>
+          <a:prstGeom prst="rect">
+            <a:avLst/>
+          </a:prstGeom>
+          <a:noFill/>
+        </p:spPr>
+        <p:txBody>
+          <a:bodyPr wrap="square" anchor="t" lIns="45720" rIns="45720" tIns="18288" bIns="18288"/>
+          <a:lstStyle/>
+          <a:p>
+            <a:pPr>
+              <a:spcBef>
+                <a:spcPts val="0"/>
+              </a:spcBef>
+              <a:spcAft>
+                <a:spcPts val="0"/>
+              </a:spcAft>
+              <a:buNone/>
+            </a:pPr>
+            <a:r>
+              <a:rPr sz="2600" b="1">
+                <a:solidFill>
+                  <a:srgbClr val="C00000"/>
+                </a:solidFill>
+                <a:latin typeface="Roboto Black"/>
+                <a:ea typeface="Roboto Black"/>
+                <a:cs typeface="Roboto Black"/>
+              </a:rPr>
+              <a:t>TIDE</a:t>
+            </a:r>
+          </a:p>
+          <a:p>
+            <a:pPr>
+              <a:spcBef>
+                <a:spcPts val="1300"/>
+              </a:spcBef>
+              <a:spcAft>
+                <a:spcPts val="0"/>
+              </a:spcAft>
+              <a:buNone/>
+            </a:pPr>
+            <a:r>
+              <a:rPr sz="1950" b="1">
+                <a:solidFill>
+                  <a:srgbClr val="003366"/>
+                </a:solidFill>
+                <a:latin typeface="Roboto Black"/>
+                <a:ea typeface="Roboto Black"/>
+                <a:cs typeface="Roboto Black"/>
+              </a:rPr>
+              <a:t>Loại:</a:t>
+            </a:r>
+            <a:r>
+              <a:rPr sz="1950" b="0">
+                <a:solidFill>
+                  <a:srgbClr val="222222"/>
+                </a:solidFill>
+                <a:latin typeface="Roboto Medium"/>
+                <a:ea typeface="Roboto Medium"/>
+                <a:cs typeface="Roboto Medium"/>
+              </a:rPr>
+              <a:t xml:space="preserve"> khung đánh giá</a:t>
+            </a:r>
+          </a:p>
+          <a:p>
+            <a:pPr>
+              <a:spcBef>
+                <a:spcPts val="1300"/>
+              </a:spcBef>
+              <a:spcAft>
+                <a:spcPts val="0"/>
+              </a:spcAft>
+              <a:buNone/>
+            </a:pPr>
+            <a:r>
+              <a:rPr sz="1950" b="1">
+                <a:solidFill>
+                  <a:srgbClr val="003366"/>
+                </a:solidFill>
+                <a:latin typeface="Roboto Black"/>
+                <a:ea typeface="Roboto Black"/>
+                <a:cs typeface="Roboto Black"/>
+              </a:rPr>
+              <a:t>Mối đe dọa:</a:t>
+            </a:r>
+            <a:r>
+              <a:rPr sz="1950" b="0">
+                <a:solidFill>
+                  <a:srgbClr val="222222"/>
+                </a:solidFill>
+                <a:latin typeface="Roboto Medium"/>
+                <a:ea typeface="Roboto Medium"/>
+                <a:cs typeface="Roboto Medium"/>
+              </a:rPr>
+              <a:t xml:space="preserve"> một agent nói dối bên trong</a:t>
+            </a:r>
+          </a:p>
+          <a:p>
+            <a:pPr>
+              <a:spcBef>
+                <a:spcPts val="1300"/>
+              </a:spcBef>
+              <a:spcAft>
+                <a:spcPts val="0"/>
+              </a:spcAft>
+              <a:buNone/>
+            </a:pPr>
+            <a:r>
+              <a:rPr sz="1950" b="1">
+                <a:solidFill>
+                  <a:srgbClr val="003366"/>
+                </a:solidFill>
+                <a:latin typeface="Roboto Black"/>
+                <a:ea typeface="Roboto Black"/>
+                <a:cs typeface="Roboto Black"/>
+              </a:rPr>
+              <a:t>Bảo vệ:</a:t>
+            </a:r>
+            <a:r>
+              <a:rPr sz="1950" b="0">
+                <a:solidFill>
+                  <a:srgbClr val="222222"/>
+                </a:solidFill>
+                <a:latin typeface="Roboto Medium"/>
+                <a:ea typeface="Roboto Medium"/>
+                <a:cs typeface="Roboto Medium"/>
+              </a:rPr>
+              <a:t xml:space="preserve"> kết luận đúng của cả nhóm</a:t>
+            </a:r>
+          </a:p>
+          <a:p>
+            <a:pPr>
+              <a:spcBef>
+                <a:spcPts val="1300"/>
+              </a:spcBef>
+              <a:spcAft>
+                <a:spcPts val="0"/>
+              </a:spcAft>
+              <a:buNone/>
+            </a:pPr>
+            <a:r>
+              <a:rPr sz="1950" b="1">
+                <a:solidFill>
+                  <a:srgbClr val="003366"/>
+                </a:solidFill>
+                <a:latin typeface="Roboto Black"/>
+                <a:ea typeface="Roboto Black"/>
+                <a:cs typeface="Roboto Black"/>
+              </a:rPr>
+              <a:t>Kết quả:</a:t>
+            </a:r>
+            <a:r>
+              <a:rPr sz="1950" b="0">
+                <a:solidFill>
+                  <a:srgbClr val="222222"/>
+                </a:solidFill>
+                <a:latin typeface="Roboto Medium"/>
+                <a:ea typeface="Roboto Medium"/>
+                <a:cs typeface="Roboto Medium"/>
+              </a:rPr>
+              <a:t xml:space="preserve"> chọn đúng 72.5% → 14.2%</a:t>
+            </a:r>
+          </a:p>
+        </p:txBody>
+      </p:sp>
+      <p:sp>
+        <p:nvSpPr>
+          <p:cNvPr id="27" name="Shape 27"/>
+          <p:cNvSpPr/>
+          <p:nvPr/>
+        </p:nvSpPr>
+        <p:spPr>
+          <a:xfrm>
+            <a:off x="411480" y="4434840"/>
+            <a:ext cx="11365992" cy="1463040"/>
+          </a:xfrm>
+          <a:prstGeom prst="rect">
+            <a:avLst/>
+          </a:prstGeom>
+          <a:solidFill>
+            <a:srgbClr val="EEF3FA"/>
+          </a:solidFill>
+          <a:ln>
+            <a:noFill/>
+          </a:ln>
+          <a:effectLst/>
+        </p:spPr>
+        <p:txBody>
+          <a:bodyPr wrap="square" rtlCol="0" anchor="ctr" lIns="182880" rIns="182880" tIns="91440" bIns="91440"/>
+          <a:lstStyle/>
+          <a:p>
+            <a:pPr>
+              <a:spcBef>
+                <a:spcPts val="0"/>
+              </a:spcBef>
+              <a:spcAft>
+                <a:spcPts val="0"/>
+              </a:spcAft>
+              <a:buNone/>
+            </a:pPr>
+            <a:r>
+              <a:rPr sz="2100" b="1">
+                <a:solidFill>
+                  <a:srgbClr val="003366"/>
+                </a:solidFill>
+                <a:latin typeface="Roboto Black"/>
+                <a:ea typeface="Roboto Black"/>
+                <a:cs typeface="Roboto Black"/>
+              </a:rPr>
+              <a:t>Bổ sung cho nhau:</a:t>
+            </a:r>
+            <a:r>
+              <a:rPr sz="2100" b="0">
+                <a:solidFill>
+                  <a:srgbClr val="222222"/>
+                </a:solidFill>
+                <a:latin typeface="Roboto Medium"/>
+                <a:ea typeface="Roboto Medium"/>
+                <a:cs typeface="Roboto Medium"/>
+              </a:rPr>
+              <a:t xml:space="preserve"> TIDE cho thấy thông tin sai đã lọt vào thì thảo luận khó sửa; MIRAGE khiến kẻ tấn công khó biết nên chèn thông tin sai vào agent nào.</a:t>
+            </a:r>
+          </a:p>
+          <a:p>
+            <a:pPr>
+              <a:spcBef>
+                <a:spcPts val="400"/>
+              </a:spcBef>
+              <a:spcAft>
+                <a:spcPts val="0"/>
+              </a:spcAft>
+              <a:buNone/>
+            </a:pPr>
+            <a:r>
+              <a:rPr sz="2100" b="1">
+                <a:solidFill>
+                  <a:srgbClr val="C00000"/>
+                </a:solidFill>
+                <a:latin typeface="Roboto Black"/>
+                <a:ea typeface="Roboto Black"/>
+                <a:cs typeface="Roboto Black"/>
+              </a:rPr>
+              <a:t>Còn thiếu:</a:t>
+            </a:r>
+            <a:r>
+              <a:rPr sz="2100" b="0">
+                <a:solidFill>
+                  <a:srgbClr val="222222"/>
+                </a:solidFill>
+                <a:latin typeface="Roboto Medium"/>
+                <a:ea typeface="Roboto Medium"/>
+                <a:cs typeface="Roboto Medium"/>
+              </a:rPr>
+              <a:t xml:space="preserve"> cách </a:t>
+            </a:r>
+            <a:r>
+              <a:rPr sz="2100" b="0" i="1">
+                <a:solidFill>
+                  <a:srgbClr val="222222"/>
+                </a:solidFill>
+                <a:latin typeface="Roboto Medium"/>
+                <a:ea typeface="Roboto Medium"/>
+                <a:cs typeface="Roboto Medium"/>
+              </a:rPr>
+              <a:t>khôi phục</a:t>
+            </a:r>
+            <a:r>
+              <a:rPr sz="2100" b="0">
+                <a:solidFill>
+                  <a:srgbClr val="222222"/>
+                </a:solidFill>
+                <a:latin typeface="Roboto Medium"/>
+                <a:ea typeface="Roboto Medium"/>
+                <a:cs typeface="Roboto Medium"/>
+              </a:rPr>
+              <a:t xml:space="preserve"> sự thật sau khi hệ thống đã bị tấn công.</a:t>
             </a:r>
           </a:p>
         </p:txBody>
